--- a/presentation/Systematic Evaluation of Signal-to-Image Transformation Pipelines for Vision Transformer-based Sleep Stage Classification - Presentation.pptx
+++ b/presentation/Systematic Evaluation of Signal-to-Image Transformation Pipelines for Vision Transformer-based Sleep Stage Classification - Presentation.pptx
@@ -11111,22 +11111,22 @@
       </p:sp>
       <p:pic>
         <p:nvPicPr>
-          <p:cNvPr id="9" name="Figure 1 pipeline" descr="fig1c.png"/>
+          <p:cNvPr id="11" name="Figure 1 pipeline" descr="new_crop.png"/>
           <p:cNvPicPr>
             <a:picLocks noChangeAspect="1"/>
           </p:cNvPicPr>
           <p:nvPr/>
         </p:nvPicPr>
         <p:blipFill>
-          <a:blip r:embed="rId4"/>
+          <a:blip r:embed="rId3"/>
           <a:stretch>
             <a:fillRect/>
           </a:stretch>
         </p:blipFill>
         <p:spPr>
           <a:xfrm>
-            <a:off x="1931408" y="1508760"/>
-            <a:ext cx="8328877" cy="4023360"/>
+            <a:off x="1931408" y="1543586"/>
+            <a:ext cx="8328877" cy="3953707"/>
           </a:xfrm>
           <a:prstGeom prst="rect">
             <a:avLst/>

--- a/presentation/Systematic Evaluation of Signal-to-Image Transformation Pipelines for Vision Transformer-based Sleep Stage Classification - Presentation.pptx
+++ b/presentation/Systematic Evaluation of Signal-to-Image Transformation Pipelines for Vision Transformer-based Sleep Stage Classification - Presentation.pptx
@@ -5,25 +5,25 @@
     <p:sldMasterId id="2147483648" r:id="rId1"/>
   </p:sldMasterIdLst>
   <p:notesMasterIdLst>
-    <p:notesMasterId r:id="rId5"/>
+    <p:notesMasterId r:id="rId15"/>
   </p:notesMasterIdLst>
   <p:handoutMasterIdLst>
-    <p:handoutMasterId r:id="rId6"/>
+    <p:handoutMasterId r:id="rId16"/>
   </p:handoutMasterIdLst>
   <p:sldIdLst>
     <p:sldId id="256" r:id="rId2"/>
     <p:sldId id="259" r:id="rId3"/>
-    <p:sldId id="261" r:id="rId11"/>
-    <p:sldId id="262" r:id="rId12"/>
-    <p:sldId id="263" r:id="rId13"/>
-    <p:sldId id="264" r:id="rId14"/>
-    <p:sldId id="265" r:id="rId15"/>
-    <p:sldId id="266" r:id="rId16"/>
-    <p:sldId id="267" r:id="rId17"/>
-    <p:sldId id="268" r:id="rId18"/>
-    <p:sldId id="269" r:id="rId19"/>
-    <p:sldId id="270" r:id="rId20"/>
-    <p:sldId id="271" r:id="rId4"/>
+    <p:sldId id="261" r:id="rId4"/>
+    <p:sldId id="262" r:id="rId5"/>
+    <p:sldId id="263" r:id="rId6"/>
+    <p:sldId id="264" r:id="rId7"/>
+    <p:sldId id="265" r:id="rId8"/>
+    <p:sldId id="266" r:id="rId9"/>
+    <p:sldId id="267" r:id="rId10"/>
+    <p:sldId id="268" r:id="rId11"/>
+    <p:sldId id="269" r:id="rId12"/>
+    <p:sldId id="270" r:id="rId13"/>
+    <p:sldId id="271" r:id="rId14"/>
   </p:sldIdLst>
   <p:sldSz cx="12192000" cy="6858000"/>
   <p:notesSz cx="6858000" cy="9144000"/>
@@ -131,8 +131,11 @@
 </file>
 
 <file path=ppt/charts/chart1.xml><?xml version="1.0" encoding="utf-8"?>
-<c:chartSpace xmlns:c="http://schemas.openxmlformats.org/drawingml/2006/chart" xmlns:a="http://schemas.openxmlformats.org/drawingml/2006/main" xmlns:r="http://schemas.openxmlformats.org/officeDocument/2006/relationships">
+<c:chartSpace xmlns:c="http://schemas.openxmlformats.org/drawingml/2006/chart" xmlns:a="http://schemas.openxmlformats.org/drawingml/2006/main" xmlns:r="http://schemas.openxmlformats.org/officeDocument/2006/relationships" xmlns:c16r2="http://schemas.microsoft.com/office/drawing/2015/06/chart">
   <c:date1904 val="0"/>
+  <c:lang val="en-US"/>
+  <c:roundedCorners val="1"/>
+  <c:style val="2"/>
   <c:chart>
     <c:title>
       <c:tx>
@@ -141,7 +144,7 @@
           <a:lstStyle/>
           <a:p>
             <a:r>
-              <a:rPr sz="1800" b="1">
+              <a:rPr lang="en-US" sz="1800" b="1">
                 <a:latin typeface="Arial"/>
               </a:rPr>
               <a:t>Epoch share by sleep stage</a:t>
@@ -149,14 +152,15 @@
           </a:p>
         </c:rich>
       </c:tx>
-      <c:layout/>
       <c:overlay val="0"/>
     </c:title>
-    <c:autoTitleDeleted val="1"/>
+    <c:autoTitleDeleted val="0"/>
     <c:plotArea>
+      <c:layout/>
       <c:barChart>
         <c:barDir val="col"/>
         <c:grouping val="clustered"/>
+        <c:varyColors val="1"/>
         <c:ser>
           <c:idx val="0"/>
           <c:order val="0"/>
@@ -176,54 +180,125 @@
               <a:srgbClr val="6A2C91"/>
             </a:solidFill>
           </c:spPr>
+          <c:invertIfNegative val="1"/>
           <c:dPt>
             <c:idx val="0"/>
+            <c:invertIfNegative val="1"/>
+            <c:bubble3D val="0"/>
             <c:spPr>
               <a:solidFill>
                 <a:srgbClr val="A76FC9"/>
               </a:solidFill>
             </c:spPr>
+            <c:extLst>
+              <c:ext xmlns:c16="http://schemas.microsoft.com/office/drawing/2014/chart" uri="{C3380CC4-5D6E-409C-BE32-E72D297353CC}">
+                <c16:uniqueId val="{00000001-D7B6-42D6-953E-DD38759F4724}"/>
+              </c:ext>
+            </c:extLst>
           </c:dPt>
           <c:dPt>
             <c:idx val="1"/>
+            <c:invertIfNegative val="1"/>
+            <c:bubble3D val="0"/>
             <c:spPr>
               <a:solidFill>
                 <a:srgbClr val="A76FC9"/>
               </a:solidFill>
             </c:spPr>
+            <c:extLst>
+              <c:ext xmlns:c16="http://schemas.microsoft.com/office/drawing/2014/chart" uri="{C3380CC4-5D6E-409C-BE32-E72D297353CC}">
+                <c16:uniqueId val="{00000003-D7B6-42D6-953E-DD38759F4724}"/>
+              </c:ext>
+            </c:extLst>
           </c:dPt>
           <c:dPt>
             <c:idx val="2"/>
-            <c:spPr>
-              <a:solidFill>
-                <a:srgbClr val="6A2C91"/>
-              </a:solidFill>
-            </c:spPr>
+            <c:invertIfNegative val="1"/>
+            <c:bubble3D val="0"/>
+            <c:extLst>
+              <c:ext xmlns:c16="http://schemas.microsoft.com/office/drawing/2014/chart" uri="{C3380CC4-5D6E-409C-BE32-E72D297353CC}">
+                <c16:uniqueId val="{00000005-D7B6-42D6-953E-DD38759F4724}"/>
+              </c:ext>
+            </c:extLst>
           </c:dPt>
           <c:dPt>
             <c:idx val="3"/>
+            <c:invertIfNegative val="1"/>
+            <c:bubble3D val="0"/>
             <c:spPr>
               <a:solidFill>
                 <a:srgbClr val="A76FC9"/>
               </a:solidFill>
             </c:spPr>
+            <c:extLst>
+              <c:ext xmlns:c16="http://schemas.microsoft.com/office/drawing/2014/chart" uri="{C3380CC4-5D6E-409C-BE32-E72D297353CC}">
+                <c16:uniqueId val="{00000007-D7B6-42D6-953E-DD38759F4724}"/>
+              </c:ext>
+            </c:extLst>
           </c:dPt>
           <c:dPt>
             <c:idx val="4"/>
+            <c:invertIfNegative val="1"/>
+            <c:bubble3D val="0"/>
             <c:spPr>
               <a:solidFill>
                 <a:srgbClr val="A76FC9"/>
               </a:solidFill>
             </c:spPr>
+            <c:extLst>
+              <c:ext xmlns:c16="http://schemas.microsoft.com/office/drawing/2014/chart" uri="{C3380CC4-5D6E-409C-BE32-E72D297353CC}">
+                <c16:uniqueId val="{00000009-D7B6-42D6-953E-DD38759F4724}"/>
+              </c:ext>
+            </c:extLst>
           </c:dPt>
           <c:dPt>
             <c:idx val="5"/>
+            <c:invertIfNegative val="1"/>
+            <c:bubble3D val="0"/>
             <c:spPr>
               <a:solidFill>
                 <a:srgbClr val="A76FC9"/>
               </a:solidFill>
             </c:spPr>
+            <c:extLst>
+              <c:ext xmlns:c16="http://schemas.microsoft.com/office/drawing/2014/chart" uri="{C3380CC4-5D6E-409C-BE32-E72D297353CC}">
+                <c16:uniqueId val="{0000000B-D7B6-42D6-953E-DD38759F4724}"/>
+              </c:ext>
+            </c:extLst>
           </c:dPt>
+          <c:dLbls>
+            <c:numFmt formatCode="0.0&quot;%&quot;" sourceLinked="0"/>
+            <c:spPr>
+              <a:noFill/>
+              <a:ln>
+                <a:noFill/>
+              </a:ln>
+              <a:effectLst/>
+            </c:spPr>
+            <c:txPr>
+              <a:bodyPr/>
+              <a:lstStyle/>
+              <a:p>
+                <a:pPr>
+                  <a:defRPr sz="1600" b="1"/>
+                </a:pPr>
+                <a:endParaRPr lang="en-US"/>
+              </a:p>
+            </c:txPr>
+            <c:dLblPos val="outEnd"/>
+            <c:showLegendKey val="0"/>
+            <c:showVal val="1"/>
+            <c:showCatName val="0"/>
+            <c:showSerName val="0"/>
+            <c:showPercent val="0"/>
+            <c:showBubbleSize val="0"/>
+            <c:showLeaderLines val="0"/>
+            <c:extLst>
+              <c:ext xmlns:c15="http://schemas.microsoft.com/office/drawing/2012/chart" uri="{CE6537A1-D6FC-4f65-9D91-7224C49458BB}">
+                <c15:showLeaderLines val="0"/>
+              </c:ext>
+            </c:extLst>
+          </c:dLbls>
           <c:cat>
             <c:strRef>
               <c:f>Sheet1!$A$2:$A$7</c:f>
@@ -277,18 +352,22 @@
               </c:numCache>
             </c:numRef>
           </c:val>
+          <c:extLst>
+            <c:ext xmlns:c14="http://schemas.microsoft.com/office/drawing/2007/8/2/chart" uri="{6F2FDCE9-48DA-4B69-8628-5D25D57E5C99}">
+              <c14:invertSolidFillFmt>
+                <c14:spPr xmlns:c14="http://schemas.microsoft.com/office/drawing/2007/8/2/chart">
+                  <a:solidFill>
+                    <a:srgbClr val="FFFFFF"/>
+                  </a:solidFill>
+                </c14:spPr>
+              </c14:invertSolidFillFmt>
+            </c:ext>
+            <c:ext xmlns:c16="http://schemas.microsoft.com/office/drawing/2014/chart" uri="{C3380CC4-5D6E-409C-BE32-E72D297353CC}">
+              <c16:uniqueId val="{0000000C-D7B6-42D6-953E-DD38759F4724}"/>
+            </c:ext>
+          </c:extLst>
         </c:ser>
         <c:dLbls>
-          <c:numFmt formatCode="0.0&quot;%&quot;" sourceLinked="0"/>
-          <c:txPr>
-            <a:bodyPr/>
-            <a:lstStyle/>
-            <a:p>
-              <a:pPr>
-                <a:defRPr sz="1600" b="1"/>
-              </a:pPr>
-            </a:p>
-          </c:txPr>
           <c:dLblPos val="outEnd"/>
           <c:showLegendKey val="0"/>
           <c:showVal val="1"/>
@@ -296,7 +375,6 @@
           <c:showSerName val="0"/>
           <c:showPercent val="0"/>
           <c:showBubbleSize val="0"/>
-          <c:showLeaderLines val="1"/>
         </c:dLbls>
         <c:gapWidth val="60"/>
         <c:axId val="-2068027336"/>
@@ -309,6 +387,7 @@
         </c:scaling>
         <c:delete val="0"/>
         <c:axPos val="b"/>
+        <c:numFmt formatCode="General" sourceLinked="0"/>
         <c:majorTickMark val="out"/>
         <c:minorTickMark val="none"/>
         <c:tickLblPos val="nextTo"/>
@@ -330,6 +409,7 @@
                 </a:solidFill>
               </a:defRPr>
             </a:pPr>
+            <a:endParaRPr lang="en-US"/>
           </a:p>
         </c:txPr>
         <c:crossAx val="-2113994440"/>
@@ -342,8 +422,9 @@
       <c:valAx>
         <c:axId val="-2113994440"/>
         <c:scaling>
-          <c:max val="60.0"/>
-          <c:min val="0.0"/>
+          <c:orientation val="minMax"/>
+          <c:max val="60"/>
+          <c:min val="0"/>
         </c:scaling>
         <c:delete val="0"/>
         <c:axPos val="l"/>
@@ -356,6 +437,7 @@
             </a:ln>
           </c:spPr>
         </c:majorGridlines>
+        <c:numFmt formatCode="General" sourceLinked="1"/>
         <c:majorTickMark val="out"/>
         <c:minorTickMark val="none"/>
         <c:tickLblPos val="nextTo"/>
@@ -375,14 +457,18 @@
                 </a:solidFill>
               </a:defRPr>
             </a:pPr>
+            <a:endParaRPr lang="en-US"/>
           </a:p>
         </c:txPr>
         <c:crossAx val="-2068027336"/>
         <c:crosses val="autoZero"/>
-        <c:majorUnit val="20.0"/>
+        <c:crossBetween val="between"/>
+        <c:majorUnit val="20"/>
       </c:valAx>
     </c:plotArea>
+    <c:plotVisOnly val="1"/>
     <c:dispBlanksAs val="gap"/>
+    <c:showDLblsOverMax val="1"/>
   </c:chart>
   <c:txPr>
     <a:bodyPr/>
@@ -403,14 +489,19 @@
 </file>
 
 <file path=ppt/charts/chart2.xml><?xml version="1.0" encoding="utf-8"?>
-<c:chartSpace xmlns:c="http://schemas.openxmlformats.org/drawingml/2006/chart" xmlns:a="http://schemas.openxmlformats.org/drawingml/2006/main" xmlns:r="http://schemas.openxmlformats.org/officeDocument/2006/relationships">
+<c:chartSpace xmlns:c="http://schemas.openxmlformats.org/drawingml/2006/chart" xmlns:a="http://schemas.openxmlformats.org/drawingml/2006/main" xmlns:r="http://schemas.openxmlformats.org/officeDocument/2006/relationships" xmlns:c16r2="http://schemas.microsoft.com/office/drawing/2015/06/chart">
   <c:date1904 val="0"/>
+  <c:lang val="en-US"/>
+  <c:roundedCorners val="1"/>
+  <c:style val="2"/>
   <c:chart>
     <c:autoTitleDeleted val="1"/>
     <c:plotArea>
+      <c:layout/>
       <c:barChart>
         <c:barDir val="col"/>
         <c:grouping val="clustered"/>
+        <c:varyColors val="1"/>
         <c:ser>
           <c:idx val="0"/>
           <c:order val="0"/>
@@ -430,38 +521,95 @@
               <a:srgbClr val="6A2C91"/>
             </a:solidFill>
           </c:spPr>
+          <c:invertIfNegative val="1"/>
           <c:dPt>
             <c:idx val="0"/>
-            <c:spPr>
-              <a:solidFill>
-                <a:srgbClr val="6A2C91"/>
-              </a:solidFill>
-            </c:spPr>
+            <c:invertIfNegative val="1"/>
+            <c:bubble3D val="0"/>
+            <c:extLst>
+              <c:ext xmlns:c16="http://schemas.microsoft.com/office/drawing/2014/chart" uri="{C3380CC4-5D6E-409C-BE32-E72D297353CC}">
+                <c16:uniqueId val="{00000001-E31A-449E-9C4D-97A31F60BE4C}"/>
+              </c:ext>
+            </c:extLst>
           </c:dPt>
           <c:dPt>
             <c:idx val="1"/>
+            <c:invertIfNegative val="1"/>
+            <c:bubble3D val="0"/>
             <c:spPr>
               <a:solidFill>
                 <a:srgbClr val="B8B8C0"/>
               </a:solidFill>
             </c:spPr>
+            <c:extLst>
+              <c:ext xmlns:c16="http://schemas.microsoft.com/office/drawing/2014/chart" uri="{C3380CC4-5D6E-409C-BE32-E72D297353CC}">
+                <c16:uniqueId val="{00000003-E31A-449E-9C4D-97A31F60BE4C}"/>
+              </c:ext>
+            </c:extLst>
           </c:dPt>
           <c:dPt>
             <c:idx val="2"/>
+            <c:invertIfNegative val="1"/>
+            <c:bubble3D val="0"/>
             <c:spPr>
               <a:solidFill>
                 <a:srgbClr val="B8B8C0"/>
               </a:solidFill>
             </c:spPr>
+            <c:extLst>
+              <c:ext xmlns:c16="http://schemas.microsoft.com/office/drawing/2014/chart" uri="{C3380CC4-5D6E-409C-BE32-E72D297353CC}">
+                <c16:uniqueId val="{00000005-E31A-449E-9C4D-97A31F60BE4C}"/>
+              </c:ext>
+            </c:extLst>
           </c:dPt>
           <c:dPt>
             <c:idx val="3"/>
+            <c:invertIfNegative val="1"/>
+            <c:bubble3D val="0"/>
             <c:spPr>
               <a:solidFill>
                 <a:srgbClr val="B8B8C0"/>
               </a:solidFill>
             </c:spPr>
+            <c:extLst>
+              <c:ext xmlns:c16="http://schemas.microsoft.com/office/drawing/2014/chart" uri="{C3380CC4-5D6E-409C-BE32-E72D297353CC}">
+                <c16:uniqueId val="{00000007-E31A-449E-9C4D-97A31F60BE4C}"/>
+              </c:ext>
+            </c:extLst>
           </c:dPt>
+          <c:dLbls>
+            <c:numFmt formatCode="0.0" sourceLinked="0"/>
+            <c:spPr>
+              <a:noFill/>
+              <a:ln>
+                <a:noFill/>
+              </a:ln>
+              <a:effectLst/>
+            </c:spPr>
+            <c:txPr>
+              <a:bodyPr/>
+              <a:lstStyle/>
+              <a:p>
+                <a:pPr>
+                  <a:defRPr sz="1800" b="1"/>
+                </a:pPr>
+                <a:endParaRPr lang="en-US"/>
+              </a:p>
+            </c:txPr>
+            <c:dLblPos val="outEnd"/>
+            <c:showLegendKey val="0"/>
+            <c:showVal val="1"/>
+            <c:showCatName val="0"/>
+            <c:showSerName val="0"/>
+            <c:showPercent val="0"/>
+            <c:showBubbleSize val="0"/>
+            <c:showLeaderLines val="0"/>
+            <c:extLst>
+              <c:ext xmlns:c15="http://schemas.microsoft.com/office/drawing/2012/chart" uri="{CE6537A1-D6FC-4f65-9D91-7224C49458BB}">
+                <c15:showLeaderLines val="0"/>
+              </c:ext>
+            </c:extLst>
+          </c:dLbls>
           <c:cat>
             <c:strRef>
               <c:f>Sheet1!$A$2:$A$5</c:f>
@@ -498,23 +646,27 @@
                   <c:v>75.8</c:v>
                 </c:pt>
                 <c:pt idx="3">
-                  <c:v>74.1</c:v>
+                  <c:v>74.099999999999994</c:v>
                 </c:pt>
               </c:numCache>
             </c:numRef>
           </c:val>
+          <c:extLst>
+            <c:ext xmlns:c14="http://schemas.microsoft.com/office/drawing/2007/8/2/chart" uri="{6F2FDCE9-48DA-4B69-8628-5D25D57E5C99}">
+              <c14:invertSolidFillFmt>
+                <c14:spPr xmlns:c14="http://schemas.microsoft.com/office/drawing/2007/8/2/chart">
+                  <a:solidFill>
+                    <a:srgbClr val="FFFFFF"/>
+                  </a:solidFill>
+                </c14:spPr>
+              </c14:invertSolidFillFmt>
+            </c:ext>
+            <c:ext xmlns:c16="http://schemas.microsoft.com/office/drawing/2014/chart" uri="{C3380CC4-5D6E-409C-BE32-E72D297353CC}">
+              <c16:uniqueId val="{00000008-E31A-449E-9C4D-97A31F60BE4C}"/>
+            </c:ext>
+          </c:extLst>
         </c:ser>
         <c:dLbls>
-          <c:numFmt formatCode="0.0" sourceLinked="0"/>
-          <c:txPr>
-            <a:bodyPr/>
-            <a:lstStyle/>
-            <a:p>
-              <a:pPr>
-                <a:defRPr sz="1800" b="1"/>
-              </a:pPr>
-            </a:p>
-          </c:txPr>
           <c:dLblPos val="outEnd"/>
           <c:showLegendKey val="0"/>
           <c:showVal val="1"/>
@@ -522,7 +674,6 @@
           <c:showSerName val="0"/>
           <c:showPercent val="0"/>
           <c:showBubbleSize val="0"/>
-          <c:showLeaderLines val="1"/>
         </c:dLbls>
         <c:gapWidth val="60"/>
         <c:axId val="-2068027336"/>
@@ -535,6 +686,7 @@
         </c:scaling>
         <c:delete val="0"/>
         <c:axPos val="b"/>
+        <c:numFmt formatCode="General" sourceLinked="0"/>
         <c:majorTickMark val="out"/>
         <c:minorTickMark val="none"/>
         <c:tickLblPos val="nextTo"/>
@@ -556,6 +708,7 @@
                 </a:solidFill>
               </a:defRPr>
             </a:pPr>
+            <a:endParaRPr lang="en-US"/>
           </a:p>
         </c:txPr>
         <c:crossAx val="-2113994440"/>
@@ -568,8 +721,9 @@
       <c:valAx>
         <c:axId val="-2113994440"/>
         <c:scaling>
-          <c:max val="82.0"/>
-          <c:min val="60.0"/>
+          <c:orientation val="minMax"/>
+          <c:max val="82"/>
+          <c:min val="60"/>
         </c:scaling>
         <c:delete val="0"/>
         <c:axPos val="l"/>
@@ -582,6 +736,7 @@
             </a:ln>
           </c:spPr>
         </c:majorGridlines>
+        <c:numFmt formatCode="General" sourceLinked="1"/>
         <c:majorTickMark val="out"/>
         <c:minorTickMark val="none"/>
         <c:tickLblPos val="nextTo"/>
@@ -601,14 +756,18 @@
                 </a:solidFill>
               </a:defRPr>
             </a:pPr>
+            <a:endParaRPr lang="en-US"/>
           </a:p>
         </c:txPr>
         <c:crossAx val="-2068027336"/>
         <c:crosses val="autoZero"/>
-        <c:majorUnit val="5.0"/>
+        <c:crossBetween val="between"/>
+        <c:majorUnit val="5"/>
       </c:valAx>
     </c:plotArea>
+    <c:plotVisOnly val="1"/>
     <c:dispBlanksAs val="gap"/>
+    <c:showDLblsOverMax val="1"/>
   </c:chart>
   <c:txPr>
     <a:bodyPr/>
@@ -629,11 +788,15 @@
 </file>
 
 <file path=ppt/charts/chart3.xml><?xml version="1.0" encoding="utf-8"?>
-<c:chartSpace xmlns:c="http://schemas.openxmlformats.org/drawingml/2006/chart" xmlns:a="http://schemas.openxmlformats.org/drawingml/2006/main" xmlns:r="http://schemas.openxmlformats.org/officeDocument/2006/relationships">
+<c:chartSpace xmlns:c="http://schemas.openxmlformats.org/drawingml/2006/chart" xmlns:a="http://schemas.openxmlformats.org/drawingml/2006/main" xmlns:r="http://schemas.openxmlformats.org/officeDocument/2006/relationships" xmlns:c16r2="http://schemas.microsoft.com/office/drawing/2015/06/chart">
   <c:date1904 val="0"/>
+  <c:lang val="en-US"/>
+  <c:roundedCorners val="1"/>
+  <c:style val="2"/>
   <c:chart>
     <c:autoTitleDeleted val="1"/>
     <c:plotArea>
+      <c:layout/>
       <c:lineChart>
         <c:grouping val="standard"/>
         <c:varyColors val="0"/>
@@ -659,6 +822,7 @@
             </a:ln>
           </c:spPr>
           <c:marker>
+            <c:symbol val="diamond"/>
             <c:size val="9"/>
             <c:spPr>
               <a:solidFill>
@@ -671,6 +835,39 @@
               </a:ln>
             </c:spPr>
           </c:marker>
+          <c:dLbls>
+            <c:numFmt formatCode="0.0" sourceLinked="0"/>
+            <c:spPr>
+              <a:noFill/>
+              <a:ln>
+                <a:noFill/>
+              </a:ln>
+              <a:effectLst/>
+            </c:spPr>
+            <c:txPr>
+              <a:bodyPr/>
+              <a:lstStyle/>
+              <a:p>
+                <a:pPr>
+                  <a:defRPr sz="1600" b="1"/>
+                </a:pPr>
+                <a:endParaRPr lang="en-US"/>
+              </a:p>
+            </c:txPr>
+            <c:dLblPos val="t"/>
+            <c:showLegendKey val="0"/>
+            <c:showVal val="1"/>
+            <c:showCatName val="0"/>
+            <c:showSerName val="0"/>
+            <c:showPercent val="0"/>
+            <c:showBubbleSize val="0"/>
+            <c:showLeaderLines val="0"/>
+            <c:extLst>
+              <c:ext xmlns:c15="http://schemas.microsoft.com/office/drawing/2012/chart" uri="{CE6537A1-D6FC-4f65-9D91-7224C49458BB}">
+                <c15:showLeaderLines val="0"/>
+              </c:ext>
+            </c:extLst>
+          </c:dLbls>
           <c:cat>
             <c:strRef>
               <c:f>Sheet1!$A$2:$A$5</c:f>
@@ -698,13 +895,13 @@
                 <c:formatCode>General</c:formatCode>
                 <c:ptCount val="4"/>
                 <c:pt idx="0">
-                  <c:v>75.9</c:v>
+                  <c:v>75.900000000000006</c:v>
                 </c:pt>
                 <c:pt idx="1">
                   <c:v>80.3</c:v>
                 </c:pt>
                 <c:pt idx="2">
-                  <c:v>79.1</c:v>
+                  <c:v>79.099999999999994</c:v>
                 </c:pt>
                 <c:pt idx="3">
                   <c:v>78.5</c:v>
@@ -713,6 +910,11 @@
             </c:numRef>
           </c:val>
           <c:smooth val="0"/>
+          <c:extLst>
+            <c:ext xmlns:c16="http://schemas.microsoft.com/office/drawing/2014/chart" uri="{C3380CC4-5D6E-409C-BE32-E72D297353CC}">
+              <c16:uniqueId val="{00000000-B7BB-46E3-88D1-FEBADA951150}"/>
+            </c:ext>
+          </c:extLst>
         </c:ser>
         <c:ser>
           <c:idx val="1"/>
@@ -736,6 +938,7 @@
             </a:ln>
           </c:spPr>
           <c:marker>
+            <c:symbol val="square"/>
             <c:size val="9"/>
             <c:spPr>
               <a:solidFill>
@@ -750,6 +953,13 @@
           </c:marker>
           <c:dLbls>
             <c:numFmt formatCode="0.0" sourceLinked="0"/>
+            <c:spPr>
+              <a:noFill/>
+              <a:ln>
+                <a:noFill/>
+              </a:ln>
+              <a:effectLst/>
+            </c:spPr>
             <c:txPr>
               <a:bodyPr/>
               <a:lstStyle/>
@@ -757,6 +967,7 @@
                 <a:pPr>
                   <a:defRPr sz="1600" b="1"/>
                 </a:pPr>
+                <a:endParaRPr lang="en-US"/>
               </a:p>
             </c:txPr>
             <c:dLblPos val="b"/>
@@ -766,7 +977,12 @@
             <c:showSerName val="0"/>
             <c:showPercent val="0"/>
             <c:showBubbleSize val="0"/>
-            <c:showLeaderLines val="1"/>
+            <c:showLeaderLines val="0"/>
+            <c:extLst>
+              <c:ext xmlns:c15="http://schemas.microsoft.com/office/drawing/2012/chart" uri="{CE6537A1-D6FC-4f65-9D91-7224C49458BB}">
+                <c15:showLeaderLines val="0"/>
+              </c:ext>
+            </c:extLst>
           </c:dLbls>
           <c:cat>
             <c:strRef>
@@ -810,18 +1026,13 @@
             </c:numRef>
           </c:val>
           <c:smooth val="0"/>
+          <c:extLst>
+            <c:ext xmlns:c16="http://schemas.microsoft.com/office/drawing/2014/chart" uri="{C3380CC4-5D6E-409C-BE32-E72D297353CC}">
+              <c16:uniqueId val="{00000001-B7BB-46E3-88D1-FEBADA951150}"/>
+            </c:ext>
+          </c:extLst>
         </c:ser>
         <c:dLbls>
-          <c:numFmt formatCode="0.0" sourceLinked="0"/>
-          <c:txPr>
-            <a:bodyPr/>
-            <a:lstStyle/>
-            <a:p>
-              <a:pPr>
-                <a:defRPr sz="1600" b="1"/>
-              </a:pPr>
-            </a:p>
-          </c:txPr>
           <c:dLblPos val="t"/>
           <c:showLegendKey val="0"/>
           <c:showVal val="1"/>
@@ -829,7 +1040,6 @@
           <c:showSerName val="0"/>
           <c:showPercent val="0"/>
           <c:showBubbleSize val="0"/>
-          <c:showLeaderLines val="1"/>
         </c:dLbls>
         <c:marker val="1"/>
         <c:smooth val="0"/>
@@ -843,6 +1053,7 @@
         </c:scaling>
         <c:delete val="0"/>
         <c:axPos val="b"/>
+        <c:numFmt formatCode="General" sourceLinked="0"/>
         <c:majorTickMark val="out"/>
         <c:minorTickMark val="none"/>
         <c:tickLblPos val="nextTo"/>
@@ -864,6 +1075,7 @@
                 </a:solidFill>
               </a:defRPr>
             </a:pPr>
+            <a:endParaRPr lang="en-US"/>
           </a:p>
         </c:txPr>
         <c:crossAx val="2140495176"/>
@@ -876,8 +1088,9 @@
       <c:valAx>
         <c:axId val="2140495176"/>
         <c:scaling>
-          <c:max val="82.0"/>
-          <c:min val="70.0"/>
+          <c:orientation val="minMax"/>
+          <c:max val="82"/>
+          <c:min val="70"/>
         </c:scaling>
         <c:delete val="0"/>
         <c:axPos val="l"/>
@@ -890,6 +1103,7 @@
             </a:ln>
           </c:spPr>
         </c:majorGridlines>
+        <c:numFmt formatCode="General" sourceLinked="1"/>
         <c:majorTickMark val="out"/>
         <c:minorTickMark val="none"/>
         <c:tickLblPos val="nextTo"/>
@@ -909,16 +1123,17 @@
                 </a:solidFill>
               </a:defRPr>
             </a:pPr>
+            <a:endParaRPr lang="en-US"/>
           </a:p>
         </c:txPr>
         <c:crossAx val="2118791784"/>
         <c:crosses val="autoZero"/>
-        <c:majorUnit val="4.0"/>
+        <c:crossBetween val="between"/>
+        <c:majorUnit val="4"/>
       </c:valAx>
     </c:plotArea>
     <c:legend>
       <c:legendPos val="b"/>
-      <c:layout/>
       <c:overlay val="0"/>
       <c:txPr>
         <a:bodyPr/>
@@ -927,6 +1142,7 @@
           <a:pPr>
             <a:defRPr sz="1800"/>
           </a:pPr>
+          <a:endParaRPr lang="en-US"/>
         </a:p>
       </c:txPr>
     </c:legend>
@@ -953,14 +1169,19 @@
 </file>
 
 <file path=ppt/charts/chart4.xml><?xml version="1.0" encoding="utf-8"?>
-<c:chartSpace xmlns:c="http://schemas.openxmlformats.org/drawingml/2006/chart" xmlns:a="http://schemas.openxmlformats.org/drawingml/2006/main" xmlns:r="http://schemas.openxmlformats.org/officeDocument/2006/relationships">
+<c:chartSpace xmlns:c="http://schemas.openxmlformats.org/drawingml/2006/chart" xmlns:a="http://schemas.openxmlformats.org/drawingml/2006/main" xmlns:r="http://schemas.openxmlformats.org/officeDocument/2006/relationships" xmlns:c16r2="http://schemas.microsoft.com/office/drawing/2015/06/chart">
   <c:date1904 val="0"/>
+  <c:lang val="en-US"/>
+  <c:roundedCorners val="1"/>
+  <c:style val="2"/>
   <c:chart>
     <c:autoTitleDeleted val="1"/>
     <c:plotArea>
+      <c:layout/>
       <c:barChart>
         <c:barDir val="col"/>
         <c:grouping val="clustered"/>
+        <c:varyColors val="1"/>
         <c:ser>
           <c:idx val="0"/>
           <c:order val="0"/>
@@ -980,6 +1201,40 @@
               <a:srgbClr val="6A2C91"/>
             </a:solidFill>
           </c:spPr>
+          <c:invertIfNegative val="1"/>
+          <c:dLbls>
+            <c:numFmt formatCode="0.0" sourceLinked="0"/>
+            <c:spPr>
+              <a:noFill/>
+              <a:ln>
+                <a:noFill/>
+              </a:ln>
+              <a:effectLst/>
+            </c:spPr>
+            <c:txPr>
+              <a:bodyPr/>
+              <a:lstStyle/>
+              <a:p>
+                <a:pPr>
+                  <a:defRPr sz="1800" b="1"/>
+                </a:pPr>
+                <a:endParaRPr lang="en-US"/>
+              </a:p>
+            </c:txPr>
+            <c:dLblPos val="outEnd"/>
+            <c:showLegendKey val="0"/>
+            <c:showVal val="1"/>
+            <c:showCatName val="0"/>
+            <c:showSerName val="0"/>
+            <c:showPercent val="0"/>
+            <c:showBubbleSize val="0"/>
+            <c:showLeaderLines val="0"/>
+            <c:extLst>
+              <c:ext xmlns:c15="http://schemas.microsoft.com/office/drawing/2012/chart" uri="{CE6537A1-D6FC-4f65-9D91-7224C49458BB}">
+                <c15:showLeaderLines val="0"/>
+              </c:ext>
+            </c:extLst>
+          </c:dLbls>
           <c:cat>
             <c:strRef>
               <c:f>Sheet1!$A$2:$A$3</c:f>
@@ -1009,6 +1264,20 @@
               </c:numCache>
             </c:numRef>
           </c:val>
+          <c:extLst>
+            <c:ext xmlns:c14="http://schemas.microsoft.com/office/drawing/2007/8/2/chart" uri="{6F2FDCE9-48DA-4B69-8628-5D25D57E5C99}">
+              <c14:invertSolidFillFmt>
+                <c14:spPr xmlns:c14="http://schemas.microsoft.com/office/drawing/2007/8/2/chart">
+                  <a:solidFill>
+                    <a:srgbClr val="FFFFFF"/>
+                  </a:solidFill>
+                </c14:spPr>
+              </c14:invertSolidFillFmt>
+            </c:ext>
+            <c:ext xmlns:c16="http://schemas.microsoft.com/office/drawing/2014/chart" uri="{C3380CC4-5D6E-409C-BE32-E72D297353CC}">
+              <c16:uniqueId val="{00000000-F8F2-4F60-900E-49DE2B1A12BD}"/>
+            </c:ext>
+          </c:extLst>
         </c:ser>
         <c:ser>
           <c:idx val="1"/>
@@ -1029,6 +1298,40 @@
               <a:srgbClr val="B8B8C0"/>
             </a:solidFill>
           </c:spPr>
+          <c:invertIfNegative val="1"/>
+          <c:dLbls>
+            <c:numFmt formatCode="0.0" sourceLinked="0"/>
+            <c:spPr>
+              <a:noFill/>
+              <a:ln>
+                <a:noFill/>
+              </a:ln>
+              <a:effectLst/>
+            </c:spPr>
+            <c:txPr>
+              <a:bodyPr/>
+              <a:lstStyle/>
+              <a:p>
+                <a:pPr>
+                  <a:defRPr sz="1800" b="1"/>
+                </a:pPr>
+                <a:endParaRPr lang="en-US"/>
+              </a:p>
+            </c:txPr>
+            <c:dLblPos val="outEnd"/>
+            <c:showLegendKey val="0"/>
+            <c:showVal val="1"/>
+            <c:showCatName val="0"/>
+            <c:showSerName val="0"/>
+            <c:showPercent val="0"/>
+            <c:showBubbleSize val="0"/>
+            <c:showLeaderLines val="0"/>
+            <c:extLst>
+              <c:ext xmlns:c15="http://schemas.microsoft.com/office/drawing/2012/chart" uri="{CE6537A1-D6FC-4f65-9D91-7224C49458BB}">
+                <c15:showLeaderLines val="0"/>
+              </c:ext>
+            </c:extLst>
+          </c:dLbls>
           <c:cat>
             <c:strRef>
               <c:f>Sheet1!$A$2:$A$3</c:f>
@@ -1058,18 +1361,22 @@
               </c:numCache>
             </c:numRef>
           </c:val>
+          <c:extLst>
+            <c:ext xmlns:c14="http://schemas.microsoft.com/office/drawing/2007/8/2/chart" uri="{6F2FDCE9-48DA-4B69-8628-5D25D57E5C99}">
+              <c14:invertSolidFillFmt>
+                <c14:spPr xmlns:c14="http://schemas.microsoft.com/office/drawing/2007/8/2/chart">
+                  <a:solidFill>
+                    <a:srgbClr val="FFFFFF"/>
+                  </a:solidFill>
+                </c14:spPr>
+              </c14:invertSolidFillFmt>
+            </c:ext>
+            <c:ext xmlns:c16="http://schemas.microsoft.com/office/drawing/2014/chart" uri="{C3380CC4-5D6E-409C-BE32-E72D297353CC}">
+              <c16:uniqueId val="{00000001-F8F2-4F60-900E-49DE2B1A12BD}"/>
+            </c:ext>
+          </c:extLst>
         </c:ser>
         <c:dLbls>
-          <c:numFmt formatCode="0.0" sourceLinked="0"/>
-          <c:txPr>
-            <a:bodyPr/>
-            <a:lstStyle/>
-            <a:p>
-              <a:pPr>
-                <a:defRPr sz="1800" b="1"/>
-              </a:pPr>
-            </a:p>
-          </c:txPr>
           <c:dLblPos val="outEnd"/>
           <c:showLegendKey val="0"/>
           <c:showVal val="1"/>
@@ -1077,7 +1384,6 @@
           <c:showSerName val="0"/>
           <c:showPercent val="0"/>
           <c:showBubbleSize val="0"/>
-          <c:showLeaderLines val="1"/>
         </c:dLbls>
         <c:gapWidth val="70"/>
         <c:axId val="-2068027336"/>
@@ -1090,6 +1396,7 @@
         </c:scaling>
         <c:delete val="0"/>
         <c:axPos val="b"/>
+        <c:numFmt formatCode="General" sourceLinked="0"/>
         <c:majorTickMark val="out"/>
         <c:minorTickMark val="none"/>
         <c:tickLblPos val="nextTo"/>
@@ -1111,6 +1418,7 @@
                 </a:solidFill>
               </a:defRPr>
             </a:pPr>
+            <a:endParaRPr lang="en-US"/>
           </a:p>
         </c:txPr>
         <c:crossAx val="-2113994440"/>
@@ -1123,8 +1431,9 @@
       <c:valAx>
         <c:axId val="-2113994440"/>
         <c:scaling>
-          <c:max val="92.0"/>
-          <c:min val="50.0"/>
+          <c:orientation val="minMax"/>
+          <c:max val="92"/>
+          <c:min val="50"/>
         </c:scaling>
         <c:delete val="0"/>
         <c:axPos val="l"/>
@@ -1137,6 +1446,7 @@
             </a:ln>
           </c:spPr>
         </c:majorGridlines>
+        <c:numFmt formatCode="General" sourceLinked="1"/>
         <c:majorTickMark val="out"/>
         <c:minorTickMark val="none"/>
         <c:tickLblPos val="nextTo"/>
@@ -1156,11 +1466,13 @@
                 </a:solidFill>
               </a:defRPr>
             </a:pPr>
+            <a:endParaRPr lang="en-US"/>
           </a:p>
         </c:txPr>
         <c:crossAx val="-2068027336"/>
         <c:crosses val="autoZero"/>
-        <c:majorUnit val="10.0"/>
+        <c:crossBetween val="between"/>
+        <c:majorUnit val="10"/>
       </c:valAx>
     </c:plotArea>
     <c:legend>
@@ -1173,10 +1485,13 @@
           <a:pPr>
             <a:defRPr sz="1800"/>
           </a:pPr>
+          <a:endParaRPr lang="en-US"/>
         </a:p>
       </c:txPr>
     </c:legend>
+    <c:plotVisOnly val="1"/>
     <c:dispBlanksAs val="gap"/>
+    <c:showDLblsOverMax val="1"/>
   </c:chart>
   <c:txPr>
     <a:bodyPr/>
@@ -1197,14 +1512,19 @@
 </file>
 
 <file path=ppt/charts/chart5.xml><?xml version="1.0" encoding="utf-8"?>
-<c:chartSpace xmlns:c="http://schemas.openxmlformats.org/drawingml/2006/chart" xmlns:a="http://schemas.openxmlformats.org/drawingml/2006/main" xmlns:r="http://schemas.openxmlformats.org/officeDocument/2006/relationships">
+<c:chartSpace xmlns:c="http://schemas.openxmlformats.org/drawingml/2006/chart" xmlns:a="http://schemas.openxmlformats.org/drawingml/2006/main" xmlns:r="http://schemas.openxmlformats.org/officeDocument/2006/relationships" xmlns:c16r2="http://schemas.microsoft.com/office/drawing/2015/06/chart">
   <c:date1904 val="0"/>
+  <c:lang val="en-US"/>
+  <c:roundedCorners val="1"/>
+  <c:style val="2"/>
   <c:chart>
     <c:autoTitleDeleted val="1"/>
     <c:plotArea>
+      <c:layout/>
       <c:barChart>
         <c:barDir val="bar"/>
         <c:grouping val="clustered"/>
+        <c:varyColors val="1"/>
         <c:ser>
           <c:idx val="0"/>
           <c:order val="0"/>
@@ -1224,62 +1544,140 @@
               <a:srgbClr val="6A2C91"/>
             </a:solidFill>
           </c:spPr>
+          <c:invertIfNegative val="1"/>
           <c:dPt>
             <c:idx val="0"/>
+            <c:invertIfNegative val="1"/>
+            <c:bubble3D val="0"/>
             <c:spPr>
               <a:solidFill>
                 <a:srgbClr val="B8B8C0"/>
               </a:solidFill>
             </c:spPr>
+            <c:extLst>
+              <c:ext xmlns:c16="http://schemas.microsoft.com/office/drawing/2014/chart" uri="{C3380CC4-5D6E-409C-BE32-E72D297353CC}">
+                <c16:uniqueId val="{00000001-B2B5-404B-924E-BC2C707EC10A}"/>
+              </c:ext>
+            </c:extLst>
           </c:dPt>
           <c:dPt>
             <c:idx val="1"/>
+            <c:invertIfNegative val="1"/>
+            <c:bubble3D val="0"/>
             <c:spPr>
               <a:solidFill>
                 <a:srgbClr val="B8B8C0"/>
               </a:solidFill>
             </c:spPr>
+            <c:extLst>
+              <c:ext xmlns:c16="http://schemas.microsoft.com/office/drawing/2014/chart" uri="{C3380CC4-5D6E-409C-BE32-E72D297353CC}">
+                <c16:uniqueId val="{00000003-B2B5-404B-924E-BC2C707EC10A}"/>
+              </c:ext>
+            </c:extLst>
           </c:dPt>
           <c:dPt>
             <c:idx val="2"/>
+            <c:invertIfNegative val="1"/>
+            <c:bubble3D val="0"/>
             <c:spPr>
               <a:solidFill>
                 <a:srgbClr val="B8B8C0"/>
               </a:solidFill>
             </c:spPr>
+            <c:extLst>
+              <c:ext xmlns:c16="http://schemas.microsoft.com/office/drawing/2014/chart" uri="{C3380CC4-5D6E-409C-BE32-E72D297353CC}">
+                <c16:uniqueId val="{00000005-B2B5-404B-924E-BC2C707EC10A}"/>
+              </c:ext>
+            </c:extLst>
           </c:dPt>
           <c:dPt>
             <c:idx val="3"/>
+            <c:invertIfNegative val="1"/>
+            <c:bubble3D val="0"/>
             <c:spPr>
               <a:solidFill>
                 <a:srgbClr val="B8B8C0"/>
               </a:solidFill>
             </c:spPr>
+            <c:extLst>
+              <c:ext xmlns:c16="http://schemas.microsoft.com/office/drawing/2014/chart" uri="{C3380CC4-5D6E-409C-BE32-E72D297353CC}">
+                <c16:uniqueId val="{00000007-B2B5-404B-924E-BC2C707EC10A}"/>
+              </c:ext>
+            </c:extLst>
           </c:dPt>
           <c:dPt>
             <c:idx val="4"/>
+            <c:invertIfNegative val="1"/>
+            <c:bubble3D val="0"/>
             <c:spPr>
               <a:solidFill>
                 <a:srgbClr val="B8B8C0"/>
               </a:solidFill>
             </c:spPr>
+            <c:extLst>
+              <c:ext xmlns:c16="http://schemas.microsoft.com/office/drawing/2014/chart" uri="{C3380CC4-5D6E-409C-BE32-E72D297353CC}">
+                <c16:uniqueId val="{00000009-B2B5-404B-924E-BC2C707EC10A}"/>
+              </c:ext>
+            </c:extLst>
           </c:dPt>
           <c:dPt>
             <c:idx val="5"/>
+            <c:invertIfNegative val="1"/>
+            <c:bubble3D val="0"/>
             <c:spPr>
               <a:solidFill>
                 <a:srgbClr val="B8B8C0"/>
               </a:solidFill>
             </c:spPr>
+            <c:extLst>
+              <c:ext xmlns:c16="http://schemas.microsoft.com/office/drawing/2014/chart" uri="{C3380CC4-5D6E-409C-BE32-E72D297353CC}">
+                <c16:uniqueId val="{0000000B-B2B5-404B-924E-BC2C707EC10A}"/>
+              </c:ext>
+            </c:extLst>
           </c:dPt>
           <c:dPt>
             <c:idx val="6"/>
+            <c:invertIfNegative val="1"/>
+            <c:bubble3D val="0"/>
+            <c:extLst>
+              <c:ext xmlns:c16="http://schemas.microsoft.com/office/drawing/2014/chart" uri="{C3380CC4-5D6E-409C-BE32-E72D297353CC}">
+                <c16:uniqueId val="{0000000D-B2B5-404B-924E-BC2C707EC10A}"/>
+              </c:ext>
+            </c:extLst>
+          </c:dPt>
+          <c:dLbls>
+            <c:numFmt formatCode="0.0" sourceLinked="0"/>
             <c:spPr>
-              <a:solidFill>
-                <a:srgbClr val="6A2C91"/>
-              </a:solidFill>
+              <a:noFill/>
+              <a:ln>
+                <a:noFill/>
+              </a:ln>
+              <a:effectLst/>
             </c:spPr>
-          </c:dPt>
+            <c:txPr>
+              <a:bodyPr/>
+              <a:lstStyle/>
+              <a:p>
+                <a:pPr>
+                  <a:defRPr sz="1800" b="1"/>
+                </a:pPr>
+                <a:endParaRPr lang="en-US"/>
+              </a:p>
+            </c:txPr>
+            <c:dLblPos val="outEnd"/>
+            <c:showLegendKey val="0"/>
+            <c:showVal val="1"/>
+            <c:showCatName val="0"/>
+            <c:showSerName val="0"/>
+            <c:showPercent val="0"/>
+            <c:showBubbleSize val="0"/>
+            <c:showLeaderLines val="0"/>
+            <c:extLst>
+              <c:ext xmlns:c15="http://schemas.microsoft.com/office/drawing/2012/chart" uri="{CE6537A1-D6FC-4f65-9D91-7224C49458BB}">
+                <c15:showLeaderLines val="0"/>
+              </c:ext>
+            </c:extLst>
+          </c:dLbls>
           <c:cat>
             <c:strRef>
               <c:f>Sheet1!$A$2:$A$8</c:f>
@@ -1339,18 +1737,22 @@
               </c:numCache>
             </c:numRef>
           </c:val>
+          <c:extLst>
+            <c:ext xmlns:c14="http://schemas.microsoft.com/office/drawing/2007/8/2/chart" uri="{6F2FDCE9-48DA-4B69-8628-5D25D57E5C99}">
+              <c14:invertSolidFillFmt>
+                <c14:spPr xmlns:c14="http://schemas.microsoft.com/office/drawing/2007/8/2/chart">
+                  <a:solidFill>
+                    <a:srgbClr val="FFFFFF"/>
+                  </a:solidFill>
+                </c14:spPr>
+              </c14:invertSolidFillFmt>
+            </c:ext>
+            <c:ext xmlns:c16="http://schemas.microsoft.com/office/drawing/2014/chart" uri="{C3380CC4-5D6E-409C-BE32-E72D297353CC}">
+              <c16:uniqueId val="{0000000E-B2B5-404B-924E-BC2C707EC10A}"/>
+            </c:ext>
+          </c:extLst>
         </c:ser>
         <c:dLbls>
-          <c:numFmt formatCode="0.0" sourceLinked="0"/>
-          <c:txPr>
-            <a:bodyPr/>
-            <a:lstStyle/>
-            <a:p>
-              <a:pPr>
-                <a:defRPr sz="1800" b="1"/>
-              </a:pPr>
-            </a:p>
-          </c:txPr>
           <c:dLblPos val="outEnd"/>
           <c:showLegendKey val="0"/>
           <c:showVal val="1"/>
@@ -1358,7 +1760,6 @@
           <c:showSerName val="0"/>
           <c:showPercent val="0"/>
           <c:showBubbleSize val="0"/>
-          <c:showLeaderLines val="1"/>
         </c:dLbls>
         <c:gapWidth val="40"/>
         <c:axId val="-2068027336"/>
@@ -1371,6 +1772,7 @@
         </c:scaling>
         <c:delete val="0"/>
         <c:axPos val="l"/>
+        <c:numFmt formatCode="General" sourceLinked="0"/>
         <c:majorTickMark val="out"/>
         <c:minorTickMark val="none"/>
         <c:tickLblPos val="nextTo"/>
@@ -1392,6 +1794,7 @@
                 </a:solidFill>
               </a:defRPr>
             </a:pPr>
+            <a:endParaRPr lang="en-US"/>
           </a:p>
         </c:txPr>
         <c:crossAx val="-2113994440"/>
@@ -1404,8 +1807,9 @@
       <c:valAx>
         <c:axId val="-2113994440"/>
         <c:scaling>
-          <c:max val="90.0"/>
-          <c:min val="70.0"/>
+          <c:orientation val="minMax"/>
+          <c:max val="90"/>
+          <c:min val="70"/>
         </c:scaling>
         <c:delete val="0"/>
         <c:axPos val="b"/>
@@ -1418,6 +1822,7 @@
             </a:ln>
           </c:spPr>
         </c:majorGridlines>
+        <c:numFmt formatCode="General" sourceLinked="1"/>
         <c:majorTickMark val="out"/>
         <c:minorTickMark val="none"/>
         <c:tickLblPos val="nextTo"/>
@@ -1437,14 +1842,18 @@
                 </a:solidFill>
               </a:defRPr>
             </a:pPr>
+            <a:endParaRPr lang="en-US"/>
           </a:p>
         </c:txPr>
         <c:crossAx val="-2068027336"/>
         <c:crosses val="autoZero"/>
-        <c:majorUnit val="5.0"/>
+        <c:crossBetween val="between"/>
+        <c:majorUnit val="5"/>
       </c:valAx>
     </c:plotArea>
+    <c:plotVisOnly val="1"/>
     <c:dispBlanksAs val="gap"/>
+    <c:showDLblsOverMax val="1"/>
   </c:chart>
   <c:txPr>
     <a:bodyPr/>
@@ -1465,8 +1874,11 @@
 </file>
 
 <file path=ppt/charts/chart6.xml><?xml version="1.0" encoding="utf-8"?>
-<c:chartSpace xmlns:c="http://schemas.openxmlformats.org/drawingml/2006/chart" xmlns:a="http://schemas.openxmlformats.org/drawingml/2006/main" xmlns:r="http://schemas.openxmlformats.org/officeDocument/2006/relationships">
+<c:chartSpace xmlns:c="http://schemas.openxmlformats.org/drawingml/2006/chart" xmlns:a="http://schemas.openxmlformats.org/drawingml/2006/main" xmlns:r="http://schemas.openxmlformats.org/officeDocument/2006/relationships" xmlns:c16r2="http://schemas.microsoft.com/office/drawing/2015/06/chart">
   <c:date1904 val="0"/>
+  <c:lang val="en-US"/>
+  <c:roundedCorners val="1"/>
+  <c:style val="2"/>
   <c:chart>
     <c:title>
       <c:tx>
@@ -1475,7 +1887,7 @@
           <a:lstStyle/>
           <a:p>
             <a:r>
-              <a:rPr sz="1800" b="1">
+              <a:rPr lang="en-US" sz="1800" b="1">
                 <a:latin typeface="Arial"/>
               </a:rPr>
               <a:t>Per-class F1 score</a:t>
@@ -1483,14 +1895,15 @@
           </a:p>
         </c:rich>
       </c:tx>
-      <c:layout/>
       <c:overlay val="0"/>
     </c:title>
-    <c:autoTitleDeleted val="1"/>
+    <c:autoTitleDeleted val="0"/>
     <c:plotArea>
+      <c:layout/>
       <c:barChart>
         <c:barDir val="col"/>
         <c:grouping val="clustered"/>
+        <c:varyColors val="1"/>
         <c:ser>
           <c:idx val="0"/>
           <c:order val="0"/>
@@ -1510,6 +1923,40 @@
               <a:srgbClr val="6A2C91"/>
             </a:solidFill>
           </c:spPr>
+          <c:invertIfNegative val="1"/>
+          <c:dLbls>
+            <c:numFmt formatCode="0.00" sourceLinked="0"/>
+            <c:spPr>
+              <a:noFill/>
+              <a:ln>
+                <a:noFill/>
+              </a:ln>
+              <a:effectLst/>
+            </c:spPr>
+            <c:txPr>
+              <a:bodyPr/>
+              <a:lstStyle/>
+              <a:p>
+                <a:pPr>
+                  <a:defRPr sz="1200" b="1"/>
+                </a:pPr>
+                <a:endParaRPr lang="en-US"/>
+              </a:p>
+            </c:txPr>
+            <c:dLblPos val="outEnd"/>
+            <c:showLegendKey val="0"/>
+            <c:showVal val="1"/>
+            <c:showCatName val="0"/>
+            <c:showSerName val="0"/>
+            <c:showPercent val="0"/>
+            <c:showBubbleSize val="0"/>
+            <c:showLeaderLines val="0"/>
+            <c:extLst>
+              <c:ext xmlns:c15="http://schemas.microsoft.com/office/drawing/2012/chart" uri="{CE6537A1-D6FC-4f65-9D91-7224C49458BB}">
+                <c15:showLeaderLines val="0"/>
+              </c:ext>
+            </c:extLst>
+          </c:dLbls>
           <c:cat>
             <c:strRef>
               <c:f>Sheet1!$A$2:$A$7</c:f>
@@ -1543,26 +1990,40 @@
                 <c:formatCode>General</c:formatCode>
                 <c:ptCount val="6"/>
                 <c:pt idx="0">
-                  <c:v>0.905</c:v>
+                  <c:v>0.90500000000000003</c:v>
                 </c:pt>
                 <c:pt idx="1">
-                  <c:v>0.721</c:v>
+                  <c:v>0.72099999999999997</c:v>
                 </c:pt>
                 <c:pt idx="2">
-                  <c:v>0.922</c:v>
+                  <c:v>0.92200000000000004</c:v>
                 </c:pt>
                 <c:pt idx="3">
                   <c:v>0.8</c:v>
                 </c:pt>
                 <c:pt idx="4">
-                  <c:v>0.784</c:v>
+                  <c:v>0.78400000000000003</c:v>
                 </c:pt>
                 <c:pt idx="5">
-                  <c:v>0.795</c:v>
+                  <c:v>0.79500000000000004</c:v>
                 </c:pt>
               </c:numCache>
             </c:numRef>
           </c:val>
+          <c:extLst>
+            <c:ext xmlns:c14="http://schemas.microsoft.com/office/drawing/2007/8/2/chart" uri="{6F2FDCE9-48DA-4B69-8628-5D25D57E5C99}">
+              <c14:invertSolidFillFmt>
+                <c14:spPr xmlns:c14="http://schemas.microsoft.com/office/drawing/2007/8/2/chart">
+                  <a:solidFill>
+                    <a:srgbClr val="FFFFFF"/>
+                  </a:solidFill>
+                </c14:spPr>
+              </c14:invertSolidFillFmt>
+            </c:ext>
+            <c:ext xmlns:c16="http://schemas.microsoft.com/office/drawing/2014/chart" uri="{C3380CC4-5D6E-409C-BE32-E72D297353CC}">
+              <c16:uniqueId val="{00000000-1030-4E08-A552-41F681A924E2}"/>
+            </c:ext>
+          </c:extLst>
         </c:ser>
         <c:ser>
           <c:idx val="1"/>
@@ -1583,6 +2044,40 @@
               <a:srgbClr val="B8B8C0"/>
             </a:solidFill>
           </c:spPr>
+          <c:invertIfNegative val="1"/>
+          <c:dLbls>
+            <c:numFmt formatCode="0.00" sourceLinked="0"/>
+            <c:spPr>
+              <a:noFill/>
+              <a:ln>
+                <a:noFill/>
+              </a:ln>
+              <a:effectLst/>
+            </c:spPr>
+            <c:txPr>
+              <a:bodyPr/>
+              <a:lstStyle/>
+              <a:p>
+                <a:pPr>
+                  <a:defRPr sz="1200" b="1"/>
+                </a:pPr>
+                <a:endParaRPr lang="en-US"/>
+              </a:p>
+            </c:txPr>
+            <c:dLblPos val="outEnd"/>
+            <c:showLegendKey val="0"/>
+            <c:showVal val="1"/>
+            <c:showCatName val="0"/>
+            <c:showSerName val="0"/>
+            <c:showPercent val="0"/>
+            <c:showBubbleSize val="0"/>
+            <c:showLeaderLines val="0"/>
+            <c:extLst>
+              <c:ext xmlns:c15="http://schemas.microsoft.com/office/drawing/2012/chart" uri="{CE6537A1-D6FC-4f65-9D91-7224C49458BB}">
+                <c15:showLeaderLines val="0"/>
+              </c:ext>
+            </c:extLst>
+          </c:dLbls>
           <c:cat>
             <c:strRef>
               <c:f>Sheet1!$A$2:$A$7</c:f>
@@ -1616,38 +2111,42 @@
                 <c:formatCode>General</c:formatCode>
                 <c:ptCount val="6"/>
                 <c:pt idx="0">
-                  <c:v>0.852</c:v>
+                  <c:v>0.85199999999999998</c:v>
                 </c:pt>
                 <c:pt idx="1">
-                  <c:v>0.512</c:v>
+                  <c:v>0.51200000000000001</c:v>
                 </c:pt>
                 <c:pt idx="2">
-                  <c:v>0.887</c:v>
+                  <c:v>0.88700000000000001</c:v>
                 </c:pt>
                 <c:pt idx="3">
-                  <c:v>0.667</c:v>
+                  <c:v>0.66700000000000004</c:v>
                 </c:pt>
                 <c:pt idx="4">
-                  <c:v>0.647</c:v>
+                  <c:v>0.64700000000000002</c:v>
                 </c:pt>
                 <c:pt idx="5">
-                  <c:v>0.851</c:v>
+                  <c:v>0.85099999999999998</c:v>
                 </c:pt>
               </c:numCache>
             </c:numRef>
           </c:val>
+          <c:extLst>
+            <c:ext xmlns:c14="http://schemas.microsoft.com/office/drawing/2007/8/2/chart" uri="{6F2FDCE9-48DA-4B69-8628-5D25D57E5C99}">
+              <c14:invertSolidFillFmt>
+                <c14:spPr xmlns:c14="http://schemas.microsoft.com/office/drawing/2007/8/2/chart">
+                  <a:solidFill>
+                    <a:srgbClr val="FFFFFF"/>
+                  </a:solidFill>
+                </c14:spPr>
+              </c14:invertSolidFillFmt>
+            </c:ext>
+            <c:ext xmlns:c16="http://schemas.microsoft.com/office/drawing/2014/chart" uri="{C3380CC4-5D6E-409C-BE32-E72D297353CC}">
+              <c16:uniqueId val="{00000001-1030-4E08-A552-41F681A924E2}"/>
+            </c:ext>
+          </c:extLst>
         </c:ser>
         <c:dLbls>
-          <c:numFmt formatCode="0.00" sourceLinked="0"/>
-          <c:txPr>
-            <a:bodyPr/>
-            <a:lstStyle/>
-            <a:p>
-              <a:pPr>
-                <a:defRPr sz="1200" b="1"/>
-              </a:pPr>
-            </a:p>
-          </c:txPr>
           <c:dLblPos val="outEnd"/>
           <c:showLegendKey val="0"/>
           <c:showVal val="1"/>
@@ -1655,7 +2154,6 @@
           <c:showSerName val="0"/>
           <c:showPercent val="0"/>
           <c:showBubbleSize val="0"/>
-          <c:showLeaderLines val="1"/>
         </c:dLbls>
         <c:gapWidth val="40"/>
         <c:axId val="-2068027336"/>
@@ -1668,6 +2166,7 @@
         </c:scaling>
         <c:delete val="0"/>
         <c:axPos val="b"/>
+        <c:numFmt formatCode="General" sourceLinked="0"/>
         <c:majorTickMark val="out"/>
         <c:minorTickMark val="none"/>
         <c:tickLblPos val="nextTo"/>
@@ -1689,6 +2188,7 @@
                 </a:solidFill>
               </a:defRPr>
             </a:pPr>
+            <a:endParaRPr lang="en-US"/>
           </a:p>
         </c:txPr>
         <c:crossAx val="-2113994440"/>
@@ -1701,8 +2201,9 @@
       <c:valAx>
         <c:axId val="-2113994440"/>
         <c:scaling>
-          <c:max val="1.0"/>
-          <c:min val="0.0"/>
+          <c:orientation val="minMax"/>
+          <c:max val="1"/>
+          <c:min val="0"/>
         </c:scaling>
         <c:delete val="0"/>
         <c:axPos val="l"/>
@@ -1715,6 +2216,7 @@
             </a:ln>
           </c:spPr>
         </c:majorGridlines>
+        <c:numFmt formatCode="General" sourceLinked="1"/>
         <c:majorTickMark val="out"/>
         <c:minorTickMark val="none"/>
         <c:tickLblPos val="nextTo"/>
@@ -1734,10 +2236,12 @@
                 </a:solidFill>
               </a:defRPr>
             </a:pPr>
+            <a:endParaRPr lang="en-US"/>
           </a:p>
         </c:txPr>
         <c:crossAx val="-2068027336"/>
         <c:crosses val="autoZero"/>
+        <c:crossBetween val="between"/>
         <c:majorUnit val="0.25"/>
       </c:valAx>
     </c:plotArea>
@@ -1751,10 +2255,13 @@
           <a:pPr>
             <a:defRPr sz="1400"/>
           </a:pPr>
+          <a:endParaRPr lang="en-US"/>
         </a:p>
       </c:txPr>
     </c:legend>
+    <c:plotVisOnly val="1"/>
     <c:dispBlanksAs val="gap"/>
+    <c:showDLblsOverMax val="1"/>
   </c:chart>
   <c:txPr>
     <a:bodyPr/>
@@ -1868,7 +2375,7 @@
           <a:p>
             <a:fld id="{EEC30534-A088-416E-A2F9-35D140DE51C7}" type="datetimeFigureOut">
               <a:rPr lang="en-US" smtClean="0"/>
-              <a:t>02-Oct-26</a:t>
+              <a:t>10/7/2026</a:t>
             </a:fld>
             <a:endParaRPr lang="en-US"/>
           </a:p>
@@ -2045,7 +2552,7 @@
           <a:p>
             <a:fld id="{AF65C05B-51E2-45C0-825E-6D2B9E516754}" type="datetimeFigureOut">
               <a:rPr lang="en-US" smtClean="0"/>
-              <a:t>02-Oct-26</a:t>
+              <a:t>10/7/2026</a:t>
             </a:fld>
             <a:endParaRPr lang="en-US"/>
           </a:p>
@@ -2443,7 +2950,7 @@
           <a:p>
             <a:fld id="{9FA1CBE5-77A0-4FDD-85F7-FC2D1852FEF2}" type="datetime1">
               <a:rPr lang="en-GB" smtClean="0"/>
-              <a:t>02/10/2026</a:t>
+              <a:t>07/10/2026</a:t>
             </a:fld>
             <a:endParaRPr lang="en-GB"/>
           </a:p>
@@ -2613,7 +3120,7 @@
           <a:p>
             <a:fld id="{25EBD2B9-55BA-4BF0-819B-00B31A404040}" type="datetime1">
               <a:rPr lang="en-GB" smtClean="0"/>
-              <a:t>02/10/2026</a:t>
+              <a:t>07/10/2026</a:t>
             </a:fld>
             <a:endParaRPr lang="en-GB"/>
           </a:p>
@@ -2793,7 +3300,7 @@
           <a:p>
             <a:fld id="{FE595255-AC07-47F9-AA41-C5403224B816}" type="datetime1">
               <a:rPr lang="en-GB" smtClean="0"/>
-              <a:t>02/10/2026</a:t>
+              <a:t>07/10/2026</a:t>
             </a:fld>
             <a:endParaRPr lang="en-GB"/>
           </a:p>
@@ -2963,7 +3470,7 @@
           <a:p>
             <a:fld id="{F084F44A-77D3-4BB8-9A23-DA098C140D0C}" type="datetime1">
               <a:rPr lang="en-GB" smtClean="0"/>
-              <a:t>02/10/2026</a:t>
+              <a:t>07/10/2026</a:t>
             </a:fld>
             <a:endParaRPr lang="en-GB"/>
           </a:p>
@@ -3209,7 +3716,7 @@
           <a:p>
             <a:fld id="{A470C2B9-7629-4850-85D5-711B31CBC5B4}" type="datetime1">
               <a:rPr lang="en-GB" smtClean="0"/>
-              <a:t>02/10/2026</a:t>
+              <a:t>07/10/2026</a:t>
             </a:fld>
             <a:endParaRPr lang="en-GB"/>
           </a:p>
@@ -3441,7 +3948,7 @@
           <a:p>
             <a:fld id="{91735A0E-08F7-45F6-B9C3-BFE3E108BB1A}" type="datetime1">
               <a:rPr lang="en-GB" smtClean="0"/>
-              <a:t>02/10/2026</a:t>
+              <a:t>07/10/2026</a:t>
             </a:fld>
             <a:endParaRPr lang="en-GB"/>
           </a:p>
@@ -3808,7 +4315,7 @@
           <a:p>
             <a:fld id="{3D658671-6C49-4FB4-B44C-0EF2DF8CC272}" type="datetime1">
               <a:rPr lang="en-GB" smtClean="0"/>
-              <a:t>02/10/2026</a:t>
+              <a:t>07/10/2026</a:t>
             </a:fld>
             <a:endParaRPr lang="en-GB"/>
           </a:p>
@@ -3926,7 +4433,7 @@
           <a:p>
             <a:fld id="{5AC36E87-C810-4AA2-A0C3-D9F9E17DC1BA}" type="datetime1">
               <a:rPr lang="en-GB" smtClean="0"/>
-              <a:t>02/10/2026</a:t>
+              <a:t>07/10/2026</a:t>
             </a:fld>
             <a:endParaRPr lang="en-GB"/>
           </a:p>
@@ -4021,7 +4528,7 @@
           <a:p>
             <a:fld id="{5660574A-20FB-4D1F-BE5E-DEF165510D6A}" type="datetime1">
               <a:rPr lang="en-GB" smtClean="0"/>
-              <a:t>02/10/2026</a:t>
+              <a:t>07/10/2026</a:t>
             </a:fld>
             <a:endParaRPr lang="en-GB"/>
           </a:p>
@@ -4298,7 +4805,7 @@
           <a:p>
             <a:fld id="{6E836B1B-D984-4E94-893A-04A31792E094}" type="datetime1">
               <a:rPr lang="en-GB" smtClean="0"/>
-              <a:t>02/10/2026</a:t>
+              <a:t>07/10/2026</a:t>
             </a:fld>
             <a:endParaRPr lang="en-GB"/>
           </a:p>
@@ -4551,7 +5058,7 @@
           <a:p>
             <a:fld id="{68DDF240-5094-4DA6-BEA6-75E5E377CA15}" type="datetime1">
               <a:rPr lang="en-GB" smtClean="0"/>
-              <a:t>02/10/2026</a:t>
+              <a:t>07/10/2026</a:t>
             </a:fld>
             <a:endParaRPr lang="en-GB"/>
           </a:p>
@@ -4764,7 +5271,7 @@
           <a:p>
             <a:fld id="{0E37C2D0-045A-4468-98A8-AC6B66F93128}" type="datetime1">
               <a:rPr lang="en-GB" smtClean="0"/>
-              <a:t>02/10/2026</a:t>
+              <a:t>07/10/2026</a:t>
             </a:fld>
             <a:endParaRPr lang="en-GB"/>
           </a:p>
@@ -5390,21 +5897,7 @@
                 <a:latin typeface="Arial" panose="020B0604020202020204" pitchFamily="34" charset="0"/>
                 <a:cs typeface="Arial" panose="020B0604020202020204" pitchFamily="34" charset="0"/>
               </a:rPr>
-              <a:t>Paper ID: </a:t>
-            </a:r>
-            <a:r>
-              <a:rPr lang="en-US" sz="1600" dirty="0">
-                <a:latin typeface="Arial" panose="020B0604020202020204" pitchFamily="34" charset="0"/>
-                <a:cs typeface="Arial" panose="020B0604020202020204" pitchFamily="34" charset="0"/>
-              </a:rPr>
-              <a:t>45</a:t>
-            </a:r>
-            <a:r>
-              <a:rPr lang="en-US" sz="1600" dirty="0">
-                <a:latin typeface="Arial" panose="020B0604020202020204" pitchFamily="34" charset="0"/>
-                <a:cs typeface="Arial" panose="020B0604020202020204" pitchFamily="34" charset="0"/>
-              </a:rPr>
-              <a:t> </a:t>
+              <a:t>Paper ID: 45 </a:t>
             </a:r>
             <a:endParaRPr lang="en-US" sz="1600" dirty="0"/>
           </a:p>
@@ -5518,11 +6011,23 @@
   <p:clrMapOvr>
     <a:masterClrMapping/>
   </p:clrMapOvr>
+  <mc:AlternateContent xmlns:mc="http://schemas.openxmlformats.org/markup-compatibility/2006">
+    <mc:Choice xmlns:p14="http://schemas.microsoft.com/office/powerpoint/2010/main" Requires="p14">
+      <p:transition spd="med" p14:dur="600">
+        <p:fade/>
+      </p:transition>
+    </mc:Choice>
+    <mc:Fallback>
+      <p:transition spd="med">
+        <p:fade/>
+      </p:transition>
+    </mc:Fallback>
+  </mc:AlternateContent>
 </p:sld>
 </file>
 
 <file path=ppt/slides/slide10.xml><?xml version="1.0" encoding="utf-8"?>
-<p:sld xmlns:a="http://schemas.openxmlformats.org/drawingml/2006/main" xmlns:p="http://schemas.openxmlformats.org/presentationml/2006/main" xmlns:r="http://schemas.openxmlformats.org/officeDocument/2006/relationships">
+<p:sld xmlns:a="http://schemas.openxmlformats.org/drawingml/2006/main" xmlns:r="http://schemas.openxmlformats.org/officeDocument/2006/relationships" xmlns:p="http://schemas.openxmlformats.org/presentationml/2006/main">
   <p:cSld>
     <p:spTree>
       <p:nvGrpSpPr>
@@ -5530,7 +6035,14 @@
         <p:cNvGrpSpPr/>
         <p:nvPr/>
       </p:nvGrpSpPr>
-      <p:grpSpPr/>
+      <p:grpSpPr>
+        <a:xfrm>
+          <a:off x="0" y="0"/>
+          <a:ext cx="0" cy="0"/>
+          <a:chOff x="0" y="0"/>
+          <a:chExt cx="0" cy="0"/>
+        </a:xfrm>
+      </p:grpSpPr>
       <p:sp>
         <p:nvSpPr>
           <p:cNvPr id="2" name="Title 1"/>
@@ -5676,7 +6188,7 @@
           <a:p>
             <a:fld id="{7F469C41-6B9F-4AAA-9F31-D78B57F455E2}" type="slidenum">
               <a:rPr lang="en-GB" smtClean="0"/>
-              <a:t>2</a:t>
+              <a:t>10</a:t>
             </a:fld>
             <a:endParaRPr lang="en-GB"/>
           </a:p>
@@ -5725,6 +6237,7 @@
           <a:lstStyle/>
           <a:p>
             <a:pPr algn="ctr"/>
+            <a:endParaRPr/>
           </a:p>
         </p:txBody>
       </p:sp>
@@ -5745,7 +6258,7 @@
           <a:noFill/>
         </p:spPr>
         <p:txBody>
-          <a:bodyPr wrap="square" anchor="ctr" lIns="45720" rIns="45720" tIns="27432" bIns="27432">
+          <a:bodyPr wrap="square" lIns="45720" tIns="27432" rIns="45720" bIns="27432" anchor="ctr">
             <a:spAutoFit/>
           </a:bodyPr>
           <a:lstStyle/>
@@ -5810,6 +6323,7 @@
           <a:lstStyle/>
           <a:p>
             <a:pPr algn="ctr"/>
+            <a:endParaRPr/>
           </a:p>
         </p:txBody>
       </p:sp>
@@ -5856,6 +6370,7 @@
           <a:lstStyle/>
           <a:p>
             <a:pPr algn="ctr"/>
+            <a:endParaRPr/>
           </a:p>
         </p:txBody>
       </p:sp>
@@ -5902,6 +6417,7 @@
           <a:lstStyle/>
           <a:p>
             <a:pPr algn="ctr"/>
+            <a:endParaRPr/>
           </a:p>
         </p:txBody>
       </p:sp>
@@ -5948,6 +6464,7 @@
           <a:lstStyle/>
           <a:p>
             <a:pPr algn="ctr"/>
+            <a:endParaRPr/>
           </a:p>
         </p:txBody>
       </p:sp>
@@ -5965,7 +6482,7 @@
         </p:xfrm>
         <a:graphic>
           <a:graphicData uri="http://schemas.openxmlformats.org/drawingml/2006/chart">
-            <c:chart xmlns:c="http://schemas.openxmlformats.org/drawingml/2006/chart" r:id="rId4"/>
+            <c:chart xmlns:c="http://schemas.openxmlformats.org/drawingml/2006/chart" xmlns:r="http://schemas.openxmlformats.org/officeDocument/2006/relationships" r:id="rId3"/>
           </a:graphicData>
         </a:graphic>
       </p:graphicFrame>
@@ -6012,6 +6529,7 @@
           <a:lstStyle/>
           <a:p>
             <a:pPr algn="ctr"/>
+            <a:endParaRPr/>
           </a:p>
         </p:txBody>
       </p:sp>
@@ -6032,7 +6550,7 @@
           <a:noFill/>
         </p:spPr>
         <p:txBody>
-          <a:bodyPr wrap="square" anchor="ctr" lIns="45720" rIns="45720" tIns="27432" bIns="27432">
+          <a:bodyPr wrap="square" lIns="45720" tIns="27432" rIns="45720" bIns="27432" anchor="ctr">
             <a:spAutoFit/>
           </a:bodyPr>
           <a:lstStyle/>
@@ -6071,7 +6589,7 @@
           <a:noFill/>
         </p:spPr>
         <p:txBody>
-          <a:bodyPr wrap="square" anchor="t" lIns="45720" rIns="45720" tIns="27432" bIns="27432">
+          <a:bodyPr wrap="square" lIns="45720" tIns="27432" rIns="45720" bIns="27432" anchor="t">
             <a:spAutoFit/>
           </a:bodyPr>
           <a:lstStyle/>
@@ -6136,6 +6654,7 @@
           <a:lstStyle/>
           <a:p>
             <a:pPr algn="ctr"/>
+            <a:endParaRPr/>
           </a:p>
         </p:txBody>
       </p:sp>
@@ -6156,7 +6675,7 @@
           <a:noFill/>
         </p:spPr>
         <p:txBody>
-          <a:bodyPr wrap="square" anchor="ctr" lIns="45720" rIns="45720" tIns="27432" bIns="27432">
+          <a:bodyPr wrap="square" lIns="45720" tIns="27432" rIns="45720" bIns="27432" anchor="ctr">
             <a:spAutoFit/>
           </a:bodyPr>
           <a:lstStyle/>
@@ -6195,7 +6714,7 @@
           <a:noFill/>
         </p:spPr>
         <p:txBody>
-          <a:bodyPr wrap="square" anchor="t" lIns="45720" rIns="45720" tIns="27432" bIns="27432">
+          <a:bodyPr wrap="square" lIns="45720" tIns="27432" rIns="45720" bIns="27432" anchor="t">
             <a:spAutoFit/>
           </a:bodyPr>
           <a:lstStyle/>
@@ -6260,6 +6779,7 @@
           <a:lstStyle/>
           <a:p>
             <a:pPr algn="ctr"/>
+            <a:endParaRPr/>
           </a:p>
         </p:txBody>
       </p:sp>
@@ -6272,7 +6792,7 @@
           <p:nvPr/>
         </p:nvPicPr>
         <p:blipFill>
-          <a:blip r:embed="rId5"/>
+          <a:blip r:embed="rId4"/>
           <a:stretch>
             <a:fillRect/>
           </a:stretch>
@@ -6304,7 +6824,7 @@
           <a:noFill/>
         </p:spPr>
         <p:txBody>
-          <a:bodyPr wrap="square" anchor="ctr" lIns="45720" rIns="45720" tIns="27432" bIns="27432">
+          <a:bodyPr wrap="square" lIns="45720" tIns="27432" rIns="45720" bIns="27432" anchor="ctr">
             <a:spAutoFit/>
           </a:bodyPr>
           <a:lstStyle/>
@@ -6331,11 +6851,23 @@
   <p:clrMapOvr>
     <a:masterClrMapping/>
   </p:clrMapOvr>
+  <mc:AlternateContent xmlns:mc="http://schemas.openxmlformats.org/markup-compatibility/2006">
+    <mc:Choice xmlns:p14="http://schemas.microsoft.com/office/powerpoint/2010/main" Requires="p14">
+      <p:transition spd="med" p14:dur="600">
+        <p:fade/>
+      </p:transition>
+    </mc:Choice>
+    <mc:Fallback>
+      <p:transition spd="med">
+        <p:fade/>
+      </p:transition>
+    </mc:Fallback>
+  </mc:AlternateContent>
 </p:sld>
 </file>
 
 <file path=ppt/slides/slide11.xml><?xml version="1.0" encoding="utf-8"?>
-<p:sld xmlns:a="http://schemas.openxmlformats.org/drawingml/2006/main" xmlns:p="http://schemas.openxmlformats.org/presentationml/2006/main" xmlns:r="http://schemas.openxmlformats.org/officeDocument/2006/relationships">
+<p:sld xmlns:a="http://schemas.openxmlformats.org/drawingml/2006/main" xmlns:r="http://schemas.openxmlformats.org/officeDocument/2006/relationships" xmlns:p="http://schemas.openxmlformats.org/presentationml/2006/main">
   <p:cSld>
     <p:spTree>
       <p:nvGrpSpPr>
@@ -6343,7 +6875,14 @@
         <p:cNvGrpSpPr/>
         <p:nvPr/>
       </p:nvGrpSpPr>
-      <p:grpSpPr/>
+      <p:grpSpPr>
+        <a:xfrm>
+          <a:off x="0" y="0"/>
+          <a:ext cx="0" cy="0"/>
+          <a:chOff x="0" y="0"/>
+          <a:chExt cx="0" cy="0"/>
+        </a:xfrm>
+      </p:grpSpPr>
       <p:sp>
         <p:nvSpPr>
           <p:cNvPr id="2" name="Title 1"/>
@@ -6489,7 +7028,7 @@
           <a:p>
             <a:fld id="{7F469C41-6B9F-4AAA-9F31-D78B57F455E2}" type="slidenum">
               <a:rPr lang="en-GB" smtClean="0"/>
-              <a:t>2</a:t>
+              <a:t>11</a:t>
             </a:fld>
             <a:endParaRPr lang="en-GB"/>
           </a:p>
@@ -6509,7 +7048,7 @@
         </p:xfrm>
         <a:graphic>
           <a:graphicData uri="http://schemas.openxmlformats.org/drawingml/2006/chart">
-            <c:chart xmlns:c="http://schemas.openxmlformats.org/drawingml/2006/chart" r:id="rId4"/>
+            <c:chart xmlns:c="http://schemas.openxmlformats.org/drawingml/2006/chart" xmlns:r="http://schemas.openxmlformats.org/officeDocument/2006/relationships" r:id="rId3"/>
           </a:graphicData>
         </a:graphic>
       </p:graphicFrame>
@@ -6554,6 +7093,7 @@
           <a:lstStyle/>
           <a:p>
             <a:pPr algn="ctr"/>
+            <a:endParaRPr/>
           </a:p>
         </p:txBody>
       </p:sp>
@@ -6566,7 +7106,7 @@
           <p:nvPr/>
         </p:nvPicPr>
         <p:blipFill>
-          <a:blip r:embed="rId5"/>
+          <a:blip r:embed="rId4"/>
           <a:stretch>
             <a:fillRect/>
           </a:stretch>
@@ -6598,7 +7138,7 @@
           <a:noFill/>
         </p:spPr>
         <p:txBody>
-          <a:bodyPr wrap="square" anchor="ctr" lIns="45720" rIns="45720" tIns="27432" bIns="27432">
+          <a:bodyPr wrap="square" lIns="45720" tIns="27432" rIns="45720" bIns="27432" anchor="ctr">
             <a:spAutoFit/>
           </a:bodyPr>
           <a:lstStyle/>
@@ -6733,11 +7273,23 @@
   <p:clrMapOvr>
     <a:masterClrMapping/>
   </p:clrMapOvr>
+  <mc:AlternateContent xmlns:mc="http://schemas.openxmlformats.org/markup-compatibility/2006">
+    <mc:Choice xmlns:p14="http://schemas.microsoft.com/office/powerpoint/2010/main" Requires="p14">
+      <p:transition spd="med" p14:dur="600">
+        <p:fade/>
+      </p:transition>
+    </mc:Choice>
+    <mc:Fallback>
+      <p:transition spd="med">
+        <p:fade/>
+      </p:transition>
+    </mc:Fallback>
+  </mc:AlternateContent>
 </p:sld>
 </file>
 
 <file path=ppt/slides/slide12.xml><?xml version="1.0" encoding="utf-8"?>
-<p:sld xmlns:a="http://schemas.openxmlformats.org/drawingml/2006/main" xmlns:p="http://schemas.openxmlformats.org/presentationml/2006/main" xmlns:r="http://schemas.openxmlformats.org/officeDocument/2006/relationships">
+<p:sld xmlns:a="http://schemas.openxmlformats.org/drawingml/2006/main" xmlns:r="http://schemas.openxmlformats.org/officeDocument/2006/relationships" xmlns:p="http://schemas.openxmlformats.org/presentationml/2006/main">
   <p:cSld>
     <p:spTree>
       <p:nvGrpSpPr>
@@ -6745,7 +7297,14 @@
         <p:cNvGrpSpPr/>
         <p:nvPr/>
       </p:nvGrpSpPr>
-      <p:grpSpPr/>
+      <p:grpSpPr>
+        <a:xfrm>
+          <a:off x="0" y="0"/>
+          <a:ext cx="0" cy="0"/>
+          <a:chOff x="0" y="0"/>
+          <a:chExt cx="0" cy="0"/>
+        </a:xfrm>
+      </p:grpSpPr>
       <p:sp>
         <p:nvSpPr>
           <p:cNvPr id="2" name="Title 1"/>
@@ -6891,7 +7450,7 @@
           <a:p>
             <a:fld id="{7F469C41-6B9F-4AAA-9F31-D78B57F455E2}" type="slidenum">
               <a:rPr lang="en-GB" smtClean="0"/>
-              <a:t>2</a:t>
+              <a:t>12</a:t>
             </a:fld>
             <a:endParaRPr lang="en-GB"/>
           </a:p>
@@ -6940,6 +7499,7 @@
           <a:lstStyle/>
           <a:p>
             <a:pPr algn="ctr"/>
+            <a:endParaRPr/>
           </a:p>
         </p:txBody>
       </p:sp>
@@ -6960,7 +7520,7 @@
           <a:noFill/>
         </p:spPr>
         <p:txBody>
-          <a:bodyPr wrap="square" anchor="ctr" lIns="45720" rIns="45720" tIns="27432" bIns="27432">
+          <a:bodyPr wrap="square" lIns="45720" tIns="27432" rIns="45720" bIns="27432" anchor="ctr">
             <a:spAutoFit/>
           </a:bodyPr>
           <a:lstStyle/>
@@ -7023,12 +7583,130 @@
           <a:lstStyle/>
           <a:p>
             <a:pPr algn="ctr"/>
+            <a:endParaRPr/>
           </a:p>
         </p:txBody>
       </p:sp>
       <p:pic>
         <p:nvPicPr>
           <p:cNvPr id="11" name="Icon img" descr="img_p.png"/>
+          <p:cNvPicPr>
+            <a:picLocks noChangeAspect="1"/>
+          </p:cNvPicPr>
+          <p:nvPr/>
+        </p:nvPicPr>
+        <p:blipFill>
+          <a:blip r:embed="rId3"/>
+          <a:stretch>
+            <a:fillRect/>
+          </a:stretch>
+        </p:blipFill>
+        <p:spPr>
+          <a:xfrm>
+            <a:off x="1210665" y="2673705"/>
+            <a:ext cx="340156" cy="340156"/>
+          </a:xfrm>
+          <a:prstGeom prst="rect">
+            <a:avLst/>
+          </a:prstGeom>
+        </p:spPr>
+      </p:pic>
+      <p:sp>
+        <p:nvSpPr>
+          <p:cNvPr id="12" name="TextBox 11"/>
+          <p:cNvSpPr txBox="1"/>
+          <p:nvPr/>
+        </p:nvSpPr>
+        <p:spPr>
+          <a:xfrm>
+            <a:off x="1828800" y="2514600"/>
+            <a:ext cx="5212080" cy="658368"/>
+          </a:xfrm>
+          <a:prstGeom prst="rect">
+            <a:avLst/>
+          </a:prstGeom>
+          <a:noFill/>
+        </p:spPr>
+        <p:txBody>
+          <a:bodyPr wrap="square" lIns="45720" tIns="27432" rIns="45720" bIns="27432" anchor="ctr">
+            <a:spAutoFit/>
+          </a:bodyPr>
+          <a:lstStyle/>
+          <a:p>
+            <a:pPr algn="l">
+              <a:spcAft>
+                <a:spcPts val="600"/>
+              </a:spcAft>
+            </a:pPr>
+            <a:r>
+              <a:rPr sz="2400" b="1" i="0">
+                <a:solidFill>
+                  <a:srgbClr val="FFFFFF"/>
+                </a:solidFill>
+                <a:latin typeface="Arial"/>
+              </a:rPr>
+              <a:t>GASF</a:t>
+            </a:r>
+            <a:r>
+              <a:rPr sz="2400" b="0" i="0">
+                <a:solidFill>
+                  <a:srgbClr val="FFFFFF"/>
+                </a:solidFill>
+                <a:latin typeface="Arial"/>
+              </a:rPr>
+              <a:t> image encoding</a:t>
+            </a:r>
+          </a:p>
+        </p:txBody>
+      </p:sp>
+      <p:sp>
+        <p:nvSpPr>
+          <p:cNvPr id="13" name="Icon badge"/>
+          <p:cNvSpPr/>
+          <p:nvPr/>
+        </p:nvSpPr>
+        <p:spPr>
+          <a:xfrm>
+            <a:off x="1097280" y="3429000"/>
+            <a:ext cx="566928" cy="566928"/>
+          </a:xfrm>
+          <a:prstGeom prst="ellipse">
+            <a:avLst/>
+          </a:prstGeom>
+          <a:solidFill>
+            <a:srgbClr val="FFFFFF"/>
+          </a:solidFill>
+          <a:ln>
+            <a:noFill/>
+          </a:ln>
+          <a:effectLst/>
+        </p:spPr>
+        <p:style>
+          <a:lnRef idx="1">
+            <a:schemeClr val="accent1"/>
+          </a:lnRef>
+          <a:fillRef idx="3">
+            <a:schemeClr val="accent1"/>
+          </a:fillRef>
+          <a:effectRef idx="2">
+            <a:schemeClr val="accent1"/>
+          </a:effectRef>
+          <a:fontRef idx="minor">
+            <a:schemeClr val="lt1"/>
+          </a:fontRef>
+        </p:style>
+        <p:txBody>
+          <a:bodyPr rtlCol="0" anchor="ctr"/>
+          <a:lstStyle/>
+          <a:p>
+            <a:pPr algn="ctr"/>
+            <a:endParaRPr/>
+          </a:p>
+        </p:txBody>
+      </p:sp>
+      <p:pic>
+        <p:nvPicPr>
+          <p:cNvPr id="14" name="Icon filter" descr="filter_p.png"/>
           <p:cNvPicPr>
             <a:picLocks noChangeAspect="1"/>
           </p:cNvPicPr>
@@ -7042,7 +7720,7 @@
         </p:blipFill>
         <p:spPr>
           <a:xfrm>
-            <a:off x="1210665" y="2673705"/>
+            <a:off x="1210665" y="3542385"/>
             <a:ext cx="340156" cy="340156"/>
           </a:xfrm>
           <a:prstGeom prst="rect">
@@ -7052,13 +7730,13 @@
       </p:pic>
       <p:sp>
         <p:nvSpPr>
-          <p:cNvPr id="12" name="TextBox 11"/>
+          <p:cNvPr id="15" name="TextBox 14"/>
           <p:cNvSpPr txBox="1"/>
           <p:nvPr/>
         </p:nvSpPr>
         <p:spPr>
           <a:xfrm>
-            <a:off x="1828800" y="2514600"/>
+            <a:off x="1828800" y="3383280"/>
             <a:ext cx="5212080" cy="658368"/>
           </a:xfrm>
           <a:prstGeom prst="rect">
@@ -7067,7 +7745,7 @@
           <a:noFill/>
         </p:spPr>
         <p:txBody>
-          <a:bodyPr wrap="square" anchor="ctr" lIns="45720" rIns="45720" tIns="27432" bIns="27432">
+          <a:bodyPr wrap="square" lIns="45720" tIns="27432" rIns="45720" bIns="27432" anchor="ctr">
             <a:spAutoFit/>
           </a:bodyPr>
           <a:lstStyle/>
@@ -7084,7 +7762,7 @@
                 </a:solidFill>
                 <a:latin typeface="Arial"/>
               </a:rPr>
-              <a:t>GASF</a:t>
+              <a:t>DWT</a:t>
             </a:r>
             <a:r>
               <a:rPr sz="2400" b="0" i="0">
@@ -7093,20 +7771,20 @@
                 </a:solidFill>
                 <a:latin typeface="Arial"/>
               </a:rPr>
-              <a:t> image encoding</a:t>
-            </a:r>
-          </a:p>
-        </p:txBody>
-      </p:sp>
-      <p:sp>
-        <p:nvSpPr>
-          <p:cNvPr id="13" name="Icon badge"/>
+              <a:t> resampling to 128 Hz</a:t>
+            </a:r>
+          </a:p>
+        </p:txBody>
+      </p:sp>
+      <p:sp>
+        <p:nvSpPr>
+          <p:cNvPr id="16" name="Icon badge"/>
           <p:cNvSpPr/>
           <p:nvPr/>
         </p:nvSpPr>
         <p:spPr>
           <a:xfrm>
-            <a:off x="1097280" y="3429000"/>
+            <a:off x="1097280" y="4297679"/>
             <a:ext cx="566928" cy="566928"/>
           </a:xfrm>
           <a:prstGeom prst="ellipse">
@@ -7139,12 +7817,13 @@
           <a:lstStyle/>
           <a:p>
             <a:pPr algn="ctr"/>
+            <a:endParaRPr/>
           </a:p>
         </p:txBody>
       </p:sp>
       <p:pic>
         <p:nvPicPr>
-          <p:cNvPr id="14" name="Icon filter" descr="filter_p.png"/>
+          <p:cNvPr id="17" name="Icon brain" descr="brain_p.png"/>
           <p:cNvPicPr>
             <a:picLocks noChangeAspect="1"/>
           </p:cNvPicPr>
@@ -7158,7 +7837,7 @@
         </p:blipFill>
         <p:spPr>
           <a:xfrm>
-            <a:off x="1210665" y="3542385"/>
+            <a:off x="1210665" y="4411065"/>
             <a:ext cx="340156" cy="340156"/>
           </a:xfrm>
           <a:prstGeom prst="rect">
@@ -7168,13 +7847,13 @@
       </p:pic>
       <p:sp>
         <p:nvSpPr>
-          <p:cNvPr id="15" name="TextBox 14"/>
+          <p:cNvPr id="18" name="TextBox 17"/>
           <p:cNvSpPr txBox="1"/>
           <p:nvPr/>
         </p:nvSpPr>
         <p:spPr>
           <a:xfrm>
-            <a:off x="1828800" y="3383280"/>
+            <a:off x="1828800" y="4251959"/>
             <a:ext cx="5212080" cy="658368"/>
           </a:xfrm>
           <a:prstGeom prst="rect">
@@ -7183,7 +7862,7 @@
           <a:noFill/>
         </p:spPr>
         <p:txBody>
-          <a:bodyPr wrap="square" anchor="ctr" lIns="45720" rIns="45720" tIns="27432" bIns="27432">
+          <a:bodyPr wrap="square" lIns="45720" tIns="27432" rIns="45720" bIns="27432" anchor="ctr">
             <a:spAutoFit/>
           </a:bodyPr>
           <a:lstStyle/>
@@ -7200,7 +7879,7 @@
                 </a:solidFill>
                 <a:latin typeface="Arial"/>
               </a:rPr>
-              <a:t>DWT</a:t>
+              <a:t>Fine-tuned</a:t>
             </a:r>
             <a:r>
               <a:rPr sz="2400" b="0" i="0">
@@ -7209,20 +7888,20 @@
                 </a:solidFill>
                 <a:latin typeface="Arial"/>
               </a:rPr>
-              <a:t> resampling to 128 Hz</a:t>
-            </a:r>
-          </a:p>
-        </p:txBody>
-      </p:sp>
-      <p:sp>
-        <p:nvSpPr>
-          <p:cNvPr id="16" name="Icon badge"/>
+              <a:t> ImageNet ViT-B/16</a:t>
+            </a:r>
+          </a:p>
+        </p:txBody>
+      </p:sp>
+      <p:sp>
+        <p:nvSpPr>
+          <p:cNvPr id="19" name="Icon badge"/>
           <p:cNvSpPr/>
           <p:nvPr/>
         </p:nvSpPr>
         <p:spPr>
           <a:xfrm>
-            <a:off x="1097280" y="4297679"/>
+            <a:off x="1097280" y="5166359"/>
             <a:ext cx="566928" cy="566928"/>
           </a:xfrm>
           <a:prstGeom prst="ellipse">
@@ -7255,12 +7934,13 @@
           <a:lstStyle/>
           <a:p>
             <a:pPr algn="ctr"/>
+            <a:endParaRPr/>
           </a:p>
         </p:txBody>
       </p:sp>
       <p:pic>
         <p:nvPicPr>
-          <p:cNvPr id="17" name="Icon brain" descr="brain_p.png"/>
+          <p:cNvPr id="20" name="Icon medal" descr="medal_p.png"/>
           <p:cNvPicPr>
             <a:picLocks noChangeAspect="1"/>
           </p:cNvPicPr>
@@ -7274,7 +7954,7 @@
         </p:blipFill>
         <p:spPr>
           <a:xfrm>
-            <a:off x="1210665" y="4411065"/>
+            <a:off x="1210665" y="5279745"/>
             <a:ext cx="340156" cy="340156"/>
           </a:xfrm>
           <a:prstGeom prst="rect">
@@ -7284,13 +7964,13 @@
       </p:pic>
       <p:sp>
         <p:nvSpPr>
-          <p:cNvPr id="18" name="TextBox 17"/>
+          <p:cNvPr id="21" name="TextBox 20"/>
           <p:cNvSpPr txBox="1"/>
           <p:nvPr/>
         </p:nvSpPr>
         <p:spPr>
           <a:xfrm>
-            <a:off x="1828800" y="4251959"/>
+            <a:off x="1828800" y="5120640"/>
             <a:ext cx="5212080" cy="658368"/>
           </a:xfrm>
           <a:prstGeom prst="rect">
@@ -7299,7 +7979,7 @@
           <a:noFill/>
         </p:spPr>
         <p:txBody>
-          <a:bodyPr wrap="square" anchor="ctr" lIns="45720" rIns="45720" tIns="27432" bIns="27432">
+          <a:bodyPr wrap="square" lIns="45720" tIns="27432" rIns="45720" bIns="27432" anchor="ctr">
             <a:spAutoFit/>
           </a:bodyPr>
           <a:lstStyle/>
@@ -7316,7 +7996,7 @@
                 </a:solidFill>
                 <a:latin typeface="Arial"/>
               </a:rPr>
-              <a:t>Fine-tuned</a:t>
+              <a:t>86.2%</a:t>
             </a:r>
             <a:r>
               <a:rPr sz="2400" b="0" i="0">
@@ -7325,27 +8005,29 @@
                 </a:solidFill>
                 <a:latin typeface="Arial"/>
               </a:rPr>
-              <a:t> ImageNet ViT-B/16</a:t>
-            </a:r>
-          </a:p>
-        </p:txBody>
-      </p:sp>
-      <p:sp>
-        <p:nvSpPr>
-          <p:cNvPr id="19" name="Icon badge"/>
+              <a:t> accuracy, 0.853 macro-F1</a:t>
+            </a:r>
+          </a:p>
+        </p:txBody>
+      </p:sp>
+      <p:sp>
+        <p:nvSpPr>
+          <p:cNvPr id="22" name="Future card"/>
           <p:cNvSpPr/>
           <p:nvPr/>
         </p:nvSpPr>
         <p:spPr>
           <a:xfrm>
-            <a:off x="1097280" y="5166359"/>
-            <a:ext cx="566928" cy="566928"/>
-          </a:xfrm>
-          <a:prstGeom prst="ellipse">
-            <a:avLst/>
+            <a:off x="7498079" y="1645920"/>
+            <a:ext cx="3858768" cy="4389120"/>
+          </a:xfrm>
+          <a:prstGeom prst="roundRect">
+            <a:avLst>
+              <a:gd name="adj" fmla="val 6000"/>
+            </a:avLst>
           </a:prstGeom>
           <a:solidFill>
-            <a:srgbClr val="FFFFFF"/>
+            <a:srgbClr val="F1E9F7"/>
           </a:solidFill>
           <a:ln>
             <a:noFill/>
@@ -7371,12 +8053,97 @@
           <a:lstStyle/>
           <a:p>
             <a:pPr algn="ctr"/>
+            <a:endParaRPr/>
+          </a:p>
+        </p:txBody>
+      </p:sp>
+      <p:sp>
+        <p:nvSpPr>
+          <p:cNvPr id="23" name="TextBox 22"/>
+          <p:cNvSpPr txBox="1"/>
+          <p:nvPr/>
+        </p:nvSpPr>
+        <p:spPr>
+          <a:xfrm>
+            <a:off x="7726679" y="1737360"/>
+            <a:ext cx="3474720" cy="548640"/>
+          </a:xfrm>
+          <a:prstGeom prst="rect">
+            <a:avLst/>
+          </a:prstGeom>
+          <a:noFill/>
+        </p:spPr>
+        <p:txBody>
+          <a:bodyPr wrap="square" lIns="45720" tIns="27432" rIns="45720" bIns="27432" anchor="ctr">
+            <a:spAutoFit/>
+          </a:bodyPr>
+          <a:lstStyle/>
+          <a:p>
+            <a:pPr algn="l">
+              <a:spcAft>
+                <a:spcPts val="600"/>
+              </a:spcAft>
+            </a:pPr>
+            <a:r>
+              <a:rPr sz="2800" b="1" i="0">
+                <a:solidFill>
+                  <a:srgbClr val="6A2C91"/>
+                </a:solidFill>
+                <a:latin typeface="Arial"/>
+              </a:rPr>
+              <a:t>Future work</a:t>
+            </a:r>
+          </a:p>
+        </p:txBody>
+      </p:sp>
+      <p:sp>
+        <p:nvSpPr>
+          <p:cNvPr id="24" name="Icon badge"/>
+          <p:cNvSpPr/>
+          <p:nvPr/>
+        </p:nvSpPr>
+        <p:spPr>
+          <a:xfrm>
+            <a:off x="7726679" y="2651760"/>
+            <a:ext cx="566928" cy="566928"/>
+          </a:xfrm>
+          <a:prstGeom prst="ellipse">
+            <a:avLst/>
+          </a:prstGeom>
+          <a:solidFill>
+            <a:srgbClr val="6A2C91"/>
+          </a:solidFill>
+          <a:ln>
+            <a:noFill/>
+          </a:ln>
+          <a:effectLst/>
+        </p:spPr>
+        <p:style>
+          <a:lnRef idx="1">
+            <a:schemeClr val="accent1"/>
+          </a:lnRef>
+          <a:fillRef idx="3">
+            <a:schemeClr val="accent1"/>
+          </a:fillRef>
+          <a:effectRef idx="2">
+            <a:schemeClr val="accent1"/>
+          </a:effectRef>
+          <a:fontRef idx="minor">
+            <a:schemeClr val="lt1"/>
+          </a:fontRef>
+        </p:style>
+        <p:txBody>
+          <a:bodyPr rtlCol="0" anchor="ctr"/>
+          <a:lstStyle/>
+          <a:p>
+            <a:pPr algn="ctr"/>
+            <a:endParaRPr/>
           </a:p>
         </p:txBody>
       </p:sp>
       <p:pic>
         <p:nvPicPr>
-          <p:cNvPr id="20" name="Icon medal" descr="medal_p.png"/>
+          <p:cNvPr id="25" name="Icon layer" descr="layer_w.png"/>
           <p:cNvPicPr>
             <a:picLocks noChangeAspect="1"/>
           </p:cNvPicPr>
@@ -7390,7 +8157,7 @@
         </p:blipFill>
         <p:spPr>
           <a:xfrm>
-            <a:off x="1210665" y="5279745"/>
+            <a:off x="7840065" y="2765145"/>
             <a:ext cx="340156" cy="340156"/>
           </a:xfrm>
           <a:prstGeom prst="rect">
@@ -7400,14 +8167,14 @@
       </p:pic>
       <p:sp>
         <p:nvSpPr>
-          <p:cNvPr id="21" name="TextBox 20"/>
+          <p:cNvPr id="26" name="TextBox 25"/>
           <p:cNvSpPr txBox="1"/>
           <p:nvPr/>
         </p:nvSpPr>
         <p:spPr>
           <a:xfrm>
-            <a:off x="1828800" y="5120640"/>
-            <a:ext cx="5212080" cy="658368"/>
+            <a:off x="8412480" y="2560320"/>
+            <a:ext cx="2834640" cy="749808"/>
           </a:xfrm>
           <a:prstGeom prst="rect">
             <a:avLst/>
@@ -7415,7 +8182,7 @@
           <a:noFill/>
         </p:spPr>
         <p:txBody>
-          <a:bodyPr wrap="square" anchor="ctr" lIns="45720" rIns="45720" tIns="27432" bIns="27432">
+          <a:bodyPr wrap="square" lIns="45720" tIns="27432" rIns="45720" bIns="27432" anchor="ctr">
             <a:spAutoFit/>
           </a:bodyPr>
           <a:lstStyle/>
@@ -7426,120 +8193,26 @@
               </a:spcAft>
             </a:pPr>
             <a:r>
-              <a:rPr sz="2400" b="1" i="0">
+              <a:rPr sz="2000" b="0" i="0">
                 <a:solidFill>
-                  <a:srgbClr val="FFFFFF"/>
+                  <a:srgbClr val="222222"/>
                 </a:solidFill>
                 <a:latin typeface="Arial"/>
               </a:rPr>
-              <a:t>86.2%</a:t>
-            </a:r>
-            <a:r>
-              <a:rPr sz="2400" b="0" i="0">
-                <a:solidFill>
-                  <a:srgbClr val="FFFFFF"/>
-                </a:solidFill>
-                <a:latin typeface="Arial"/>
-              </a:rPr>
-              <a:t> accuracy, 0.853 macro-F1</a:t>
-            </a:r>
-          </a:p>
-        </p:txBody>
-      </p:sp>
-      <p:sp>
-        <p:nvSpPr>
-          <p:cNvPr id="22" name="Future card"/>
+              <a:t>Multimodal fusion</a:t>
+            </a:r>
+          </a:p>
+        </p:txBody>
+      </p:sp>
+      <p:sp>
+        <p:nvSpPr>
+          <p:cNvPr id="27" name="Icon badge"/>
           <p:cNvSpPr/>
           <p:nvPr/>
         </p:nvSpPr>
         <p:spPr>
           <a:xfrm>
-            <a:off x="7498079" y="1645920"/>
-            <a:ext cx="3858768" cy="4389120"/>
-          </a:xfrm>
-          <a:prstGeom prst="roundRect">
-            <a:avLst>
-              <a:gd name="adj" fmla="val 6000"/>
-            </a:avLst>
-          </a:prstGeom>
-          <a:solidFill>
-            <a:srgbClr val="F1E9F7"/>
-          </a:solidFill>
-          <a:ln>
-            <a:noFill/>
-          </a:ln>
-          <a:effectLst/>
-        </p:spPr>
-        <p:style>
-          <a:lnRef idx="1">
-            <a:schemeClr val="accent1"/>
-          </a:lnRef>
-          <a:fillRef idx="3">
-            <a:schemeClr val="accent1"/>
-          </a:fillRef>
-          <a:effectRef idx="2">
-            <a:schemeClr val="accent1"/>
-          </a:effectRef>
-          <a:fontRef idx="minor">
-            <a:schemeClr val="lt1"/>
-          </a:fontRef>
-        </p:style>
-        <p:txBody>
-          <a:bodyPr rtlCol="0" anchor="ctr"/>
-          <a:lstStyle/>
-          <a:p>
-            <a:pPr algn="ctr"/>
-          </a:p>
-        </p:txBody>
-      </p:sp>
-      <p:sp>
-        <p:nvSpPr>
-          <p:cNvPr id="23" name="TextBox 22"/>
-          <p:cNvSpPr txBox="1"/>
-          <p:nvPr/>
-        </p:nvSpPr>
-        <p:spPr>
-          <a:xfrm>
-            <a:off x="7726679" y="1737360"/>
-            <a:ext cx="3474720" cy="548640"/>
-          </a:xfrm>
-          <a:prstGeom prst="rect">
-            <a:avLst/>
-          </a:prstGeom>
-          <a:noFill/>
-        </p:spPr>
-        <p:txBody>
-          <a:bodyPr wrap="square" anchor="ctr" lIns="45720" rIns="45720" tIns="27432" bIns="27432">
-            <a:spAutoFit/>
-          </a:bodyPr>
-          <a:lstStyle/>
-          <a:p>
-            <a:pPr algn="l">
-              <a:spcAft>
-                <a:spcPts val="600"/>
-              </a:spcAft>
-            </a:pPr>
-            <a:r>
-              <a:rPr sz="2800" b="1" i="0">
-                <a:solidFill>
-                  <a:srgbClr val="6A2C91"/>
-                </a:solidFill>
-                <a:latin typeface="Arial"/>
-              </a:rPr>
-              <a:t>Future work</a:t>
-            </a:r>
-          </a:p>
-        </p:txBody>
-      </p:sp>
-      <p:sp>
-        <p:nvSpPr>
-          <p:cNvPr id="24" name="Icon badge"/>
-          <p:cNvSpPr/>
-          <p:nvPr/>
-        </p:nvSpPr>
-        <p:spPr>
-          <a:xfrm>
-            <a:off x="7726679" y="2651760"/>
+            <a:off x="7726679" y="3749039"/>
             <a:ext cx="566928" cy="566928"/>
           </a:xfrm>
           <a:prstGeom prst="ellipse">
@@ -7572,12 +8245,13 @@
           <a:lstStyle/>
           <a:p>
             <a:pPr algn="ctr"/>
+            <a:endParaRPr/>
           </a:p>
         </p:txBody>
       </p:sp>
       <p:pic>
         <p:nvPicPr>
-          <p:cNvPr id="25" name="Icon layer" descr="layer_w.png"/>
+          <p:cNvPr id="28" name="Icon bolt" descr="bolt_w.png"/>
           <p:cNvPicPr>
             <a:picLocks noChangeAspect="1"/>
           </p:cNvPicPr>
@@ -7591,7 +8265,7 @@
         </p:blipFill>
         <p:spPr>
           <a:xfrm>
-            <a:off x="7840065" y="2765145"/>
+            <a:off x="7840065" y="3862425"/>
             <a:ext cx="340156" cy="340156"/>
           </a:xfrm>
           <a:prstGeom prst="rect">
@@ -7601,13 +8275,13 @@
       </p:pic>
       <p:sp>
         <p:nvSpPr>
-          <p:cNvPr id="26" name="TextBox 25"/>
+          <p:cNvPr id="29" name="TextBox 28"/>
           <p:cNvSpPr txBox="1"/>
           <p:nvPr/>
         </p:nvSpPr>
         <p:spPr>
           <a:xfrm>
-            <a:off x="8412480" y="2560320"/>
+            <a:off x="8412480" y="3657599"/>
             <a:ext cx="2834640" cy="749808"/>
           </a:xfrm>
           <a:prstGeom prst="rect">
@@ -7616,7 +8290,7 @@
           <a:noFill/>
         </p:spPr>
         <p:txBody>
-          <a:bodyPr wrap="square" anchor="ctr" lIns="45720" rIns="45720" tIns="27432" bIns="27432">
+          <a:bodyPr wrap="square" lIns="45720" tIns="27432" rIns="45720" bIns="27432" anchor="ctr">
             <a:spAutoFit/>
           </a:bodyPr>
           <a:lstStyle/>
@@ -7633,20 +8307,20 @@
                 </a:solidFill>
                 <a:latin typeface="Arial"/>
               </a:rPr>
-              <a:t>Multimodal fusion</a:t>
-            </a:r>
-          </a:p>
-        </p:txBody>
-      </p:sp>
-      <p:sp>
-        <p:nvSpPr>
-          <p:cNvPr id="27" name="Icon badge"/>
+              <a:t>Lightweight ViTs for edge use</a:t>
+            </a:r>
+          </a:p>
+        </p:txBody>
+      </p:sp>
+      <p:sp>
+        <p:nvSpPr>
+          <p:cNvPr id="30" name="Icon badge"/>
           <p:cNvSpPr/>
           <p:nvPr/>
         </p:nvSpPr>
         <p:spPr>
           <a:xfrm>
-            <a:off x="7726679" y="3749039"/>
+            <a:off x="7726679" y="4846320"/>
             <a:ext cx="566928" cy="566928"/>
           </a:xfrm>
           <a:prstGeom prst="ellipse">
@@ -7679,12 +8353,13 @@
           <a:lstStyle/>
           <a:p>
             <a:pPr algn="ctr"/>
+            <a:endParaRPr/>
           </a:p>
         </p:txBody>
       </p:sp>
       <p:pic>
         <p:nvPicPr>
-          <p:cNvPr id="28" name="Icon bolt" descr="bolt_w.png"/>
+          <p:cNvPr id="31" name="Icon db" descr="db_w.png"/>
           <p:cNvPicPr>
             <a:picLocks noChangeAspect="1"/>
           </p:cNvPicPr>
@@ -7698,7 +8373,7 @@
         </p:blipFill>
         <p:spPr>
           <a:xfrm>
-            <a:off x="7840065" y="3862425"/>
+            <a:off x="7840065" y="4959705"/>
             <a:ext cx="340156" cy="340156"/>
           </a:xfrm>
           <a:prstGeom prst="rect">
@@ -7708,13 +8383,13 @@
       </p:pic>
       <p:sp>
         <p:nvSpPr>
-          <p:cNvPr id="29" name="TextBox 28"/>
+          <p:cNvPr id="32" name="TextBox 31"/>
           <p:cNvSpPr txBox="1"/>
           <p:nvPr/>
         </p:nvSpPr>
         <p:spPr>
           <a:xfrm>
-            <a:off x="8412480" y="3657599"/>
+            <a:off x="8412480" y="4754880"/>
             <a:ext cx="2834640" cy="749808"/>
           </a:xfrm>
           <a:prstGeom prst="rect">
@@ -7723,114 +8398,7 @@
           <a:noFill/>
         </p:spPr>
         <p:txBody>
-          <a:bodyPr wrap="square" anchor="ctr" lIns="45720" rIns="45720" tIns="27432" bIns="27432">
-            <a:spAutoFit/>
-          </a:bodyPr>
-          <a:lstStyle/>
-          <a:p>
-            <a:pPr algn="l">
-              <a:spcAft>
-                <a:spcPts val="600"/>
-              </a:spcAft>
-            </a:pPr>
-            <a:r>
-              <a:rPr sz="2000" b="0" i="0">
-                <a:solidFill>
-                  <a:srgbClr val="222222"/>
-                </a:solidFill>
-                <a:latin typeface="Arial"/>
-              </a:rPr>
-              <a:t>Lightweight ViTs for edge use</a:t>
-            </a:r>
-          </a:p>
-        </p:txBody>
-      </p:sp>
-      <p:sp>
-        <p:nvSpPr>
-          <p:cNvPr id="30" name="Icon badge"/>
-          <p:cNvSpPr/>
-          <p:nvPr/>
-        </p:nvSpPr>
-        <p:spPr>
-          <a:xfrm>
-            <a:off x="7726679" y="4846320"/>
-            <a:ext cx="566928" cy="566928"/>
-          </a:xfrm>
-          <a:prstGeom prst="ellipse">
-            <a:avLst/>
-          </a:prstGeom>
-          <a:solidFill>
-            <a:srgbClr val="6A2C91"/>
-          </a:solidFill>
-          <a:ln>
-            <a:noFill/>
-          </a:ln>
-          <a:effectLst/>
-        </p:spPr>
-        <p:style>
-          <a:lnRef idx="1">
-            <a:schemeClr val="accent1"/>
-          </a:lnRef>
-          <a:fillRef idx="3">
-            <a:schemeClr val="accent1"/>
-          </a:fillRef>
-          <a:effectRef idx="2">
-            <a:schemeClr val="accent1"/>
-          </a:effectRef>
-          <a:fontRef idx="minor">
-            <a:schemeClr val="lt1"/>
-          </a:fontRef>
-        </p:style>
-        <p:txBody>
-          <a:bodyPr rtlCol="0" anchor="ctr"/>
-          <a:lstStyle/>
-          <a:p>
-            <a:pPr algn="ctr"/>
-          </a:p>
-        </p:txBody>
-      </p:sp>
-      <p:pic>
-        <p:nvPicPr>
-          <p:cNvPr id="31" name="Icon db" descr="db_w.png"/>
-          <p:cNvPicPr>
-            <a:picLocks noChangeAspect="1"/>
-          </p:cNvPicPr>
-          <p:nvPr/>
-        </p:nvPicPr>
-        <p:blipFill>
-          <a:blip r:embed="rId10"/>
-          <a:stretch>
-            <a:fillRect/>
-          </a:stretch>
-        </p:blipFill>
-        <p:spPr>
-          <a:xfrm>
-            <a:off x="7840065" y="4959705"/>
-            <a:ext cx="340156" cy="340156"/>
-          </a:xfrm>
-          <a:prstGeom prst="rect">
-            <a:avLst/>
-          </a:prstGeom>
-        </p:spPr>
-      </p:pic>
-      <p:sp>
-        <p:nvSpPr>
-          <p:cNvPr id="32" name="TextBox 31"/>
-          <p:cNvSpPr txBox="1"/>
-          <p:nvPr/>
-        </p:nvSpPr>
-        <p:spPr>
-          <a:xfrm>
-            <a:off x="8412480" y="4754880"/>
-            <a:ext cx="2834640" cy="749808"/>
-          </a:xfrm>
-          <a:prstGeom prst="rect">
-            <a:avLst/>
-          </a:prstGeom>
-          <a:noFill/>
-        </p:spPr>
-        <p:txBody>
-          <a:bodyPr wrap="square" anchor="ctr" lIns="45720" rIns="45720" tIns="27432" bIns="27432">
+          <a:bodyPr wrap="square" lIns="45720" tIns="27432" rIns="45720" bIns="27432" anchor="ctr">
             <a:spAutoFit/>
           </a:bodyPr>
           <a:lstStyle/>
@@ -7857,11 +8425,23 @@
   <p:clrMapOvr>
     <a:masterClrMapping/>
   </p:clrMapOvr>
+  <mc:AlternateContent xmlns:mc="http://schemas.openxmlformats.org/markup-compatibility/2006">
+    <mc:Choice xmlns:p14="http://schemas.microsoft.com/office/powerpoint/2010/main" Requires="p14">
+      <p:transition spd="med" p14:dur="600">
+        <p:fade/>
+      </p:transition>
+    </mc:Choice>
+    <mc:Fallback>
+      <p:transition spd="med">
+        <p:fade/>
+      </p:transition>
+    </mc:Fallback>
+  </mc:AlternateContent>
 </p:sld>
 </file>
 
 <file path=ppt/slides/slide13.xml><?xml version="1.0" encoding="utf-8"?>
-<p:sld xmlns:a="http://schemas.openxmlformats.org/drawingml/2006/main" xmlns:p="http://schemas.openxmlformats.org/presentationml/2006/main" xmlns:r="http://schemas.openxmlformats.org/officeDocument/2006/relationships">
+<p:sld xmlns:a="http://schemas.openxmlformats.org/drawingml/2006/main" xmlns:r="http://schemas.openxmlformats.org/officeDocument/2006/relationships" xmlns:p="http://schemas.openxmlformats.org/presentationml/2006/main">
   <p:cSld>
     <p:spTree>
       <p:nvGrpSpPr>
@@ -7869,7 +8449,14 @@
         <p:cNvGrpSpPr/>
         <p:nvPr/>
       </p:nvGrpSpPr>
-      <p:grpSpPr/>
+      <p:grpSpPr>
+        <a:xfrm>
+          <a:off x="0" y="0"/>
+          <a:ext cx="0" cy="0"/>
+          <a:chOff x="0" y="0"/>
+          <a:chExt cx="0" cy="0"/>
+        </a:xfrm>
+      </p:grpSpPr>
       <p:sp>
         <p:nvSpPr>
           <p:cNvPr id="2" name="Title 1"/>
@@ -8090,21 +8677,7 @@
                 <a:latin typeface="Arial" panose="020B0604020202020204" pitchFamily="34" charset="0"/>
                 <a:cs typeface="Arial" panose="020B0604020202020204" pitchFamily="34" charset="0"/>
               </a:rPr>
-              <a:t>Paper ID: </a:t>
-            </a:r>
-            <a:r>
-              <a:rPr lang="en-US" sz="1600" dirty="0">
-                <a:latin typeface="Arial" panose="020B0604020202020204" pitchFamily="34" charset="0"/>
-                <a:cs typeface="Arial" panose="020B0604020202020204" pitchFamily="34" charset="0"/>
-              </a:rPr>
-              <a:t>45</a:t>
-            </a:r>
-            <a:r>
-              <a:rPr lang="en-US" sz="1600" dirty="0">
-                <a:latin typeface="Arial" panose="020B0604020202020204" pitchFamily="34" charset="0"/>
-                <a:cs typeface="Arial" panose="020B0604020202020204" pitchFamily="34" charset="0"/>
-              </a:rPr>
-              <a:t> </a:t>
+              <a:t>Paper ID: 45 </a:t>
             </a:r>
             <a:endParaRPr lang="en-US" sz="1600" dirty="0"/>
           </a:p>
@@ -8213,6 +8786,18 @@
   <p:clrMapOvr>
     <a:masterClrMapping/>
   </p:clrMapOvr>
+  <mc:AlternateContent xmlns:mc="http://schemas.openxmlformats.org/markup-compatibility/2006">
+    <mc:Choice xmlns:p14="http://schemas.microsoft.com/office/powerpoint/2010/main" Requires="p14">
+      <p:transition spd="med" p14:dur="600">
+        <p:fade/>
+      </p:transition>
+    </mc:Choice>
+    <mc:Fallback>
+      <p:transition spd="med">
+        <p:fade/>
+      </p:transition>
+    </mc:Fallback>
+  </mc:AlternateContent>
 </p:sld>
 </file>
 
@@ -8433,12 +9018,130 @@
           <a:lstStyle/>
           <a:p>
             <a:pPr algn="ctr"/>
+            <a:endParaRPr/>
           </a:p>
         </p:txBody>
       </p:sp>
       <p:pic>
         <p:nvPicPr>
           <p:cNvPr id="9" name="Icon moon" descr="moon_w.png"/>
+          <p:cNvPicPr>
+            <a:picLocks noChangeAspect="1"/>
+          </p:cNvPicPr>
+          <p:nvPr/>
+        </p:nvPicPr>
+        <p:blipFill>
+          <a:blip r:embed="rId3"/>
+          <a:stretch>
+            <a:fillRect/>
+          </a:stretch>
+        </p:blipFill>
+        <p:spPr>
+          <a:xfrm>
+            <a:off x="996696" y="1847088"/>
+            <a:ext cx="466344" cy="466344"/>
+          </a:xfrm>
+          <a:prstGeom prst="rect">
+            <a:avLst/>
+          </a:prstGeom>
+        </p:spPr>
+      </p:pic>
+      <p:sp>
+        <p:nvSpPr>
+          <p:cNvPr id="10" name="TextBox 9"/>
+          <p:cNvSpPr txBox="1"/>
+          <p:nvPr/>
+        </p:nvSpPr>
+        <p:spPr>
+          <a:xfrm>
+            <a:off x="1783080" y="1645920"/>
+            <a:ext cx="4937760" cy="868680"/>
+          </a:xfrm>
+          <a:prstGeom prst="rect">
+            <a:avLst/>
+          </a:prstGeom>
+          <a:noFill/>
+        </p:spPr>
+        <p:txBody>
+          <a:bodyPr wrap="square" lIns="45720" tIns="27432" rIns="45720" bIns="27432" anchor="ctr">
+            <a:spAutoFit/>
+          </a:bodyPr>
+          <a:lstStyle/>
+          <a:p>
+            <a:pPr algn="l">
+              <a:spcAft>
+                <a:spcPts val="600"/>
+              </a:spcAft>
+            </a:pPr>
+            <a:r>
+              <a:rPr sz="2200" b="1" i="0">
+                <a:solidFill>
+                  <a:srgbClr val="6A2C91"/>
+                </a:solidFill>
+                <a:latin typeface="Arial"/>
+              </a:rPr>
+              <a:t>Sleep disorders</a:t>
+            </a:r>
+            <a:r>
+              <a:rPr sz="2200" b="0" i="0">
+                <a:solidFill>
+                  <a:srgbClr val="222222"/>
+                </a:solidFill>
+                <a:latin typeface="Arial"/>
+              </a:rPr>
+              <a:t> (insomnia, apnoea, narcolepsy) are widespread</a:t>
+            </a:r>
+          </a:p>
+        </p:txBody>
+      </p:sp>
+      <p:sp>
+        <p:nvSpPr>
+          <p:cNvPr id="11" name="Icon badge"/>
+          <p:cNvSpPr/>
+          <p:nvPr/>
+        </p:nvSpPr>
+        <p:spPr>
+          <a:xfrm>
+            <a:off x="841248" y="2770632"/>
+            <a:ext cx="777240" cy="777240"/>
+          </a:xfrm>
+          <a:prstGeom prst="ellipse">
+            <a:avLst/>
+          </a:prstGeom>
+          <a:solidFill>
+            <a:srgbClr val="6A2C91"/>
+          </a:solidFill>
+          <a:ln>
+            <a:noFill/>
+          </a:ln>
+          <a:effectLst/>
+        </p:spPr>
+        <p:style>
+          <a:lnRef idx="1">
+            <a:schemeClr val="accent1"/>
+          </a:lnRef>
+          <a:fillRef idx="3">
+            <a:schemeClr val="accent1"/>
+          </a:fillRef>
+          <a:effectRef idx="2">
+            <a:schemeClr val="accent1"/>
+          </a:effectRef>
+          <a:fontRef idx="minor">
+            <a:schemeClr val="lt1"/>
+          </a:fontRef>
+        </p:style>
+        <p:txBody>
+          <a:bodyPr rtlCol="0" anchor="ctr"/>
+          <a:lstStyle/>
+          <a:p>
+            <a:pPr algn="ctr"/>
+            <a:endParaRPr/>
+          </a:p>
+        </p:txBody>
+      </p:sp>
+      <p:pic>
+        <p:nvPicPr>
+          <p:cNvPr id="12" name="Icon wave" descr="wave_w.png"/>
           <p:cNvPicPr>
             <a:picLocks noChangeAspect="1"/>
           </p:cNvPicPr>
@@ -8452,7 +9155,7 @@
         </p:blipFill>
         <p:spPr>
           <a:xfrm>
-            <a:off x="996696" y="1847088"/>
+            <a:off x="996696" y="2926080"/>
             <a:ext cx="466344" cy="466344"/>
           </a:xfrm>
           <a:prstGeom prst="rect">
@@ -8462,13 +9165,13 @@
       </p:pic>
       <p:sp>
         <p:nvSpPr>
-          <p:cNvPr id="10" name="TextBox 9"/>
+          <p:cNvPr id="13" name="TextBox 12"/>
           <p:cNvSpPr txBox="1"/>
           <p:nvPr/>
         </p:nvSpPr>
         <p:spPr>
           <a:xfrm>
-            <a:off x="1783080" y="1645920"/>
+            <a:off x="1783080" y="2724912"/>
             <a:ext cx="4937760" cy="868680"/>
           </a:xfrm>
           <a:prstGeom prst="rect">
@@ -8477,7 +9180,7 @@
           <a:noFill/>
         </p:spPr>
         <p:txBody>
-          <a:bodyPr wrap="square" anchor="ctr" lIns="45720" rIns="45720" tIns="27432" bIns="27432">
+          <a:bodyPr wrap="square" lIns="45720" tIns="27432" rIns="45720" bIns="27432" anchor="ctr">
             <a:spAutoFit/>
           </a:bodyPr>
           <a:lstStyle/>
@@ -8494,7 +9197,7 @@
                 </a:solidFill>
                 <a:latin typeface="Arial"/>
               </a:rPr>
-              <a:t>Sleep disorders</a:t>
+              <a:t>Gold standard:</a:t>
             </a:r>
             <a:r>
               <a:rPr sz="2200" b="0" i="0">
@@ -8503,20 +9206,20 @@
                 </a:solidFill>
                 <a:latin typeface="Arial"/>
               </a:rPr>
-              <a:t> (insomnia, apnoea, narcolepsy) are widespread</a:t>
-            </a:r>
-          </a:p>
-        </p:txBody>
-      </p:sp>
-      <p:sp>
-        <p:nvSpPr>
-          <p:cNvPr id="11" name="Icon badge"/>
+              <a:t> manual scoring of polysomnography (PSG)</a:t>
+            </a:r>
+          </a:p>
+        </p:txBody>
+      </p:sp>
+      <p:sp>
+        <p:nvSpPr>
+          <p:cNvPr id="14" name="Icon badge"/>
           <p:cNvSpPr/>
           <p:nvPr/>
         </p:nvSpPr>
         <p:spPr>
           <a:xfrm>
-            <a:off x="841248" y="2770632"/>
+            <a:off x="841248" y="3849624"/>
             <a:ext cx="777240" cy="777240"/>
           </a:xfrm>
           <a:prstGeom prst="ellipse">
@@ -8549,12 +9252,13 @@
           <a:lstStyle/>
           <a:p>
             <a:pPr algn="ctr"/>
+            <a:endParaRPr/>
           </a:p>
         </p:txBody>
       </p:sp>
       <p:pic>
         <p:nvPicPr>
-          <p:cNvPr id="12" name="Icon wave" descr="wave_w.png"/>
+          <p:cNvPr id="15" name="Icon clock" descr="clock_w.png"/>
           <p:cNvPicPr>
             <a:picLocks noChangeAspect="1"/>
           </p:cNvPicPr>
@@ -8568,7 +9272,7 @@
         </p:blipFill>
         <p:spPr>
           <a:xfrm>
-            <a:off x="996696" y="2926080"/>
+            <a:off x="996696" y="4005072"/>
             <a:ext cx="466344" cy="466344"/>
           </a:xfrm>
           <a:prstGeom prst="rect">
@@ -8578,13 +9282,13 @@
       </p:pic>
       <p:sp>
         <p:nvSpPr>
-          <p:cNvPr id="13" name="TextBox 12"/>
+          <p:cNvPr id="16" name="TextBox 15"/>
           <p:cNvSpPr txBox="1"/>
           <p:nvPr/>
         </p:nvSpPr>
         <p:spPr>
           <a:xfrm>
-            <a:off x="1783080" y="2724912"/>
+            <a:off x="1783080" y="3803904"/>
             <a:ext cx="4937760" cy="868680"/>
           </a:xfrm>
           <a:prstGeom prst="rect">
@@ -8593,7 +9297,7 @@
           <a:noFill/>
         </p:spPr>
         <p:txBody>
-          <a:bodyPr wrap="square" anchor="ctr" lIns="45720" rIns="45720" tIns="27432" bIns="27432">
+          <a:bodyPr wrap="square" lIns="45720" tIns="27432" rIns="45720" bIns="27432" anchor="ctr">
             <a:spAutoFit/>
           </a:bodyPr>
           <a:lstStyle/>
@@ -8610,7 +9314,7 @@
                 </a:solidFill>
                 <a:latin typeface="Arial"/>
               </a:rPr>
-              <a:t>Gold standard:</a:t>
+              <a:t>Slow and subjective:</a:t>
             </a:r>
             <a:r>
               <a:rPr sz="2200" b="0" i="0">
@@ -8619,20 +9323,20 @@
                 </a:solidFill>
                 <a:latin typeface="Arial"/>
               </a:rPr>
-              <a:t> manual scoring of polysomnography (PSG)</a:t>
-            </a:r>
-          </a:p>
-        </p:txBody>
-      </p:sp>
-      <p:sp>
-        <p:nvSpPr>
-          <p:cNvPr id="14" name="Icon badge"/>
+              <a:t> hours per night; experts disagree</a:t>
+            </a:r>
+          </a:p>
+        </p:txBody>
+      </p:sp>
+      <p:sp>
+        <p:nvSpPr>
+          <p:cNvPr id="17" name="Icon badge"/>
           <p:cNvSpPr/>
           <p:nvPr/>
         </p:nvSpPr>
         <p:spPr>
           <a:xfrm>
-            <a:off x="841248" y="3849624"/>
+            <a:off x="841248" y="4928616"/>
             <a:ext cx="777240" cy="777240"/>
           </a:xfrm>
           <a:prstGeom prst="ellipse">
@@ -8665,12 +9369,13 @@
           <a:lstStyle/>
           <a:p>
             <a:pPr algn="ctr"/>
+            <a:endParaRPr/>
           </a:p>
         </p:txBody>
       </p:sp>
       <p:pic>
         <p:nvPicPr>
-          <p:cNvPr id="15" name="Icon clock" descr="clock_w.png"/>
+          <p:cNvPr id="18" name="Icon brain" descr="brain_w.png"/>
           <p:cNvPicPr>
             <a:picLocks noChangeAspect="1"/>
           </p:cNvPicPr>
@@ -8684,7 +9389,7 @@
         </p:blipFill>
         <p:spPr>
           <a:xfrm>
-            <a:off x="996696" y="4005072"/>
+            <a:off x="996696" y="5084064"/>
             <a:ext cx="466344" cy="466344"/>
           </a:xfrm>
           <a:prstGeom prst="rect">
@@ -8694,13 +9399,13 @@
       </p:pic>
       <p:sp>
         <p:nvSpPr>
-          <p:cNvPr id="16" name="TextBox 15"/>
+          <p:cNvPr id="19" name="TextBox 18"/>
           <p:cNvSpPr txBox="1"/>
           <p:nvPr/>
         </p:nvSpPr>
         <p:spPr>
           <a:xfrm>
-            <a:off x="1783080" y="3803904"/>
+            <a:off x="1783080" y="4882896"/>
             <a:ext cx="4937760" cy="868680"/>
           </a:xfrm>
           <a:prstGeom prst="rect">
@@ -8709,7 +9414,7 @@
           <a:noFill/>
         </p:spPr>
         <p:txBody>
-          <a:bodyPr wrap="square" anchor="ctr" lIns="45720" rIns="45720" tIns="27432" bIns="27432">
+          <a:bodyPr wrap="square" lIns="45720" tIns="27432" rIns="45720" bIns="27432" anchor="ctr">
             <a:spAutoFit/>
           </a:bodyPr>
           <a:lstStyle/>
@@ -8726,7 +9431,7 @@
                 </a:solidFill>
                 <a:latin typeface="Arial"/>
               </a:rPr>
-              <a:t>Slow and subjective:</a:t>
+              <a:t>Deep learning:</a:t>
             </a:r>
             <a:r>
               <a:rPr sz="2200" b="0" i="0">
@@ -8735,24 +9440,276 @@
                 </a:solidFill>
                 <a:latin typeface="Arial"/>
               </a:rPr>
-              <a:t> hours per night; experts disagree</a:t>
-            </a:r>
-          </a:p>
-        </p:txBody>
-      </p:sp>
-      <p:sp>
-        <p:nvSpPr>
-          <p:cNvPr id="17" name="Icon badge"/>
+              <a:t> CNN/RNN → Vision Transformers (ViTs)</a:t>
+            </a:r>
+          </a:p>
+        </p:txBody>
+      </p:sp>
+      <p:sp>
+        <p:nvSpPr>
+          <p:cNvPr id="20" name="Stat card"/>
           <p:cNvSpPr/>
           <p:nvPr/>
         </p:nvSpPr>
         <p:spPr>
           <a:xfrm>
-            <a:off x="841248" y="4928616"/>
-            <a:ext cx="777240" cy="777240"/>
-          </a:xfrm>
-          <a:prstGeom prst="ellipse">
+            <a:off x="6949440" y="1691640"/>
+            <a:ext cx="2286000" cy="1828800"/>
+          </a:xfrm>
+          <a:prstGeom prst="roundRect">
+            <a:avLst>
+              <a:gd name="adj" fmla="val 6000"/>
+            </a:avLst>
+          </a:prstGeom>
+          <a:solidFill>
+            <a:srgbClr val="F1E9F7"/>
+          </a:solidFill>
+          <a:ln>
+            <a:noFill/>
+          </a:ln>
+          <a:effectLst/>
+        </p:spPr>
+        <p:style>
+          <a:lnRef idx="1">
+            <a:schemeClr val="accent1"/>
+          </a:lnRef>
+          <a:fillRef idx="3">
+            <a:schemeClr val="accent1"/>
+          </a:fillRef>
+          <a:effectRef idx="2">
+            <a:schemeClr val="accent1"/>
+          </a:effectRef>
+          <a:fontRef idx="minor">
+            <a:schemeClr val="lt1"/>
+          </a:fontRef>
+        </p:style>
+        <p:txBody>
+          <a:bodyPr rtlCol="0" anchor="ctr"/>
+          <a:lstStyle/>
+          <a:p>
+            <a:pPr algn="ctr"/>
+            <a:endParaRPr/>
+          </a:p>
+        </p:txBody>
+      </p:sp>
+      <p:sp>
+        <p:nvSpPr>
+          <p:cNvPr id="21" name="Stat value"/>
+          <p:cNvSpPr txBox="1"/>
+          <p:nvPr/>
+        </p:nvSpPr>
+        <p:spPr>
+          <a:xfrm>
+            <a:off x="6949440" y="1764792"/>
+            <a:ext cx="2286000" cy="1005840"/>
+          </a:xfrm>
+          <a:prstGeom prst="rect">
             <a:avLst/>
+          </a:prstGeom>
+          <a:noFill/>
+        </p:spPr>
+        <p:txBody>
+          <a:bodyPr wrap="square" lIns="45720" tIns="27432" rIns="45720" bIns="27432" anchor="ctr">
+            <a:spAutoFit/>
+          </a:bodyPr>
+          <a:lstStyle/>
+          <a:p>
+            <a:pPr algn="ctr">
+              <a:spcAft>
+                <a:spcPts val="600"/>
+              </a:spcAft>
+            </a:pPr>
+            <a:r>
+              <a:rPr sz="3600" b="1" i="0">
+                <a:solidFill>
+                  <a:srgbClr val="6A2C91"/>
+                </a:solidFill>
+                <a:latin typeface="Arial"/>
+              </a:rPr>
+              <a:t>2–4 h</a:t>
+            </a:r>
+          </a:p>
+        </p:txBody>
+      </p:sp>
+      <p:sp>
+        <p:nvSpPr>
+          <p:cNvPr id="22" name="Stat label"/>
+          <p:cNvSpPr txBox="1"/>
+          <p:nvPr/>
+        </p:nvSpPr>
+        <p:spPr>
+          <a:xfrm>
+            <a:off x="7040879" y="2715768"/>
+            <a:ext cx="2103120" cy="768096"/>
+          </a:xfrm>
+          <a:prstGeom prst="rect">
+            <a:avLst/>
+          </a:prstGeom>
+          <a:noFill/>
+        </p:spPr>
+        <p:txBody>
+          <a:bodyPr wrap="square" lIns="45720" tIns="27432" rIns="45720" bIns="27432" anchor="t">
+            <a:spAutoFit/>
+          </a:bodyPr>
+          <a:lstStyle/>
+          <a:p>
+            <a:pPr algn="ctr">
+              <a:spcAft>
+                <a:spcPts val="600"/>
+              </a:spcAft>
+            </a:pPr>
+            <a:r>
+              <a:rPr sz="1600" b="0" i="0">
+                <a:solidFill>
+                  <a:srgbClr val="222222"/>
+                </a:solidFill>
+                <a:latin typeface="Arial"/>
+              </a:rPr>
+              <a:t>to score one full-night recording</a:t>
+            </a:r>
+          </a:p>
+        </p:txBody>
+      </p:sp>
+      <p:sp>
+        <p:nvSpPr>
+          <p:cNvPr id="23" name="Stat card"/>
+          <p:cNvSpPr/>
+          <p:nvPr/>
+        </p:nvSpPr>
+        <p:spPr>
+          <a:xfrm>
+            <a:off x="9418320" y="1691640"/>
+            <a:ext cx="2286000" cy="1828800"/>
+          </a:xfrm>
+          <a:prstGeom prst="roundRect">
+            <a:avLst>
+              <a:gd name="adj" fmla="val 6000"/>
+            </a:avLst>
+          </a:prstGeom>
+          <a:solidFill>
+            <a:srgbClr val="F1E9F7"/>
+          </a:solidFill>
+          <a:ln>
+            <a:noFill/>
+          </a:ln>
+          <a:effectLst/>
+        </p:spPr>
+        <p:style>
+          <a:lnRef idx="1">
+            <a:schemeClr val="accent1"/>
+          </a:lnRef>
+          <a:fillRef idx="3">
+            <a:schemeClr val="accent1"/>
+          </a:fillRef>
+          <a:effectRef idx="2">
+            <a:schemeClr val="accent1"/>
+          </a:effectRef>
+          <a:fontRef idx="minor">
+            <a:schemeClr val="lt1"/>
+          </a:fontRef>
+        </p:style>
+        <p:txBody>
+          <a:bodyPr rtlCol="0" anchor="ctr"/>
+          <a:lstStyle/>
+          <a:p>
+            <a:pPr algn="ctr"/>
+            <a:endParaRPr/>
+          </a:p>
+        </p:txBody>
+      </p:sp>
+      <p:sp>
+        <p:nvSpPr>
+          <p:cNvPr id="24" name="Stat value"/>
+          <p:cNvSpPr txBox="1"/>
+          <p:nvPr/>
+        </p:nvSpPr>
+        <p:spPr>
+          <a:xfrm>
+            <a:off x="9418320" y="1764792"/>
+            <a:ext cx="2286000" cy="1005840"/>
+          </a:xfrm>
+          <a:prstGeom prst="rect">
+            <a:avLst/>
+          </a:prstGeom>
+          <a:noFill/>
+        </p:spPr>
+        <p:txBody>
+          <a:bodyPr wrap="square" lIns="45720" tIns="27432" rIns="45720" bIns="27432" anchor="ctr">
+            <a:spAutoFit/>
+          </a:bodyPr>
+          <a:lstStyle/>
+          <a:p>
+            <a:pPr algn="ctr">
+              <a:spcAft>
+                <a:spcPts val="600"/>
+              </a:spcAft>
+            </a:pPr>
+            <a:r>
+              <a:rPr sz="3600" b="1" i="0">
+                <a:solidFill>
+                  <a:srgbClr val="6A2C91"/>
+                </a:solidFill>
+                <a:latin typeface="Arial"/>
+              </a:rPr>
+              <a:t>82.6%</a:t>
+            </a:r>
+          </a:p>
+        </p:txBody>
+      </p:sp>
+      <p:sp>
+        <p:nvSpPr>
+          <p:cNvPr id="25" name="Stat label"/>
+          <p:cNvSpPr txBox="1"/>
+          <p:nvPr/>
+        </p:nvSpPr>
+        <p:spPr>
+          <a:xfrm>
+            <a:off x="9509760" y="2715768"/>
+            <a:ext cx="2103120" cy="768096"/>
+          </a:xfrm>
+          <a:prstGeom prst="rect">
+            <a:avLst/>
+          </a:prstGeom>
+          <a:noFill/>
+        </p:spPr>
+        <p:txBody>
+          <a:bodyPr wrap="square" lIns="45720" tIns="27432" rIns="45720" bIns="27432" anchor="t">
+            <a:spAutoFit/>
+          </a:bodyPr>
+          <a:lstStyle/>
+          <a:p>
+            <a:pPr algn="ctr">
+              <a:spcAft>
+                <a:spcPts val="600"/>
+              </a:spcAft>
+            </a:pPr>
+            <a:r>
+              <a:rPr sz="1600" b="0" i="0">
+                <a:solidFill>
+                  <a:srgbClr val="222222"/>
+                </a:solidFill>
+                <a:latin typeface="Arial"/>
+              </a:rPr>
+              <a:t>inter-scorer agreement, experienced experts</a:t>
+            </a:r>
+          </a:p>
+        </p:txBody>
+      </p:sp>
+      <p:sp>
+        <p:nvSpPr>
+          <p:cNvPr id="26" name="Stat card"/>
+          <p:cNvSpPr/>
+          <p:nvPr/>
+        </p:nvSpPr>
+        <p:spPr>
+          <a:xfrm>
+            <a:off x="6949440" y="3703320"/>
+            <a:ext cx="4754880" cy="1828800"/>
+          </a:xfrm>
+          <a:prstGeom prst="roundRect">
+            <a:avLst>
+              <a:gd name="adj" fmla="val 6000"/>
+            </a:avLst>
           </a:prstGeom>
           <a:solidFill>
             <a:srgbClr val="6A2C91"/>
@@ -8781,393 +9738,28 @@
           <a:lstStyle/>
           <a:p>
             <a:pPr algn="ctr"/>
-          </a:p>
-        </p:txBody>
-      </p:sp>
-      <p:pic>
-        <p:nvPicPr>
-          <p:cNvPr id="18" name="Icon brain" descr="brain_w.png"/>
-          <p:cNvPicPr>
-            <a:picLocks noChangeAspect="1"/>
-          </p:cNvPicPr>
-          <p:nvPr/>
-        </p:nvPicPr>
-        <p:blipFill>
-          <a:blip r:embed="rId7"/>
-          <a:stretch>
-            <a:fillRect/>
-          </a:stretch>
-        </p:blipFill>
-        <p:spPr>
-          <a:xfrm>
-            <a:off x="996696" y="5084064"/>
-            <a:ext cx="466344" cy="466344"/>
+            <a:endParaRPr/>
+          </a:p>
+        </p:txBody>
+      </p:sp>
+      <p:sp>
+        <p:nvSpPr>
+          <p:cNvPr id="27" name="Stat value"/>
+          <p:cNvSpPr txBox="1"/>
+          <p:nvPr/>
+        </p:nvSpPr>
+        <p:spPr>
+          <a:xfrm>
+            <a:off x="6949440" y="3776472"/>
+            <a:ext cx="4754880" cy="1005840"/>
           </a:xfrm>
           <a:prstGeom prst="rect">
             <a:avLst/>
           </a:prstGeom>
-        </p:spPr>
-      </p:pic>
-      <p:sp>
-        <p:nvSpPr>
-          <p:cNvPr id="19" name="TextBox 18"/>
-          <p:cNvSpPr txBox="1"/>
-          <p:nvPr/>
-        </p:nvSpPr>
-        <p:spPr>
-          <a:xfrm>
-            <a:off x="1783080" y="4882896"/>
-            <a:ext cx="4937760" cy="868680"/>
-          </a:xfrm>
-          <a:prstGeom prst="rect">
-            <a:avLst/>
-          </a:prstGeom>
           <a:noFill/>
         </p:spPr>
         <p:txBody>
-          <a:bodyPr wrap="square" anchor="ctr" lIns="45720" rIns="45720" tIns="27432" bIns="27432">
-            <a:spAutoFit/>
-          </a:bodyPr>
-          <a:lstStyle/>
-          <a:p>
-            <a:pPr algn="l">
-              <a:spcAft>
-                <a:spcPts val="600"/>
-              </a:spcAft>
-            </a:pPr>
-            <a:r>
-              <a:rPr sz="2200" b="1" i="0">
-                <a:solidFill>
-                  <a:srgbClr val="6A2C91"/>
-                </a:solidFill>
-                <a:latin typeface="Arial"/>
-              </a:rPr>
-              <a:t>Deep learning:</a:t>
-            </a:r>
-            <a:r>
-              <a:rPr sz="2200" b="0" i="0">
-                <a:solidFill>
-                  <a:srgbClr val="222222"/>
-                </a:solidFill>
-                <a:latin typeface="Arial"/>
-              </a:rPr>
-              <a:t> CNN/RNN → Vision Transformers (ViTs)</a:t>
-            </a:r>
-          </a:p>
-        </p:txBody>
-      </p:sp>
-      <p:sp>
-        <p:nvSpPr>
-          <p:cNvPr id="20" name="Stat card"/>
-          <p:cNvSpPr/>
-          <p:nvPr/>
-        </p:nvSpPr>
-        <p:spPr>
-          <a:xfrm>
-            <a:off x="6949440" y="1691640"/>
-            <a:ext cx="2286000" cy="1828800"/>
-          </a:xfrm>
-          <a:prstGeom prst="roundRect">
-            <a:avLst>
-              <a:gd name="adj" fmla="val 6000"/>
-            </a:avLst>
-          </a:prstGeom>
-          <a:solidFill>
-            <a:srgbClr val="F1E9F7"/>
-          </a:solidFill>
-          <a:ln>
-            <a:noFill/>
-          </a:ln>
-          <a:effectLst/>
-        </p:spPr>
-        <p:style>
-          <a:lnRef idx="1">
-            <a:schemeClr val="accent1"/>
-          </a:lnRef>
-          <a:fillRef idx="3">
-            <a:schemeClr val="accent1"/>
-          </a:fillRef>
-          <a:effectRef idx="2">
-            <a:schemeClr val="accent1"/>
-          </a:effectRef>
-          <a:fontRef idx="minor">
-            <a:schemeClr val="lt1"/>
-          </a:fontRef>
-        </p:style>
-        <p:txBody>
-          <a:bodyPr rtlCol="0" anchor="ctr"/>
-          <a:lstStyle/>
-          <a:p>
-            <a:pPr algn="ctr"/>
-          </a:p>
-        </p:txBody>
-      </p:sp>
-      <p:sp>
-        <p:nvSpPr>
-          <p:cNvPr id="21" name="Stat value"/>
-          <p:cNvSpPr txBox="1"/>
-          <p:nvPr/>
-        </p:nvSpPr>
-        <p:spPr>
-          <a:xfrm>
-            <a:off x="6949440" y="1764792"/>
-            <a:ext cx="2286000" cy="1005840"/>
-          </a:xfrm>
-          <a:prstGeom prst="rect">
-            <a:avLst/>
-          </a:prstGeom>
-          <a:noFill/>
-        </p:spPr>
-        <p:txBody>
-          <a:bodyPr wrap="square" anchor="ctr" lIns="45720" rIns="45720" tIns="27432" bIns="27432">
-            <a:spAutoFit/>
-          </a:bodyPr>
-          <a:lstStyle/>
-          <a:p>
-            <a:pPr algn="ctr">
-              <a:spcAft>
-                <a:spcPts val="600"/>
-              </a:spcAft>
-            </a:pPr>
-            <a:r>
-              <a:rPr sz="3600" b="1" i="0">
-                <a:solidFill>
-                  <a:srgbClr val="6A2C91"/>
-                </a:solidFill>
-                <a:latin typeface="Arial"/>
-              </a:rPr>
-              <a:t>2–4 h</a:t>
-            </a:r>
-          </a:p>
-        </p:txBody>
-      </p:sp>
-      <p:sp>
-        <p:nvSpPr>
-          <p:cNvPr id="22" name="Stat label"/>
-          <p:cNvSpPr txBox="1"/>
-          <p:nvPr/>
-        </p:nvSpPr>
-        <p:spPr>
-          <a:xfrm>
-            <a:off x="7040879" y="2715768"/>
-            <a:ext cx="2103120" cy="768096"/>
-          </a:xfrm>
-          <a:prstGeom prst="rect">
-            <a:avLst/>
-          </a:prstGeom>
-          <a:noFill/>
-        </p:spPr>
-        <p:txBody>
-          <a:bodyPr wrap="square" anchor="t" lIns="45720" rIns="45720" tIns="27432" bIns="27432">
-            <a:spAutoFit/>
-          </a:bodyPr>
-          <a:lstStyle/>
-          <a:p>
-            <a:pPr algn="ctr">
-              <a:spcAft>
-                <a:spcPts val="600"/>
-              </a:spcAft>
-            </a:pPr>
-            <a:r>
-              <a:rPr sz="1600" b="0" i="0">
-                <a:solidFill>
-                  <a:srgbClr val="222222"/>
-                </a:solidFill>
-                <a:latin typeface="Arial"/>
-              </a:rPr>
-              <a:t>to score one full-night recording</a:t>
-            </a:r>
-          </a:p>
-        </p:txBody>
-      </p:sp>
-      <p:sp>
-        <p:nvSpPr>
-          <p:cNvPr id="23" name="Stat card"/>
-          <p:cNvSpPr/>
-          <p:nvPr/>
-        </p:nvSpPr>
-        <p:spPr>
-          <a:xfrm>
-            <a:off x="9418320" y="1691640"/>
-            <a:ext cx="2286000" cy="1828800"/>
-          </a:xfrm>
-          <a:prstGeom prst="roundRect">
-            <a:avLst>
-              <a:gd name="adj" fmla="val 6000"/>
-            </a:avLst>
-          </a:prstGeom>
-          <a:solidFill>
-            <a:srgbClr val="F1E9F7"/>
-          </a:solidFill>
-          <a:ln>
-            <a:noFill/>
-          </a:ln>
-          <a:effectLst/>
-        </p:spPr>
-        <p:style>
-          <a:lnRef idx="1">
-            <a:schemeClr val="accent1"/>
-          </a:lnRef>
-          <a:fillRef idx="3">
-            <a:schemeClr val="accent1"/>
-          </a:fillRef>
-          <a:effectRef idx="2">
-            <a:schemeClr val="accent1"/>
-          </a:effectRef>
-          <a:fontRef idx="minor">
-            <a:schemeClr val="lt1"/>
-          </a:fontRef>
-        </p:style>
-        <p:txBody>
-          <a:bodyPr rtlCol="0" anchor="ctr"/>
-          <a:lstStyle/>
-          <a:p>
-            <a:pPr algn="ctr"/>
-          </a:p>
-        </p:txBody>
-      </p:sp>
-      <p:sp>
-        <p:nvSpPr>
-          <p:cNvPr id="24" name="Stat value"/>
-          <p:cNvSpPr txBox="1"/>
-          <p:nvPr/>
-        </p:nvSpPr>
-        <p:spPr>
-          <a:xfrm>
-            <a:off x="9418320" y="1764792"/>
-            <a:ext cx="2286000" cy="1005840"/>
-          </a:xfrm>
-          <a:prstGeom prst="rect">
-            <a:avLst/>
-          </a:prstGeom>
-          <a:noFill/>
-        </p:spPr>
-        <p:txBody>
-          <a:bodyPr wrap="square" anchor="ctr" lIns="45720" rIns="45720" tIns="27432" bIns="27432">
-            <a:spAutoFit/>
-          </a:bodyPr>
-          <a:lstStyle/>
-          <a:p>
-            <a:pPr algn="ctr">
-              <a:spcAft>
-                <a:spcPts val="600"/>
-              </a:spcAft>
-            </a:pPr>
-            <a:r>
-              <a:rPr sz="3600" b="1" i="0">
-                <a:solidFill>
-                  <a:srgbClr val="6A2C91"/>
-                </a:solidFill>
-                <a:latin typeface="Arial"/>
-              </a:rPr>
-              <a:t>82.6%</a:t>
-            </a:r>
-          </a:p>
-        </p:txBody>
-      </p:sp>
-      <p:sp>
-        <p:nvSpPr>
-          <p:cNvPr id="25" name="Stat label"/>
-          <p:cNvSpPr txBox="1"/>
-          <p:nvPr/>
-        </p:nvSpPr>
-        <p:spPr>
-          <a:xfrm>
-            <a:off x="9509760" y="2715768"/>
-            <a:ext cx="2103120" cy="768096"/>
-          </a:xfrm>
-          <a:prstGeom prst="rect">
-            <a:avLst/>
-          </a:prstGeom>
-          <a:noFill/>
-        </p:spPr>
-        <p:txBody>
-          <a:bodyPr wrap="square" anchor="t" lIns="45720" rIns="45720" tIns="27432" bIns="27432">
-            <a:spAutoFit/>
-          </a:bodyPr>
-          <a:lstStyle/>
-          <a:p>
-            <a:pPr algn="ctr">
-              <a:spcAft>
-                <a:spcPts val="600"/>
-              </a:spcAft>
-            </a:pPr>
-            <a:r>
-              <a:rPr sz="1600" b="0" i="0">
-                <a:solidFill>
-                  <a:srgbClr val="222222"/>
-                </a:solidFill>
-                <a:latin typeface="Arial"/>
-              </a:rPr>
-              <a:t>inter-scorer agreement, experienced experts</a:t>
-            </a:r>
-          </a:p>
-        </p:txBody>
-      </p:sp>
-      <p:sp>
-        <p:nvSpPr>
-          <p:cNvPr id="26" name="Stat card"/>
-          <p:cNvSpPr/>
-          <p:nvPr/>
-        </p:nvSpPr>
-        <p:spPr>
-          <a:xfrm>
-            <a:off x="6949440" y="3703320"/>
-            <a:ext cx="4754880" cy="1828800"/>
-          </a:xfrm>
-          <a:prstGeom prst="roundRect">
-            <a:avLst>
-              <a:gd name="adj" fmla="val 6000"/>
-            </a:avLst>
-          </a:prstGeom>
-          <a:solidFill>
-            <a:srgbClr val="6A2C91"/>
-          </a:solidFill>
-          <a:ln>
-            <a:noFill/>
-          </a:ln>
-          <a:effectLst/>
-        </p:spPr>
-        <p:style>
-          <a:lnRef idx="1">
-            <a:schemeClr val="accent1"/>
-          </a:lnRef>
-          <a:fillRef idx="3">
-            <a:schemeClr val="accent1"/>
-          </a:fillRef>
-          <a:effectRef idx="2">
-            <a:schemeClr val="accent1"/>
-          </a:effectRef>
-          <a:fontRef idx="minor">
-            <a:schemeClr val="lt1"/>
-          </a:fontRef>
-        </p:style>
-        <p:txBody>
-          <a:bodyPr rtlCol="0" anchor="ctr"/>
-          <a:lstStyle/>
-          <a:p>
-            <a:pPr algn="ctr"/>
-          </a:p>
-        </p:txBody>
-      </p:sp>
-      <p:sp>
-        <p:nvSpPr>
-          <p:cNvPr id="27" name="Stat value"/>
-          <p:cNvSpPr txBox="1"/>
-          <p:nvPr/>
-        </p:nvSpPr>
-        <p:spPr>
-          <a:xfrm>
-            <a:off x="6949440" y="3776472"/>
-            <a:ext cx="4754880" cy="1005840"/>
-          </a:xfrm>
-          <a:prstGeom prst="rect">
-            <a:avLst/>
-          </a:prstGeom>
-          <a:noFill/>
-        </p:spPr>
-        <p:txBody>
-          <a:bodyPr wrap="square" anchor="ctr" lIns="45720" rIns="45720" tIns="27432" bIns="27432">
+          <a:bodyPr wrap="square" lIns="45720" tIns="27432" rIns="45720" bIns="27432" anchor="ctr">
             <a:spAutoFit/>
           </a:bodyPr>
           <a:lstStyle/>
@@ -9206,7 +9798,7 @@
           <a:noFill/>
         </p:spPr>
         <p:txBody>
-          <a:bodyPr wrap="square" anchor="t" lIns="45720" rIns="45720" tIns="27432" bIns="27432">
+          <a:bodyPr wrap="square" lIns="45720" tIns="27432" rIns="45720" bIns="27432" anchor="t">
             <a:spAutoFit/>
           </a:bodyPr>
           <a:lstStyle/>
@@ -9238,11 +9830,23 @@
   <p:clrMapOvr>
     <a:masterClrMapping/>
   </p:clrMapOvr>
+  <mc:AlternateContent xmlns:mc="http://schemas.openxmlformats.org/markup-compatibility/2006">
+    <mc:Choice xmlns:p14="http://schemas.microsoft.com/office/powerpoint/2010/main" Requires="p14">
+      <p:transition spd="med" p14:dur="600">
+        <p:fade/>
+      </p:transition>
+    </mc:Choice>
+    <mc:Fallback>
+      <p:transition spd="med">
+        <p:fade/>
+      </p:transition>
+    </mc:Fallback>
+  </mc:AlternateContent>
 </p:sld>
 </file>
 
 <file path=ppt/slides/slide3.xml><?xml version="1.0" encoding="utf-8"?>
-<p:sld xmlns:a="http://schemas.openxmlformats.org/drawingml/2006/main" xmlns:p="http://schemas.openxmlformats.org/presentationml/2006/main" xmlns:r="http://schemas.openxmlformats.org/officeDocument/2006/relationships">
+<p:sld xmlns:a="http://schemas.openxmlformats.org/drawingml/2006/main" xmlns:r="http://schemas.openxmlformats.org/officeDocument/2006/relationships" xmlns:p="http://schemas.openxmlformats.org/presentationml/2006/main">
   <p:cSld>
     <p:spTree>
       <p:nvGrpSpPr>
@@ -9250,7 +9854,14 @@
         <p:cNvGrpSpPr/>
         <p:nvPr/>
       </p:nvGrpSpPr>
-      <p:grpSpPr/>
+      <p:grpSpPr>
+        <a:xfrm>
+          <a:off x="0" y="0"/>
+          <a:ext cx="0" cy="0"/>
+          <a:chOff x="0" y="0"/>
+          <a:chExt cx="0" cy="0"/>
+        </a:xfrm>
+      </p:grpSpPr>
       <p:sp>
         <p:nvSpPr>
           <p:cNvPr id="2" name="Title 1"/>
@@ -9396,7 +10007,7 @@
           <a:p>
             <a:fld id="{7F469C41-6B9F-4AAA-9F31-D78B57F455E2}" type="slidenum">
               <a:rPr lang="en-GB" smtClean="0"/>
-              <a:t>2</a:t>
+              <a:t>3</a:t>
             </a:fld>
             <a:endParaRPr lang="en-GB"/>
           </a:p>
@@ -9445,6 +10056,7 @@
           <a:lstStyle/>
           <a:p>
             <a:pPr algn="ctr"/>
+            <a:endParaRPr/>
           </a:p>
         </p:txBody>
       </p:sp>
@@ -9489,12 +10101,212 @@
           <a:lstStyle/>
           <a:p>
             <a:pPr algn="ctr"/>
+            <a:endParaRPr/>
           </a:p>
         </p:txBody>
       </p:sp>
       <p:pic>
         <p:nvPicPr>
           <p:cNvPr id="10" name="Icon search" descr="search_w.png"/>
+          <p:cNvPicPr>
+            <a:picLocks noChangeAspect="1"/>
+          </p:cNvPicPr>
+          <p:nvPr/>
+        </p:nvPicPr>
+        <p:blipFill>
+          <a:blip r:embed="rId3"/>
+          <a:stretch>
+            <a:fillRect/>
+          </a:stretch>
+        </p:blipFill>
+        <p:spPr>
+          <a:xfrm>
+            <a:off x="1115568" y="1847088"/>
+            <a:ext cx="329184" cy="329184"/>
+          </a:xfrm>
+          <a:prstGeom prst="rect">
+            <a:avLst/>
+          </a:prstGeom>
+        </p:spPr>
+      </p:pic>
+      <p:sp>
+        <p:nvSpPr>
+          <p:cNvPr id="11" name="TextBox 10"/>
+          <p:cNvSpPr txBox="1"/>
+          <p:nvPr/>
+        </p:nvSpPr>
+        <p:spPr>
+          <a:xfrm>
+            <a:off x="1691640" y="1737360"/>
+            <a:ext cx="3931920" cy="548640"/>
+          </a:xfrm>
+          <a:prstGeom prst="rect">
+            <a:avLst/>
+          </a:prstGeom>
+          <a:noFill/>
+        </p:spPr>
+        <p:txBody>
+          <a:bodyPr wrap="square" lIns="45720" tIns="27432" rIns="45720" bIns="27432" anchor="ctr">
+            <a:spAutoFit/>
+          </a:bodyPr>
+          <a:lstStyle/>
+          <a:p>
+            <a:pPr algn="l">
+              <a:spcAft>
+                <a:spcPts val="600"/>
+              </a:spcAft>
+            </a:pPr>
+            <a:r>
+              <a:rPr sz="2600" b="1" i="0">
+                <a:solidFill>
+                  <a:srgbClr val="6A2C91"/>
+                </a:solidFill>
+                <a:latin typeface="Arial"/>
+              </a:rPr>
+              <a:t>The gap</a:t>
+            </a:r>
+          </a:p>
+        </p:txBody>
+      </p:sp>
+      <p:sp>
+        <p:nvSpPr>
+          <p:cNvPr id="12" name="Bullets"/>
+          <p:cNvSpPr txBox="1"/>
+          <p:nvPr/>
+        </p:nvSpPr>
+        <p:spPr>
+          <a:xfrm>
+            <a:off x="1005840" y="2514600"/>
+            <a:ext cx="4754880" cy="3291840"/>
+          </a:xfrm>
+          <a:prstGeom prst="rect">
+            <a:avLst/>
+          </a:prstGeom>
+          <a:noFill/>
+        </p:spPr>
+        <p:txBody>
+          <a:bodyPr wrap="square">
+            <a:spAutoFit/>
+          </a:bodyPr>
+          <a:lstStyle/>
+          <a:p>
+            <a:pPr marL="285750" indent="-285750">
+              <a:spcAft>
+                <a:spcPts val="1000"/>
+              </a:spcAft>
+              <a:buChar char="•"/>
+            </a:pPr>
+            <a:r>
+              <a:rPr sz="2200" b="0" i="0">
+                <a:solidFill>
+                  <a:srgbClr val="222222"/>
+                </a:solidFill>
+                <a:latin typeface="Arial"/>
+              </a:rPr>
+              <a:t>Prior ViT work uses spectrograms or raw signals only</a:t>
+            </a:r>
+          </a:p>
+          <a:p>
+            <a:pPr marL="285750" indent="-285750">
+              <a:spcAft>
+                <a:spcPts val="1000"/>
+              </a:spcAft>
+              <a:buChar char="•"/>
+            </a:pPr>
+            <a:r>
+              <a:rPr sz="2200" b="0" i="0">
+                <a:solidFill>
+                  <a:srgbClr val="222222"/>
+                </a:solidFill>
+                <a:latin typeface="Arial"/>
+              </a:rPr>
+              <a:t>GASF, GADF and MTF never compared for ViTs</a:t>
+            </a:r>
+          </a:p>
+          <a:p>
+            <a:pPr marL="285750" indent="-285750">
+              <a:spcAft>
+                <a:spcPts val="1000"/>
+              </a:spcAft>
+              <a:buChar char="•"/>
+            </a:pPr>
+            <a:r>
+              <a:rPr sz="2200" b="0" i="0">
+                <a:solidFill>
+                  <a:srgbClr val="222222"/>
+                </a:solidFill>
+                <a:latin typeface="Arial"/>
+              </a:rPr>
+              <a:t>Best sampling rate before imaging unknown</a:t>
+            </a:r>
+          </a:p>
+          <a:p>
+            <a:pPr marL="285750" indent="-285750">
+              <a:spcAft>
+                <a:spcPts val="1000"/>
+              </a:spcAft>
+              <a:buChar char="•"/>
+            </a:pPr>
+            <a:r>
+              <a:rPr sz="2200" b="0" i="0">
+                <a:solidFill>
+                  <a:srgbClr val="222222"/>
+                </a:solidFill>
+                <a:latin typeface="Arial"/>
+              </a:rPr>
+              <a:t>Pre-training value on PSG images unclear</a:t>
+            </a:r>
+          </a:p>
+        </p:txBody>
+      </p:sp>
+      <p:sp>
+        <p:nvSpPr>
+          <p:cNvPr id="13" name="Icon badge"/>
+          <p:cNvSpPr/>
+          <p:nvPr/>
+        </p:nvSpPr>
+        <p:spPr>
+          <a:xfrm>
+            <a:off x="6355080" y="1737360"/>
+            <a:ext cx="548640" cy="548640"/>
+          </a:xfrm>
+          <a:prstGeom prst="ellipse">
+            <a:avLst/>
+          </a:prstGeom>
+          <a:solidFill>
+            <a:srgbClr val="6A2C91"/>
+          </a:solidFill>
+          <a:ln>
+            <a:noFill/>
+          </a:ln>
+          <a:effectLst/>
+        </p:spPr>
+        <p:style>
+          <a:lnRef idx="1">
+            <a:schemeClr val="accent1"/>
+          </a:lnRef>
+          <a:fillRef idx="3">
+            <a:schemeClr val="accent1"/>
+          </a:fillRef>
+          <a:effectRef idx="2">
+            <a:schemeClr val="accent1"/>
+          </a:effectRef>
+          <a:fontRef idx="minor">
+            <a:schemeClr val="lt1"/>
+          </a:fontRef>
+        </p:style>
+        <p:txBody>
+          <a:bodyPr rtlCol="0" anchor="ctr"/>
+          <a:lstStyle/>
+          <a:p>
+            <a:pPr algn="ctr"/>
+            <a:endParaRPr/>
+          </a:p>
+        </p:txBody>
+      </p:sp>
+      <p:pic>
+        <p:nvPicPr>
+          <p:cNvPr id="14" name="Icon flask" descr="flask_w.png"/>
           <p:cNvPicPr>
             <a:picLocks noChangeAspect="1"/>
           </p:cNvPicPr>
@@ -9508,7 +10320,7 @@
         </p:blipFill>
         <p:spPr>
           <a:xfrm>
-            <a:off x="1115568" y="1847088"/>
+            <a:off x="6464808" y="1847088"/>
             <a:ext cx="329184" cy="329184"/>
           </a:xfrm>
           <a:prstGeom prst="rect">
@@ -9518,14 +10330,14 @@
       </p:pic>
       <p:sp>
         <p:nvSpPr>
-          <p:cNvPr id="11" name="TextBox 10"/>
+          <p:cNvPr id="15" name="TextBox 14"/>
           <p:cNvSpPr txBox="1"/>
           <p:nvPr/>
         </p:nvSpPr>
         <p:spPr>
           <a:xfrm>
-            <a:off x="1691640" y="1737360"/>
-            <a:ext cx="3931920" cy="548640"/>
+            <a:off x="7040880" y="1737360"/>
+            <a:ext cx="4297680" cy="548640"/>
           </a:xfrm>
           <a:prstGeom prst="rect">
             <a:avLst/>
@@ -9533,205 +10345,7 @@
           <a:noFill/>
         </p:spPr>
         <p:txBody>
-          <a:bodyPr wrap="square" anchor="ctr" lIns="45720" rIns="45720" tIns="27432" bIns="27432">
-            <a:spAutoFit/>
-          </a:bodyPr>
-          <a:lstStyle/>
-          <a:p>
-            <a:pPr algn="l">
-              <a:spcAft>
-                <a:spcPts val="600"/>
-              </a:spcAft>
-            </a:pPr>
-            <a:r>
-              <a:rPr sz="2600" b="1" i="0">
-                <a:solidFill>
-                  <a:srgbClr val="6A2C91"/>
-                </a:solidFill>
-                <a:latin typeface="Arial"/>
-              </a:rPr>
-              <a:t>The gap</a:t>
-            </a:r>
-          </a:p>
-        </p:txBody>
-      </p:sp>
-      <p:sp>
-        <p:nvSpPr>
-          <p:cNvPr id="12" name="Bullets"/>
-          <p:cNvSpPr txBox="1"/>
-          <p:nvPr/>
-        </p:nvSpPr>
-        <p:spPr>
-          <a:xfrm>
-            <a:off x="1005840" y="2514600"/>
-            <a:ext cx="4754880" cy="3291840"/>
-          </a:xfrm>
-          <a:prstGeom prst="rect">
-            <a:avLst/>
-          </a:prstGeom>
-          <a:noFill/>
-        </p:spPr>
-        <p:txBody>
-          <a:bodyPr wrap="square">
-            <a:spAutoFit/>
-          </a:bodyPr>
-          <a:lstStyle/>
-          <a:p>
-            <a:pPr marL="285750" indent="-285750">
-              <a:spcAft>
-                <a:spcPts val="1000"/>
-              </a:spcAft>
-              <a:buChar char="•"/>
-            </a:pPr>
-            <a:r>
-              <a:rPr sz="2200" b="0" i="0">
-                <a:solidFill>
-                  <a:srgbClr val="222222"/>
-                </a:solidFill>
-                <a:latin typeface="Arial"/>
-              </a:rPr>
-              <a:t>Prior ViT work uses spectrograms or raw signals only</a:t>
-            </a:r>
-          </a:p>
-          <a:p>
-            <a:pPr marL="285750" indent="-285750">
-              <a:spcAft>
-                <a:spcPts val="1000"/>
-              </a:spcAft>
-              <a:buChar char="•"/>
-            </a:pPr>
-            <a:r>
-              <a:rPr sz="2200" b="0" i="0">
-                <a:solidFill>
-                  <a:srgbClr val="222222"/>
-                </a:solidFill>
-                <a:latin typeface="Arial"/>
-              </a:rPr>
-              <a:t>GASF, GADF and MTF never compared for ViTs</a:t>
-            </a:r>
-          </a:p>
-          <a:p>
-            <a:pPr marL="285750" indent="-285750">
-              <a:spcAft>
-                <a:spcPts val="1000"/>
-              </a:spcAft>
-              <a:buChar char="•"/>
-            </a:pPr>
-            <a:r>
-              <a:rPr sz="2200" b="0" i="0">
-                <a:solidFill>
-                  <a:srgbClr val="222222"/>
-                </a:solidFill>
-                <a:latin typeface="Arial"/>
-              </a:rPr>
-              <a:t>Best sampling rate before imaging unknown</a:t>
-            </a:r>
-          </a:p>
-          <a:p>
-            <a:pPr marL="285750" indent="-285750">
-              <a:spcAft>
-                <a:spcPts val="1000"/>
-              </a:spcAft>
-              <a:buChar char="•"/>
-            </a:pPr>
-            <a:r>
-              <a:rPr sz="2200" b="0" i="0">
-                <a:solidFill>
-                  <a:srgbClr val="222222"/>
-                </a:solidFill>
-                <a:latin typeface="Arial"/>
-              </a:rPr>
-              <a:t>Pre-training value on PSG images unclear</a:t>
-            </a:r>
-          </a:p>
-        </p:txBody>
-      </p:sp>
-      <p:sp>
-        <p:nvSpPr>
-          <p:cNvPr id="13" name="Icon badge"/>
-          <p:cNvSpPr/>
-          <p:nvPr/>
-        </p:nvSpPr>
-        <p:spPr>
-          <a:xfrm>
-            <a:off x="6355080" y="1737360"/>
-            <a:ext cx="548640" cy="548640"/>
-          </a:xfrm>
-          <a:prstGeom prst="ellipse">
-            <a:avLst/>
-          </a:prstGeom>
-          <a:solidFill>
-            <a:srgbClr val="6A2C91"/>
-          </a:solidFill>
-          <a:ln>
-            <a:noFill/>
-          </a:ln>
-          <a:effectLst/>
-        </p:spPr>
-        <p:style>
-          <a:lnRef idx="1">
-            <a:schemeClr val="accent1"/>
-          </a:lnRef>
-          <a:fillRef idx="3">
-            <a:schemeClr val="accent1"/>
-          </a:fillRef>
-          <a:effectRef idx="2">
-            <a:schemeClr val="accent1"/>
-          </a:effectRef>
-          <a:fontRef idx="minor">
-            <a:schemeClr val="lt1"/>
-          </a:fontRef>
-        </p:style>
-        <p:txBody>
-          <a:bodyPr rtlCol="0" anchor="ctr"/>
-          <a:lstStyle/>
-          <a:p>
-            <a:pPr algn="ctr"/>
-          </a:p>
-        </p:txBody>
-      </p:sp>
-      <p:pic>
-        <p:nvPicPr>
-          <p:cNvPr id="14" name="Icon flask" descr="flask_w.png"/>
-          <p:cNvPicPr>
-            <a:picLocks noChangeAspect="1"/>
-          </p:cNvPicPr>
-          <p:nvPr/>
-        </p:nvPicPr>
-        <p:blipFill>
-          <a:blip r:embed="rId5"/>
-          <a:stretch>
-            <a:fillRect/>
-          </a:stretch>
-        </p:blipFill>
-        <p:spPr>
-          <a:xfrm>
-            <a:off x="6464808" y="1847088"/>
-            <a:ext cx="329184" cy="329184"/>
-          </a:xfrm>
-          <a:prstGeom prst="rect">
-            <a:avLst/>
-          </a:prstGeom>
-        </p:spPr>
-      </p:pic>
-      <p:sp>
-        <p:nvSpPr>
-          <p:cNvPr id="15" name="TextBox 14"/>
-          <p:cNvSpPr txBox="1"/>
-          <p:nvPr/>
-        </p:nvSpPr>
-        <p:spPr>
-          <a:xfrm>
-            <a:off x="7040880" y="1737360"/>
-            <a:ext cx="4297680" cy="548640"/>
-          </a:xfrm>
-          <a:prstGeom prst="rect">
-            <a:avLst/>
-          </a:prstGeom>
-          <a:noFill/>
-        </p:spPr>
-        <p:txBody>
-          <a:bodyPr wrap="square" anchor="ctr" lIns="45720" rIns="45720" tIns="27432" bIns="27432">
+          <a:bodyPr wrap="square" lIns="45720" tIns="27432" rIns="45720" bIns="27432" anchor="ctr">
             <a:spAutoFit/>
           </a:bodyPr>
           <a:lstStyle/>
@@ -9822,7 +10436,7 @@
           <a:noFill/>
         </p:spPr>
         <p:txBody>
-          <a:bodyPr wrap="square" anchor="ctr" lIns="45720" rIns="45720" tIns="27432" bIns="27432">
+          <a:bodyPr wrap="square" lIns="45720" tIns="27432" rIns="45720" bIns="27432" anchor="ctr">
             <a:spAutoFit/>
           </a:bodyPr>
           <a:lstStyle/>
@@ -9913,7 +10527,7 @@
           <a:noFill/>
         </p:spPr>
         <p:txBody>
-          <a:bodyPr wrap="square" anchor="ctr" lIns="45720" rIns="45720" tIns="27432" bIns="27432">
+          <a:bodyPr wrap="square" lIns="45720" tIns="27432" rIns="45720" bIns="27432" anchor="ctr">
             <a:spAutoFit/>
           </a:bodyPr>
           <a:lstStyle/>
@@ -10004,7 +10618,7 @@
           <a:noFill/>
         </p:spPr>
         <p:txBody>
-          <a:bodyPr wrap="square" anchor="ctr" lIns="45720" rIns="45720" tIns="27432" bIns="27432">
+          <a:bodyPr wrap="square" lIns="45720" tIns="27432" rIns="45720" bIns="27432" anchor="ctr">
             <a:spAutoFit/>
           </a:bodyPr>
           <a:lstStyle/>
@@ -10095,7 +10709,7 @@
           <a:noFill/>
         </p:spPr>
         <p:txBody>
-          <a:bodyPr wrap="square" anchor="ctr" lIns="45720" rIns="45720" tIns="27432" bIns="27432">
+          <a:bodyPr wrap="square" lIns="45720" tIns="27432" rIns="45720" bIns="27432" anchor="ctr">
             <a:spAutoFit/>
           </a:bodyPr>
           <a:lstStyle/>
@@ -10122,11 +10736,23 @@
   <p:clrMapOvr>
     <a:masterClrMapping/>
   </p:clrMapOvr>
+  <mc:AlternateContent xmlns:mc="http://schemas.openxmlformats.org/markup-compatibility/2006">
+    <mc:Choice xmlns:p14="http://schemas.microsoft.com/office/powerpoint/2010/main" Requires="p14">
+      <p:transition spd="med" p14:dur="600">
+        <p:fade/>
+      </p:transition>
+    </mc:Choice>
+    <mc:Fallback>
+      <p:transition spd="med">
+        <p:fade/>
+      </p:transition>
+    </mc:Fallback>
+  </mc:AlternateContent>
 </p:sld>
 </file>
 
 <file path=ppt/slides/slide4.xml><?xml version="1.0" encoding="utf-8"?>
-<p:sld xmlns:a="http://schemas.openxmlformats.org/drawingml/2006/main" xmlns:p="http://schemas.openxmlformats.org/presentationml/2006/main" xmlns:r="http://schemas.openxmlformats.org/officeDocument/2006/relationships">
+<p:sld xmlns:a="http://schemas.openxmlformats.org/drawingml/2006/main" xmlns:r="http://schemas.openxmlformats.org/officeDocument/2006/relationships" xmlns:p="http://schemas.openxmlformats.org/presentationml/2006/main">
   <p:cSld>
     <p:spTree>
       <p:nvGrpSpPr>
@@ -10134,7 +10760,14 @@
         <p:cNvGrpSpPr/>
         <p:nvPr/>
       </p:nvGrpSpPr>
-      <p:grpSpPr/>
+      <p:grpSpPr>
+        <a:xfrm>
+          <a:off x="0" y="0"/>
+          <a:ext cx="0" cy="0"/>
+          <a:chOff x="0" y="0"/>
+          <a:chExt cx="0" cy="0"/>
+        </a:xfrm>
+      </p:grpSpPr>
       <p:sp>
         <p:nvSpPr>
           <p:cNvPr id="2" name="Title 1"/>
@@ -10280,7 +10913,7 @@
           <a:p>
             <a:fld id="{7F469C41-6B9F-4AAA-9F31-D78B57F455E2}" type="slidenum">
               <a:rPr lang="en-GB" smtClean="0"/>
-              <a:t>2</a:t>
+              <a:t>4</a:t>
             </a:fld>
             <a:endParaRPr lang="en-GB"/>
           </a:p>
@@ -10329,6 +10962,7 @@
           <a:lstStyle/>
           <a:p>
             <a:pPr algn="ctr"/>
+            <a:endParaRPr/>
           </a:p>
         </p:txBody>
       </p:sp>
@@ -10349,7 +10983,7 @@
           <a:noFill/>
         </p:spPr>
         <p:txBody>
-          <a:bodyPr wrap="square" anchor="ctr" lIns="45720" rIns="45720" tIns="27432" bIns="27432">
+          <a:bodyPr wrap="square" lIns="45720" tIns="27432" rIns="45720" bIns="27432" anchor="ctr">
             <a:spAutoFit/>
           </a:bodyPr>
           <a:lstStyle/>
@@ -10388,7 +11022,7 @@
           <a:noFill/>
         </p:spPr>
         <p:txBody>
-          <a:bodyPr wrap="square" anchor="t" lIns="45720" rIns="45720" tIns="27432" bIns="27432">
+          <a:bodyPr wrap="square" lIns="45720" tIns="27432" rIns="45720" bIns="27432" anchor="t">
             <a:spAutoFit/>
           </a:bodyPr>
           <a:lstStyle/>
@@ -10453,6 +11087,7 @@
           <a:lstStyle/>
           <a:p>
             <a:pPr algn="ctr"/>
+            <a:endParaRPr/>
           </a:p>
         </p:txBody>
       </p:sp>
@@ -10473,7 +11108,7 @@
           <a:noFill/>
         </p:spPr>
         <p:txBody>
-          <a:bodyPr wrap="square" anchor="ctr" lIns="45720" rIns="45720" tIns="27432" bIns="27432">
+          <a:bodyPr wrap="square" lIns="45720" tIns="27432" rIns="45720" bIns="27432" anchor="ctr">
             <a:spAutoFit/>
           </a:bodyPr>
           <a:lstStyle/>
@@ -10512,7 +11147,7 @@
           <a:noFill/>
         </p:spPr>
         <p:txBody>
-          <a:bodyPr wrap="square" anchor="t" lIns="45720" rIns="45720" tIns="27432" bIns="27432">
+          <a:bodyPr wrap="square" lIns="45720" tIns="27432" rIns="45720" bIns="27432" anchor="t">
             <a:spAutoFit/>
           </a:bodyPr>
           <a:lstStyle/>
@@ -10577,6 +11212,7 @@
           <a:lstStyle/>
           <a:p>
             <a:pPr algn="ctr"/>
+            <a:endParaRPr/>
           </a:p>
         </p:txBody>
       </p:sp>
@@ -10597,7 +11233,7 @@
           <a:noFill/>
         </p:spPr>
         <p:txBody>
-          <a:bodyPr wrap="square" anchor="ctr" lIns="45720" rIns="45720" tIns="27432" bIns="27432">
+          <a:bodyPr wrap="square" lIns="45720" tIns="27432" rIns="45720" bIns="27432" anchor="ctr">
             <a:spAutoFit/>
           </a:bodyPr>
           <a:lstStyle/>
@@ -10636,7 +11272,7 @@
           <a:noFill/>
         </p:spPr>
         <p:txBody>
-          <a:bodyPr wrap="square" anchor="t" lIns="45720" rIns="45720" tIns="27432" bIns="27432">
+          <a:bodyPr wrap="square" lIns="45720" tIns="27432" rIns="45720" bIns="27432" anchor="t">
             <a:spAutoFit/>
           </a:bodyPr>
           <a:lstStyle/>
@@ -10701,6 +11337,7 @@
           <a:lstStyle/>
           <a:p>
             <a:pPr algn="ctr"/>
+            <a:endParaRPr/>
           </a:p>
         </p:txBody>
       </p:sp>
@@ -10721,7 +11358,7 @@
           <a:noFill/>
         </p:spPr>
         <p:txBody>
-          <a:bodyPr wrap="square" anchor="ctr" lIns="45720" rIns="45720" tIns="27432" bIns="27432">
+          <a:bodyPr wrap="square" lIns="45720" tIns="27432" rIns="45720" bIns="27432" anchor="ctr">
             <a:spAutoFit/>
           </a:bodyPr>
           <a:lstStyle/>
@@ -10760,7 +11397,7 @@
           <a:noFill/>
         </p:spPr>
         <p:txBody>
-          <a:bodyPr wrap="square" anchor="t" lIns="45720" rIns="45720" tIns="27432" bIns="27432">
+          <a:bodyPr wrap="square" lIns="45720" tIns="27432" rIns="45720" bIns="27432" anchor="t">
             <a:spAutoFit/>
           </a:bodyPr>
           <a:lstStyle/>
@@ -10825,6 +11462,7 @@
           <a:lstStyle/>
           <a:p>
             <a:pPr algn="ctr"/>
+            <a:endParaRPr/>
           </a:p>
         </p:txBody>
       </p:sp>
@@ -10845,7 +11483,7 @@
           <a:noFill/>
         </p:spPr>
         <p:txBody>
-          <a:bodyPr wrap="square" anchor="ctr" lIns="45720" rIns="45720" tIns="27432" bIns="27432">
+          <a:bodyPr wrap="square" lIns="45720" tIns="27432" rIns="45720" bIns="27432" anchor="ctr">
             <a:spAutoFit/>
           </a:bodyPr>
           <a:lstStyle/>
@@ -10890,7 +11528,7 @@
         </p:xfrm>
         <a:graphic>
           <a:graphicData uri="http://schemas.openxmlformats.org/drawingml/2006/chart">
-            <c:chart xmlns:c="http://schemas.openxmlformats.org/drawingml/2006/chart" r:id="rId4"/>
+            <c:chart xmlns:c="http://schemas.openxmlformats.org/drawingml/2006/chart" xmlns:r="http://schemas.openxmlformats.org/officeDocument/2006/relationships" r:id="rId3"/>
           </a:graphicData>
         </a:graphic>
       </p:graphicFrame>
@@ -10899,11 +11537,23 @@
   <p:clrMapOvr>
     <a:masterClrMapping/>
   </p:clrMapOvr>
+  <mc:AlternateContent xmlns:mc="http://schemas.openxmlformats.org/markup-compatibility/2006">
+    <mc:Choice xmlns:p14="http://schemas.microsoft.com/office/powerpoint/2010/main" Requires="p14">
+      <p:transition spd="med" p14:dur="600">
+        <p:fade/>
+      </p:transition>
+    </mc:Choice>
+    <mc:Fallback>
+      <p:transition spd="med">
+        <p:fade/>
+      </p:transition>
+    </mc:Fallback>
+  </mc:AlternateContent>
 </p:sld>
 </file>
 
 <file path=ppt/slides/slide5.xml><?xml version="1.0" encoding="utf-8"?>
-<p:sld xmlns:a="http://schemas.openxmlformats.org/drawingml/2006/main" xmlns:p="http://schemas.openxmlformats.org/presentationml/2006/main" xmlns:r="http://schemas.openxmlformats.org/officeDocument/2006/relationships">
+<p:sld xmlns:a="http://schemas.openxmlformats.org/drawingml/2006/main" xmlns:r="http://schemas.openxmlformats.org/officeDocument/2006/relationships" xmlns:p="http://schemas.openxmlformats.org/presentationml/2006/main">
   <p:cSld>
     <p:spTree>
       <p:nvGrpSpPr>
@@ -10911,7 +11561,14 @@
         <p:cNvGrpSpPr/>
         <p:nvPr/>
       </p:nvGrpSpPr>
-      <p:grpSpPr/>
+      <p:grpSpPr>
+        <a:xfrm>
+          <a:off x="0" y="0"/>
+          <a:ext cx="0" cy="0"/>
+          <a:chOff x="0" y="0"/>
+          <a:chExt cx="0" cy="0"/>
+        </a:xfrm>
+      </p:grpSpPr>
       <p:sp>
         <p:nvSpPr>
           <p:cNvPr id="2" name="Title 1"/>
@@ -10933,13 +11590,31 @@
           <a:lstStyle/>
           <a:p>
             <a:r>
-              <a:rPr sz="4000" b="1" i="0">
+              <a:rPr sz="4000" b="1" i="0" dirty="0">
                 <a:solidFill>
                   <a:srgbClr val="222222"/>
                 </a:solidFill>
                 <a:latin typeface="Arial"/>
               </a:rPr>
-              <a:t>Proposed pipeline</a:t>
+              <a:t>Proposed </a:t>
+            </a:r>
+            <a:r>
+              <a:rPr lang="en-US" sz="4000" b="1" i="0" dirty="0">
+                <a:solidFill>
+                  <a:srgbClr val="222222"/>
+                </a:solidFill>
+                <a:latin typeface="Arial"/>
+              </a:rPr>
+              <a:t>P</a:t>
+            </a:r>
+            <a:r>
+              <a:rPr sz="4000" b="1" i="0" dirty="0">
+                <a:solidFill>
+                  <a:srgbClr val="222222"/>
+                </a:solidFill>
+                <a:latin typeface="Arial"/>
+              </a:rPr>
+              <a:t>ipeline</a:t>
             </a:r>
           </a:p>
         </p:txBody>
@@ -11057,7 +11732,7 @@
           <a:p>
             <a:fld id="{7F469C41-6B9F-4AAA-9F31-D78B57F455E2}" type="slidenum">
               <a:rPr lang="en-GB" smtClean="0"/>
-              <a:t>2</a:t>
+              <a:t>5</a:t>
             </a:fld>
             <a:endParaRPr lang="en-GB"/>
           </a:p>
@@ -11106,6 +11781,7 @@
           <a:lstStyle/>
           <a:p>
             <a:pPr algn="ctr"/>
+            <a:endParaRPr/>
           </a:p>
         </p:txBody>
       </p:sp>
@@ -11150,7 +11826,7 @@
           <a:noFill/>
         </p:spPr>
         <p:txBody>
-          <a:bodyPr wrap="square" anchor="t" lIns="45720" rIns="45720" tIns="27432" bIns="27432">
+          <a:bodyPr wrap="square" lIns="45720" tIns="27432" rIns="45720" bIns="27432" anchor="t">
             <a:spAutoFit/>
           </a:bodyPr>
           <a:lstStyle/>
@@ -11177,11 +11853,23 @@
   <p:clrMapOvr>
     <a:masterClrMapping/>
   </p:clrMapOvr>
+  <mc:AlternateContent xmlns:mc="http://schemas.openxmlformats.org/markup-compatibility/2006">
+    <mc:Choice xmlns:p14="http://schemas.microsoft.com/office/powerpoint/2010/main" Requires="p14">
+      <p:transition spd="med" p14:dur="600">
+        <p:fade/>
+      </p:transition>
+    </mc:Choice>
+    <mc:Fallback>
+      <p:transition spd="med">
+        <p:fade/>
+      </p:transition>
+    </mc:Fallback>
+  </mc:AlternateContent>
 </p:sld>
 </file>
 
 <file path=ppt/slides/slide6.xml><?xml version="1.0" encoding="utf-8"?>
-<p:sld xmlns:a="http://schemas.openxmlformats.org/drawingml/2006/main" xmlns:p="http://schemas.openxmlformats.org/presentationml/2006/main" xmlns:r="http://schemas.openxmlformats.org/officeDocument/2006/relationships">
+<p:sld xmlns:a="http://schemas.openxmlformats.org/drawingml/2006/main" xmlns:r="http://schemas.openxmlformats.org/officeDocument/2006/relationships" xmlns:p="http://schemas.openxmlformats.org/presentationml/2006/main">
   <p:cSld>
     <p:spTree>
       <p:nvGrpSpPr>
@@ -11189,7 +11877,14 @@
         <p:cNvGrpSpPr/>
         <p:nvPr/>
       </p:nvGrpSpPr>
-      <p:grpSpPr/>
+      <p:grpSpPr>
+        <a:xfrm>
+          <a:off x="0" y="0"/>
+          <a:ext cx="0" cy="0"/>
+          <a:chOff x="0" y="0"/>
+          <a:chExt cx="0" cy="0"/>
+        </a:xfrm>
+      </p:grpSpPr>
       <p:sp>
         <p:nvSpPr>
           <p:cNvPr id="2" name="Title 1"/>
@@ -11217,7 +11912,70 @@
                 </a:solidFill>
                 <a:latin typeface="Arial"/>
               </a:rPr>
-              <a:t>Four signal-to-image transformations</a:t>
+              <a:t>Four </a:t>
+            </a:r>
+            <a:r>
+              <a:rPr lang="en-US" sz="4000" b="1" i="0">
+                <a:solidFill>
+                  <a:srgbClr val="222222"/>
+                </a:solidFill>
+                <a:latin typeface="Arial"/>
+              </a:rPr>
+              <a:t>S</a:t>
+            </a:r>
+            <a:r>
+              <a:rPr sz="4000" b="1" i="0">
+                <a:solidFill>
+                  <a:srgbClr val="222222"/>
+                </a:solidFill>
+                <a:latin typeface="Arial"/>
+              </a:rPr>
+              <a:t>ignal-</a:t>
+            </a:r>
+            <a:r>
+              <a:rPr lang="en-US" sz="4000" b="1">
+                <a:solidFill>
+                  <a:srgbClr val="222222"/>
+                </a:solidFill>
+                <a:latin typeface="Arial"/>
+              </a:rPr>
+              <a:t>t</a:t>
+            </a:r>
+            <a:r>
+              <a:rPr sz="4000" b="1" i="0">
+                <a:solidFill>
+                  <a:srgbClr val="222222"/>
+                </a:solidFill>
+                <a:latin typeface="Arial"/>
+              </a:rPr>
+              <a:t>o-</a:t>
+            </a:r>
+            <a:r>
+              <a:rPr lang="en-US" sz="4000" b="1" i="0">
+                <a:solidFill>
+                  <a:srgbClr val="222222"/>
+                </a:solidFill>
+                <a:latin typeface="Arial"/>
+              </a:rPr>
+              <a:t>I</a:t>
+            </a:r>
+            <a:r>
+              <a:rPr sz="4000" b="1" i="0">
+                <a:solidFill>
+                  <a:srgbClr val="222222"/>
+                </a:solidFill>
+                <a:latin typeface="Arial"/>
+              </a:rPr>
+              <a:t>mage </a:t>
+            </a:r>
+            <a:r>
+              <a:rPr sz="4000" b="1" i="0" dirty="0">
+                <a:solidFill>
+                  <a:srgbClr val="222222"/>
+                </a:solidFill>
+                <a:latin typeface="Arial"/>
+              </a:rPr>
+              <a:t>transformations</a:t>
             </a:r>
           </a:p>
         </p:txBody>
@@ -11335,7 +12093,7 @@
           <a:p>
             <a:fld id="{7F469C41-6B9F-4AAA-9F31-D78B57F455E2}" type="slidenum">
               <a:rPr lang="en-GB" smtClean="0"/>
-              <a:t>2</a:t>
+              <a:t>6</a:t>
             </a:fld>
             <a:endParaRPr lang="en-GB"/>
           </a:p>
@@ -11384,6 +12142,7 @@
           <a:lstStyle/>
           <a:p>
             <a:pPr algn="ctr"/>
+            <a:endParaRPr/>
           </a:p>
         </p:txBody>
       </p:sp>
@@ -11428,12 +12187,246 @@
           <a:lstStyle/>
           <a:p>
             <a:pPr algn="ctr"/>
+            <a:endParaRPr/>
           </a:p>
         </p:txBody>
       </p:sp>
       <p:pic>
         <p:nvPicPr>
           <p:cNvPr id="10" name="Icon img" descr="img_p.png"/>
+          <p:cNvPicPr>
+            <a:picLocks noChangeAspect="1"/>
+          </p:cNvPicPr>
+          <p:nvPr/>
+        </p:nvPicPr>
+        <p:blipFill>
+          <a:blip r:embed="rId3"/>
+          <a:stretch>
+            <a:fillRect/>
+          </a:stretch>
+        </p:blipFill>
+        <p:spPr>
+          <a:xfrm>
+            <a:off x="1856232" y="1975104"/>
+            <a:ext cx="438912" cy="438912"/>
+          </a:xfrm>
+          <a:prstGeom prst="rect">
+            <a:avLst/>
+          </a:prstGeom>
+        </p:spPr>
+      </p:pic>
+      <p:sp>
+        <p:nvSpPr>
+          <p:cNvPr id="11" name="TextBox 10"/>
+          <p:cNvSpPr txBox="1"/>
+          <p:nvPr/>
+        </p:nvSpPr>
+        <p:spPr>
+          <a:xfrm>
+            <a:off x="932688" y="2606040"/>
+            <a:ext cx="2286000" cy="457200"/>
+          </a:xfrm>
+          <a:prstGeom prst="rect">
+            <a:avLst/>
+          </a:prstGeom>
+          <a:noFill/>
+        </p:spPr>
+        <p:txBody>
+          <a:bodyPr wrap="square" lIns="45720" tIns="27432" rIns="45720" bIns="27432" anchor="t">
+            <a:spAutoFit/>
+          </a:bodyPr>
+          <a:lstStyle/>
+          <a:p>
+            <a:pPr algn="ctr">
+              <a:spcAft>
+                <a:spcPts val="600"/>
+              </a:spcAft>
+            </a:pPr>
+            <a:r>
+              <a:rPr sz="2400" b="1" i="0">
+                <a:solidFill>
+                  <a:srgbClr val="FFFFFF"/>
+                </a:solidFill>
+                <a:latin typeface="Arial"/>
+              </a:rPr>
+              <a:t>GASF</a:t>
+            </a:r>
+          </a:p>
+        </p:txBody>
+      </p:sp>
+      <p:sp>
+        <p:nvSpPr>
+          <p:cNvPr id="12" name="TextBox 11"/>
+          <p:cNvSpPr txBox="1"/>
+          <p:nvPr/>
+        </p:nvSpPr>
+        <p:spPr>
+          <a:xfrm>
+            <a:off x="932688" y="3108960"/>
+            <a:ext cx="2286000" cy="685800"/>
+          </a:xfrm>
+          <a:prstGeom prst="rect">
+            <a:avLst/>
+          </a:prstGeom>
+          <a:noFill/>
+        </p:spPr>
+        <p:txBody>
+          <a:bodyPr wrap="square" lIns="45720" tIns="27432" rIns="45720" bIns="27432" anchor="ctr">
+            <a:spAutoFit/>
+          </a:bodyPr>
+          <a:lstStyle/>
+          <a:p>
+            <a:pPr algn="ctr">
+              <a:spcAft>
+                <a:spcPts val="600"/>
+              </a:spcAft>
+            </a:pPr>
+            <a:r>
+              <a:rPr sz="1800" b="1" i="0">
+                <a:solidFill>
+                  <a:srgbClr val="FFFFFF"/>
+                </a:solidFill>
+                <a:latin typeface="Arial"/>
+              </a:rPr>
+              <a:t>cos(φᵢ + φⱼ)</a:t>
+            </a:r>
+          </a:p>
+        </p:txBody>
+      </p:sp>
+      <p:sp>
+        <p:nvSpPr>
+          <p:cNvPr id="13" name="TextBox 12"/>
+          <p:cNvSpPr txBox="1"/>
+          <p:nvPr/>
+        </p:nvSpPr>
+        <p:spPr>
+          <a:xfrm>
+            <a:off x="978408" y="3840480"/>
+            <a:ext cx="2194560" cy="1005840"/>
+          </a:xfrm>
+          <a:prstGeom prst="rect">
+            <a:avLst/>
+          </a:prstGeom>
+          <a:noFill/>
+        </p:spPr>
+        <p:txBody>
+          <a:bodyPr wrap="square" lIns="45720" tIns="27432" rIns="45720" bIns="27432" anchor="t">
+            <a:spAutoFit/>
+          </a:bodyPr>
+          <a:lstStyle/>
+          <a:p>
+            <a:pPr algn="ctr">
+              <a:spcAft>
+                <a:spcPts val="600"/>
+              </a:spcAft>
+            </a:pPr>
+            <a:r>
+              <a:rPr sz="1600" b="0" i="0">
+                <a:solidFill>
+                  <a:srgbClr val="FFFFFF"/>
+                </a:solidFill>
+                <a:latin typeface="Arial"/>
+              </a:rPr>
+              <a:t>Summed angles; preserves global temporal correlation</a:t>
+            </a:r>
+          </a:p>
+        </p:txBody>
+      </p:sp>
+      <p:sp>
+        <p:nvSpPr>
+          <p:cNvPr id="14" name="Method card"/>
+          <p:cNvSpPr/>
+          <p:nvPr/>
+        </p:nvSpPr>
+        <p:spPr>
+          <a:xfrm>
+            <a:off x="3493008" y="1691640"/>
+            <a:ext cx="2468880" cy="3200400"/>
+          </a:xfrm>
+          <a:prstGeom prst="roundRect">
+            <a:avLst>
+              <a:gd name="adj" fmla="val 6000"/>
+            </a:avLst>
+          </a:prstGeom>
+          <a:solidFill>
+            <a:srgbClr val="F1E9F7"/>
+          </a:solidFill>
+          <a:ln>
+            <a:noFill/>
+          </a:ln>
+          <a:effectLst/>
+        </p:spPr>
+        <p:style>
+          <a:lnRef idx="1">
+            <a:schemeClr val="accent1"/>
+          </a:lnRef>
+          <a:fillRef idx="3">
+            <a:schemeClr val="accent1"/>
+          </a:fillRef>
+          <a:effectRef idx="2">
+            <a:schemeClr val="accent1"/>
+          </a:effectRef>
+          <a:fontRef idx="minor">
+            <a:schemeClr val="lt1"/>
+          </a:fontRef>
+        </p:style>
+        <p:txBody>
+          <a:bodyPr rtlCol="0" anchor="ctr"/>
+          <a:lstStyle/>
+          <a:p>
+            <a:pPr algn="ctr"/>
+            <a:endParaRPr/>
+          </a:p>
+        </p:txBody>
+      </p:sp>
+      <p:sp>
+        <p:nvSpPr>
+          <p:cNvPr id="15" name="Icon badge"/>
+          <p:cNvSpPr/>
+          <p:nvPr/>
+        </p:nvSpPr>
+        <p:spPr>
+          <a:xfrm>
+            <a:off x="4361688" y="1828800"/>
+            <a:ext cx="731520" cy="731520"/>
+          </a:xfrm>
+          <a:prstGeom prst="ellipse">
+            <a:avLst/>
+          </a:prstGeom>
+          <a:solidFill>
+            <a:srgbClr val="6A2C91"/>
+          </a:solidFill>
+          <a:ln>
+            <a:noFill/>
+          </a:ln>
+          <a:effectLst/>
+        </p:spPr>
+        <p:style>
+          <a:lnRef idx="1">
+            <a:schemeClr val="accent1"/>
+          </a:lnRef>
+          <a:fillRef idx="3">
+            <a:schemeClr val="accent1"/>
+          </a:fillRef>
+          <a:effectRef idx="2">
+            <a:schemeClr val="accent1"/>
+          </a:effectRef>
+          <a:fontRef idx="minor">
+            <a:schemeClr val="lt1"/>
+          </a:fontRef>
+        </p:style>
+        <p:txBody>
+          <a:bodyPr rtlCol="0" anchor="ctr"/>
+          <a:lstStyle/>
+          <a:p>
+            <a:pPr algn="ctr"/>
+            <a:endParaRPr/>
+          </a:p>
+        </p:txBody>
+      </p:sp>
+      <p:pic>
+        <p:nvPicPr>
+          <p:cNvPr id="16" name="Icon layer" descr="layer_w.png"/>
           <p:cNvPicPr>
             <a:picLocks noChangeAspect="1"/>
           </p:cNvPicPr>
@@ -11447,7 +12440,7 @@
         </p:blipFill>
         <p:spPr>
           <a:xfrm>
-            <a:off x="1856232" y="1975104"/>
+            <a:off x="4507992" y="1975104"/>
             <a:ext cx="438912" cy="438912"/>
           </a:xfrm>
           <a:prstGeom prst="rect">
@@ -11457,13 +12450,13 @@
       </p:pic>
       <p:sp>
         <p:nvSpPr>
-          <p:cNvPr id="11" name="TextBox 10"/>
+          <p:cNvPr id="17" name="TextBox 16"/>
           <p:cNvSpPr txBox="1"/>
           <p:nvPr/>
         </p:nvSpPr>
         <p:spPr>
           <a:xfrm>
-            <a:off x="932688" y="2606040"/>
+            <a:off x="3584448" y="2606040"/>
             <a:ext cx="2286000" cy="457200"/>
           </a:xfrm>
           <a:prstGeom prst="rect">
@@ -11472,7 +12465,7 @@
           <a:noFill/>
         </p:spPr>
         <p:txBody>
-          <a:bodyPr wrap="square" anchor="t" lIns="45720" rIns="45720" tIns="27432" bIns="27432">
+          <a:bodyPr wrap="square" lIns="45720" tIns="27432" rIns="45720" bIns="27432" anchor="t">
             <a:spAutoFit/>
           </a:bodyPr>
           <a:lstStyle/>
@@ -11485,24 +12478,24 @@
             <a:r>
               <a:rPr sz="2400" b="1" i="0">
                 <a:solidFill>
-                  <a:srgbClr val="FFFFFF"/>
+                  <a:srgbClr val="6A2C91"/>
                 </a:solidFill>
                 <a:latin typeface="Arial"/>
               </a:rPr>
-              <a:t>GASF</a:t>
-            </a:r>
-          </a:p>
-        </p:txBody>
-      </p:sp>
-      <p:sp>
-        <p:nvSpPr>
-          <p:cNvPr id="12" name="TextBox 11"/>
+              <a:t>GADF</a:t>
+            </a:r>
+          </a:p>
+        </p:txBody>
+      </p:sp>
+      <p:sp>
+        <p:nvSpPr>
+          <p:cNvPr id="18" name="TextBox 17"/>
           <p:cNvSpPr txBox="1"/>
           <p:nvPr/>
         </p:nvSpPr>
         <p:spPr>
           <a:xfrm>
-            <a:off x="932688" y="3108960"/>
+            <a:off x="3584448" y="3108960"/>
             <a:ext cx="2286000" cy="685800"/>
           </a:xfrm>
           <a:prstGeom prst="rect">
@@ -11511,7 +12504,7 @@
           <a:noFill/>
         </p:spPr>
         <p:txBody>
-          <a:bodyPr wrap="square" anchor="ctr" lIns="45720" rIns="45720" tIns="27432" bIns="27432">
+          <a:bodyPr wrap="square" lIns="45720" tIns="27432" rIns="45720" bIns="27432" anchor="ctr">
             <a:spAutoFit/>
           </a:bodyPr>
           <a:lstStyle/>
@@ -11524,24 +12517,24 @@
             <a:r>
               <a:rPr sz="1800" b="1" i="0">
                 <a:solidFill>
-                  <a:srgbClr val="FFFFFF"/>
+                  <a:srgbClr val="222222"/>
                 </a:solidFill>
                 <a:latin typeface="Arial"/>
               </a:rPr>
-              <a:t>cos(φᵢ + φⱼ)</a:t>
-            </a:r>
-          </a:p>
-        </p:txBody>
-      </p:sp>
-      <p:sp>
-        <p:nvSpPr>
-          <p:cNvPr id="13" name="TextBox 12"/>
+              <a:t>sin(φᵢ − φⱼ)</a:t>
+            </a:r>
+          </a:p>
+        </p:txBody>
+      </p:sp>
+      <p:sp>
+        <p:nvSpPr>
+          <p:cNvPr id="19" name="TextBox 18"/>
           <p:cNvSpPr txBox="1"/>
           <p:nvPr/>
         </p:nvSpPr>
         <p:spPr>
           <a:xfrm>
-            <a:off x="978408" y="3840480"/>
+            <a:off x="3630168" y="3840480"/>
             <a:ext cx="2194560" cy="1005840"/>
           </a:xfrm>
           <a:prstGeom prst="rect">
@@ -11550,7 +12543,7 @@
           <a:noFill/>
         </p:spPr>
         <p:txBody>
-          <a:bodyPr wrap="square" anchor="t" lIns="45720" rIns="45720" tIns="27432" bIns="27432">
+          <a:bodyPr wrap="square" lIns="45720" tIns="27432" rIns="45720" bIns="27432" anchor="t">
             <a:spAutoFit/>
           </a:bodyPr>
           <a:lstStyle/>
@@ -11563,24 +12556,24 @@
             <a:r>
               <a:rPr sz="1600" b="0" i="0">
                 <a:solidFill>
-                  <a:srgbClr val="FFFFFF"/>
+                  <a:srgbClr val="222222"/>
                 </a:solidFill>
                 <a:latin typeface="Arial"/>
               </a:rPr>
-              <a:t>Summed angles; preserves global temporal correlation</a:t>
-            </a:r>
-          </a:p>
-        </p:txBody>
-      </p:sp>
-      <p:sp>
-        <p:nvSpPr>
-          <p:cNvPr id="14" name="Method card"/>
+              <a:t>Difference of angles; less globally coherent</a:t>
+            </a:r>
+          </a:p>
+        </p:txBody>
+      </p:sp>
+      <p:sp>
+        <p:nvSpPr>
+          <p:cNvPr id="20" name="Method card"/>
           <p:cNvSpPr/>
           <p:nvPr/>
         </p:nvSpPr>
         <p:spPr>
           <a:xfrm>
-            <a:off x="3493008" y="1691640"/>
+            <a:off x="6144768" y="1691640"/>
             <a:ext cx="2468880" cy="3200400"/>
           </a:xfrm>
           <a:prstGeom prst="roundRect">
@@ -11615,18 +12608,19 @@
           <a:lstStyle/>
           <a:p>
             <a:pPr algn="ctr"/>
-          </a:p>
-        </p:txBody>
-      </p:sp>
-      <p:sp>
-        <p:nvSpPr>
-          <p:cNvPr id="15" name="Icon badge"/>
+            <a:endParaRPr/>
+          </a:p>
+        </p:txBody>
+      </p:sp>
+      <p:sp>
+        <p:nvSpPr>
+          <p:cNvPr id="21" name="Icon badge"/>
           <p:cNvSpPr/>
           <p:nvPr/>
         </p:nvSpPr>
         <p:spPr>
           <a:xfrm>
-            <a:off x="4361688" y="1828800"/>
+            <a:off x="7013448" y="1828800"/>
             <a:ext cx="731520" cy="731520"/>
           </a:xfrm>
           <a:prstGeom prst="ellipse">
@@ -11659,12 +12653,13 @@
           <a:lstStyle/>
           <a:p>
             <a:pPr algn="ctr"/>
+            <a:endParaRPr/>
           </a:p>
         </p:txBody>
       </p:sp>
       <p:pic>
         <p:nvPicPr>
-          <p:cNvPr id="16" name="Icon layer" descr="layer_w.png"/>
+          <p:cNvPr id="22" name="Icon cogs" descr="cogs_w.png"/>
           <p:cNvPicPr>
             <a:picLocks noChangeAspect="1"/>
           </p:cNvPicPr>
@@ -11678,7 +12673,7 @@
         </p:blipFill>
         <p:spPr>
           <a:xfrm>
-            <a:off x="4507992" y="1975104"/>
+            <a:off x="7159752" y="1975104"/>
             <a:ext cx="438912" cy="438912"/>
           </a:xfrm>
           <a:prstGeom prst="rect">
@@ -11688,13 +12683,13 @@
       </p:pic>
       <p:sp>
         <p:nvSpPr>
-          <p:cNvPr id="17" name="TextBox 16"/>
+          <p:cNvPr id="23" name="TextBox 22"/>
           <p:cNvSpPr txBox="1"/>
           <p:nvPr/>
         </p:nvSpPr>
         <p:spPr>
           <a:xfrm>
-            <a:off x="3584448" y="2606040"/>
+            <a:off x="6236207" y="2606040"/>
             <a:ext cx="2286000" cy="457200"/>
           </a:xfrm>
           <a:prstGeom prst="rect">
@@ -11703,7 +12698,7 @@
           <a:noFill/>
         </p:spPr>
         <p:txBody>
-          <a:bodyPr wrap="square" anchor="t" lIns="45720" rIns="45720" tIns="27432" bIns="27432">
+          <a:bodyPr wrap="square" lIns="45720" tIns="27432" rIns="45720" bIns="27432" anchor="t">
             <a:spAutoFit/>
           </a:bodyPr>
           <a:lstStyle/>
@@ -11720,20 +12715,20 @@
                 </a:solidFill>
                 <a:latin typeface="Arial"/>
               </a:rPr>
-              <a:t>GADF</a:t>
-            </a:r>
-          </a:p>
-        </p:txBody>
-      </p:sp>
-      <p:sp>
-        <p:nvSpPr>
-          <p:cNvPr id="18" name="TextBox 17"/>
+              <a:t>MTF</a:t>
+            </a:r>
+          </a:p>
+        </p:txBody>
+      </p:sp>
+      <p:sp>
+        <p:nvSpPr>
+          <p:cNvPr id="24" name="TextBox 23"/>
           <p:cNvSpPr txBox="1"/>
           <p:nvPr/>
         </p:nvSpPr>
         <p:spPr>
           <a:xfrm>
-            <a:off x="3584448" y="3108960"/>
+            <a:off x="6236207" y="3108960"/>
             <a:ext cx="2286000" cy="685800"/>
           </a:xfrm>
           <a:prstGeom prst="rect">
@@ -11742,7 +12737,7 @@
           <a:noFill/>
         </p:spPr>
         <p:txBody>
-          <a:bodyPr wrap="square" anchor="ctr" lIns="45720" rIns="45720" tIns="27432" bIns="27432">
+          <a:bodyPr wrap="square" lIns="45720" tIns="27432" rIns="45720" bIns="27432" anchor="ctr">
             <a:spAutoFit/>
           </a:bodyPr>
           <a:lstStyle/>
@@ -11759,20 +12754,20 @@
                 </a:solidFill>
                 <a:latin typeface="Arial"/>
               </a:rPr>
-              <a:t>sin(φᵢ − φⱼ)</a:t>
-            </a:r>
-          </a:p>
-        </p:txBody>
-      </p:sp>
-      <p:sp>
-        <p:nvSpPr>
-          <p:cNvPr id="19" name="TextBox 18"/>
+              <a:t>Markov transition probs</a:t>
+            </a:r>
+          </a:p>
+        </p:txBody>
+      </p:sp>
+      <p:sp>
+        <p:nvSpPr>
+          <p:cNvPr id="25" name="TextBox 24"/>
           <p:cNvSpPr txBox="1"/>
           <p:nvPr/>
         </p:nvSpPr>
         <p:spPr>
           <a:xfrm>
-            <a:off x="3630168" y="3840480"/>
+            <a:off x="6281928" y="3840480"/>
             <a:ext cx="2194560" cy="1005840"/>
           </a:xfrm>
           <a:prstGeom prst="rect">
@@ -11781,7 +12776,7 @@
           <a:noFill/>
         </p:spPr>
         <p:txBody>
-          <a:bodyPr wrap="square" anchor="t" lIns="45720" rIns="45720" tIns="27432" bIns="27432">
+          <a:bodyPr wrap="square" lIns="45720" tIns="27432" rIns="45720" bIns="27432" anchor="t">
             <a:spAutoFit/>
           </a:bodyPr>
           <a:lstStyle/>
@@ -11798,20 +12793,20 @@
                 </a:solidFill>
                 <a:latin typeface="Arial"/>
               </a:rPr>
-              <a:t>Difference of angles; less globally coherent</a:t>
-            </a:r>
-          </a:p>
-        </p:txBody>
-      </p:sp>
-      <p:sp>
-        <p:nvSpPr>
-          <p:cNvPr id="20" name="Method card"/>
+              <a:t>32 bins; quantisation loss, slow (5 s/epoch)</a:t>
+            </a:r>
+          </a:p>
+        </p:txBody>
+      </p:sp>
+      <p:sp>
+        <p:nvSpPr>
+          <p:cNvPr id="26" name="Method card"/>
           <p:cNvSpPr/>
           <p:nvPr/>
         </p:nvSpPr>
         <p:spPr>
           <a:xfrm>
-            <a:off x="6144768" y="1691640"/>
+            <a:off x="8796528" y="1691640"/>
             <a:ext cx="2468880" cy="3200400"/>
           </a:xfrm>
           <a:prstGeom prst="roundRect">
@@ -11846,18 +12841,19 @@
           <a:lstStyle/>
           <a:p>
             <a:pPr algn="ctr"/>
-          </a:p>
-        </p:txBody>
-      </p:sp>
-      <p:sp>
-        <p:nvSpPr>
-          <p:cNvPr id="21" name="Icon badge"/>
+            <a:endParaRPr/>
+          </a:p>
+        </p:txBody>
+      </p:sp>
+      <p:sp>
+        <p:nvSpPr>
+          <p:cNvPr id="27" name="Icon badge"/>
           <p:cNvSpPr/>
           <p:nvPr/>
         </p:nvSpPr>
         <p:spPr>
           <a:xfrm>
-            <a:off x="7013448" y="1828800"/>
+            <a:off x="9665207" y="1828800"/>
             <a:ext cx="731520" cy="731520"/>
           </a:xfrm>
           <a:prstGeom prst="ellipse">
@@ -11890,12 +12886,13 @@
           <a:lstStyle/>
           <a:p>
             <a:pPr algn="ctr"/>
+            <a:endParaRPr/>
           </a:p>
         </p:txBody>
       </p:sp>
       <p:pic>
         <p:nvPicPr>
-          <p:cNvPr id="22" name="Icon cogs" descr="cogs_w.png"/>
+          <p:cNvPr id="28" name="Icon wave" descr="wave_w.png"/>
           <p:cNvPicPr>
             <a:picLocks noChangeAspect="1"/>
           </p:cNvPicPr>
@@ -11909,7 +12906,7 @@
         </p:blipFill>
         <p:spPr>
           <a:xfrm>
-            <a:off x="7159752" y="1975104"/>
+            <a:off x="9811511" y="1975104"/>
             <a:ext cx="438912" cy="438912"/>
           </a:xfrm>
           <a:prstGeom prst="rect">
@@ -11919,13 +12916,13 @@
       </p:pic>
       <p:sp>
         <p:nvSpPr>
-          <p:cNvPr id="23" name="TextBox 22"/>
+          <p:cNvPr id="29" name="TextBox 28"/>
           <p:cNvSpPr txBox="1"/>
           <p:nvPr/>
         </p:nvSpPr>
         <p:spPr>
           <a:xfrm>
-            <a:off x="6236207" y="2606040"/>
+            <a:off x="8887967" y="2606040"/>
             <a:ext cx="2286000" cy="457200"/>
           </a:xfrm>
           <a:prstGeom prst="rect">
@@ -11934,7 +12931,7 @@
           <a:noFill/>
         </p:spPr>
         <p:txBody>
-          <a:bodyPr wrap="square" anchor="t" lIns="45720" rIns="45720" tIns="27432" bIns="27432">
+          <a:bodyPr wrap="square" lIns="45720" tIns="27432" rIns="45720" bIns="27432" anchor="t">
             <a:spAutoFit/>
           </a:bodyPr>
           <a:lstStyle/>
@@ -11951,20 +12948,20 @@
                 </a:solidFill>
                 <a:latin typeface="Arial"/>
               </a:rPr>
-              <a:t>MTF</a:t>
-            </a:r>
-          </a:p>
-        </p:txBody>
-      </p:sp>
-      <p:sp>
-        <p:nvSpPr>
-          <p:cNvPr id="24" name="TextBox 23"/>
+              <a:t>Spectrogram</a:t>
+            </a:r>
+          </a:p>
+        </p:txBody>
+      </p:sp>
+      <p:sp>
+        <p:nvSpPr>
+          <p:cNvPr id="30" name="TextBox 29"/>
           <p:cNvSpPr txBox="1"/>
           <p:nvPr/>
         </p:nvSpPr>
         <p:spPr>
           <a:xfrm>
-            <a:off x="6236207" y="3108960"/>
+            <a:off x="8887967" y="3108960"/>
             <a:ext cx="2286000" cy="685800"/>
           </a:xfrm>
           <a:prstGeom prst="rect">
@@ -11973,7 +12970,7 @@
           <a:noFill/>
         </p:spPr>
         <p:txBody>
-          <a:bodyPr wrap="square" anchor="ctr" lIns="45720" rIns="45720" tIns="27432" bIns="27432">
+          <a:bodyPr wrap="square" lIns="45720" tIns="27432" rIns="45720" bIns="27432" anchor="ctr">
             <a:spAutoFit/>
           </a:bodyPr>
           <a:lstStyle/>
@@ -11990,20 +12987,20 @@
                 </a:solidFill>
                 <a:latin typeface="Arial"/>
               </a:rPr>
-              <a:t>Markov transition probs</a:t>
-            </a:r>
-          </a:p>
-        </p:txBody>
-      </p:sp>
-      <p:sp>
-        <p:nvSpPr>
-          <p:cNvPr id="25" name="TextBox 24"/>
+              <a:t>STFT, Hamming 256</a:t>
+            </a:r>
+          </a:p>
+        </p:txBody>
+      </p:sp>
+      <p:sp>
+        <p:nvSpPr>
+          <p:cNvPr id="31" name="TextBox 30"/>
           <p:cNvSpPr txBox="1"/>
           <p:nvPr/>
         </p:nvSpPr>
         <p:spPr>
           <a:xfrm>
-            <a:off x="6281928" y="3840480"/>
+            <a:off x="8933688" y="3840480"/>
             <a:ext cx="2194560" cy="1005840"/>
           </a:xfrm>
           <a:prstGeom prst="rect">
@@ -12012,7 +13009,7 @@
           <a:noFill/>
         </p:spPr>
         <p:txBody>
-          <a:bodyPr wrap="square" anchor="t" lIns="45720" rIns="45720" tIns="27432" bIns="27432">
+          <a:bodyPr wrap="square" lIns="45720" tIns="27432" rIns="45720" bIns="27432" anchor="t">
             <a:spAutoFit/>
           </a:bodyPr>
           <a:lstStyle/>
@@ -12029,70 +13026,26 @@
                 </a:solidFill>
                 <a:latin typeface="Arial"/>
               </a:rPr>
-              <a:t>32 bins; quantisation loss, slow (5 s/epoch)</a:t>
-            </a:r>
-          </a:p>
-        </p:txBody>
-      </p:sp>
-      <p:sp>
-        <p:nvSpPr>
-          <p:cNvPr id="26" name="Method card"/>
+              <a:t>Fixed time–frequency resolution</a:t>
+            </a:r>
+          </a:p>
+        </p:txBody>
+      </p:sp>
+      <p:sp>
+        <p:nvSpPr>
+          <p:cNvPr id="32" name="Takeaway card"/>
           <p:cNvSpPr/>
           <p:nvPr/>
         </p:nvSpPr>
         <p:spPr>
           <a:xfrm>
-            <a:off x="8796528" y="1691640"/>
-            <a:ext cx="2468880" cy="3200400"/>
+            <a:off x="841248" y="5166360"/>
+            <a:ext cx="10515600" cy="822960"/>
           </a:xfrm>
           <a:prstGeom prst="roundRect">
             <a:avLst>
               <a:gd name="adj" fmla="val 6000"/>
             </a:avLst>
-          </a:prstGeom>
-          <a:solidFill>
-            <a:srgbClr val="F1E9F7"/>
-          </a:solidFill>
-          <a:ln>
-            <a:noFill/>
-          </a:ln>
-          <a:effectLst/>
-        </p:spPr>
-        <p:style>
-          <a:lnRef idx="1">
-            <a:schemeClr val="accent1"/>
-          </a:lnRef>
-          <a:fillRef idx="3">
-            <a:schemeClr val="accent1"/>
-          </a:fillRef>
-          <a:effectRef idx="2">
-            <a:schemeClr val="accent1"/>
-          </a:effectRef>
-          <a:fontRef idx="minor">
-            <a:schemeClr val="lt1"/>
-          </a:fontRef>
-        </p:style>
-        <p:txBody>
-          <a:bodyPr rtlCol="0" anchor="ctr"/>
-          <a:lstStyle/>
-          <a:p>
-            <a:pPr algn="ctr"/>
-          </a:p>
-        </p:txBody>
-      </p:sp>
-      <p:sp>
-        <p:nvSpPr>
-          <p:cNvPr id="27" name="Icon badge"/>
-          <p:cNvSpPr/>
-          <p:nvPr/>
-        </p:nvSpPr>
-        <p:spPr>
-          <a:xfrm>
-            <a:off x="9665207" y="1828800"/>
-            <a:ext cx="731520" cy="731520"/>
-          </a:xfrm>
-          <a:prstGeom prst="ellipse">
-            <a:avLst/>
           </a:prstGeom>
           <a:solidFill>
             <a:srgbClr val="6A2C91"/>
@@ -12121,12 +13074,13 @@
           <a:lstStyle/>
           <a:p>
             <a:pPr algn="ctr"/>
+            <a:endParaRPr/>
           </a:p>
         </p:txBody>
       </p:sp>
       <p:pic>
         <p:nvPicPr>
-          <p:cNvPr id="28" name="Icon wave" descr="wave_w.png"/>
+          <p:cNvPr id="33" name="Icon bolt" descr="bolt_w.png"/>
           <p:cNvPicPr>
             <a:picLocks noChangeAspect="1"/>
           </p:cNvPicPr>
@@ -12140,8 +13094,8 @@
         </p:blipFill>
         <p:spPr>
           <a:xfrm>
-            <a:off x="9811511" y="1975104"/>
-            <a:ext cx="438912" cy="438912"/>
+            <a:off x="1069848" y="5330952"/>
+            <a:ext cx="493776" cy="493776"/>
           </a:xfrm>
           <a:prstGeom prst="rect">
             <a:avLst/>
@@ -12150,14 +13104,14 @@
       </p:pic>
       <p:sp>
         <p:nvSpPr>
-          <p:cNvPr id="29" name="TextBox 28"/>
+          <p:cNvPr id="34" name="Takeaway"/>
           <p:cNvSpPr txBox="1"/>
           <p:nvPr/>
         </p:nvSpPr>
         <p:spPr>
           <a:xfrm>
-            <a:off x="8887967" y="2606040"/>
-            <a:ext cx="2286000" cy="457200"/>
+            <a:off x="1728216" y="5166360"/>
+            <a:ext cx="9326880" cy="822960"/>
           </a:xfrm>
           <a:prstGeom prst="rect">
             <a:avLst/>
@@ -12165,194 +13119,7 @@
           <a:noFill/>
         </p:spPr>
         <p:txBody>
-          <a:bodyPr wrap="square" anchor="t" lIns="45720" rIns="45720" tIns="27432" bIns="27432">
-            <a:spAutoFit/>
-          </a:bodyPr>
-          <a:lstStyle/>
-          <a:p>
-            <a:pPr algn="ctr">
-              <a:spcAft>
-                <a:spcPts val="600"/>
-              </a:spcAft>
-            </a:pPr>
-            <a:r>
-              <a:rPr sz="2400" b="1" i="0">
-                <a:solidFill>
-                  <a:srgbClr val="6A2C91"/>
-                </a:solidFill>
-                <a:latin typeface="Arial"/>
-              </a:rPr>
-              <a:t>Spectrogram</a:t>
-            </a:r>
-          </a:p>
-        </p:txBody>
-      </p:sp>
-      <p:sp>
-        <p:nvSpPr>
-          <p:cNvPr id="30" name="TextBox 29"/>
-          <p:cNvSpPr txBox="1"/>
-          <p:nvPr/>
-        </p:nvSpPr>
-        <p:spPr>
-          <a:xfrm>
-            <a:off x="8887967" y="3108960"/>
-            <a:ext cx="2286000" cy="685800"/>
-          </a:xfrm>
-          <a:prstGeom prst="rect">
-            <a:avLst/>
-          </a:prstGeom>
-          <a:noFill/>
-        </p:spPr>
-        <p:txBody>
-          <a:bodyPr wrap="square" anchor="ctr" lIns="45720" rIns="45720" tIns="27432" bIns="27432">
-            <a:spAutoFit/>
-          </a:bodyPr>
-          <a:lstStyle/>
-          <a:p>
-            <a:pPr algn="ctr">
-              <a:spcAft>
-                <a:spcPts val="600"/>
-              </a:spcAft>
-            </a:pPr>
-            <a:r>
-              <a:rPr sz="1800" b="1" i="0">
-                <a:solidFill>
-                  <a:srgbClr val="222222"/>
-                </a:solidFill>
-                <a:latin typeface="Arial"/>
-              </a:rPr>
-              <a:t>STFT, Hamming 256</a:t>
-            </a:r>
-          </a:p>
-        </p:txBody>
-      </p:sp>
-      <p:sp>
-        <p:nvSpPr>
-          <p:cNvPr id="31" name="TextBox 30"/>
-          <p:cNvSpPr txBox="1"/>
-          <p:nvPr/>
-        </p:nvSpPr>
-        <p:spPr>
-          <a:xfrm>
-            <a:off x="8933688" y="3840480"/>
-            <a:ext cx="2194560" cy="1005840"/>
-          </a:xfrm>
-          <a:prstGeom prst="rect">
-            <a:avLst/>
-          </a:prstGeom>
-          <a:noFill/>
-        </p:spPr>
-        <p:txBody>
-          <a:bodyPr wrap="square" anchor="t" lIns="45720" rIns="45720" tIns="27432" bIns="27432">
-            <a:spAutoFit/>
-          </a:bodyPr>
-          <a:lstStyle/>
-          <a:p>
-            <a:pPr algn="ctr">
-              <a:spcAft>
-                <a:spcPts val="600"/>
-              </a:spcAft>
-            </a:pPr>
-            <a:r>
-              <a:rPr sz="1600" b="0" i="0">
-                <a:solidFill>
-                  <a:srgbClr val="222222"/>
-                </a:solidFill>
-                <a:latin typeface="Arial"/>
-              </a:rPr>
-              <a:t>Fixed time–frequency resolution</a:t>
-            </a:r>
-          </a:p>
-        </p:txBody>
-      </p:sp>
-      <p:sp>
-        <p:nvSpPr>
-          <p:cNvPr id="32" name="Takeaway card"/>
-          <p:cNvSpPr/>
-          <p:nvPr/>
-        </p:nvSpPr>
-        <p:spPr>
-          <a:xfrm>
-            <a:off x="841248" y="5166360"/>
-            <a:ext cx="10515600" cy="822960"/>
-          </a:xfrm>
-          <a:prstGeom prst="roundRect">
-            <a:avLst>
-              <a:gd name="adj" fmla="val 6000"/>
-            </a:avLst>
-          </a:prstGeom>
-          <a:solidFill>
-            <a:srgbClr val="6A2C91"/>
-          </a:solidFill>
-          <a:ln>
-            <a:noFill/>
-          </a:ln>
-          <a:effectLst/>
-        </p:spPr>
-        <p:style>
-          <a:lnRef idx="1">
-            <a:schemeClr val="accent1"/>
-          </a:lnRef>
-          <a:fillRef idx="3">
-            <a:schemeClr val="accent1"/>
-          </a:fillRef>
-          <a:effectRef idx="2">
-            <a:schemeClr val="accent1"/>
-          </a:effectRef>
-          <a:fontRef idx="minor">
-            <a:schemeClr val="lt1"/>
-          </a:fontRef>
-        </p:style>
-        <p:txBody>
-          <a:bodyPr rtlCol="0" anchor="ctr"/>
-          <a:lstStyle/>
-          <a:p>
-            <a:pPr algn="ctr"/>
-          </a:p>
-        </p:txBody>
-      </p:sp>
-      <p:pic>
-        <p:nvPicPr>
-          <p:cNvPr id="33" name="Icon bolt" descr="bolt_w.png"/>
-          <p:cNvPicPr>
-            <a:picLocks noChangeAspect="1"/>
-          </p:cNvPicPr>
-          <p:nvPr/>
-        </p:nvPicPr>
-        <p:blipFill>
-          <a:blip r:embed="rId8"/>
-          <a:stretch>
-            <a:fillRect/>
-          </a:stretch>
-        </p:blipFill>
-        <p:spPr>
-          <a:xfrm>
-            <a:off x="1069848" y="5330952"/>
-            <a:ext cx="493776" cy="493776"/>
-          </a:xfrm>
-          <a:prstGeom prst="rect">
-            <a:avLst/>
-          </a:prstGeom>
-        </p:spPr>
-      </p:pic>
-      <p:sp>
-        <p:nvSpPr>
-          <p:cNvPr id="34" name="Takeaway"/>
-          <p:cNvSpPr txBox="1"/>
-          <p:nvPr/>
-        </p:nvSpPr>
-        <p:spPr>
-          <a:xfrm>
-            <a:off x="1728216" y="5166360"/>
-            <a:ext cx="9326880" cy="822960"/>
-          </a:xfrm>
-          <a:prstGeom prst="rect">
-            <a:avLst/>
-          </a:prstGeom>
-          <a:noFill/>
-        </p:spPr>
-        <p:txBody>
-          <a:bodyPr wrap="square" anchor="ctr" lIns="45720" rIns="45720" tIns="27432" bIns="27432">
+          <a:bodyPr wrap="square" lIns="45720" tIns="27432" rIns="45720" bIns="27432" anchor="ctr">
             <a:spAutoFit/>
           </a:bodyPr>
           <a:lstStyle/>
@@ -12379,11 +13146,23 @@
   <p:clrMapOvr>
     <a:masterClrMapping/>
   </p:clrMapOvr>
+  <mc:AlternateContent xmlns:mc="http://schemas.openxmlformats.org/markup-compatibility/2006">
+    <mc:Choice xmlns:p14="http://schemas.microsoft.com/office/powerpoint/2010/main" Requires="p14">
+      <p:transition spd="med" p14:dur="600">
+        <p:fade/>
+      </p:transition>
+    </mc:Choice>
+    <mc:Fallback>
+      <p:transition spd="med">
+        <p:fade/>
+      </p:transition>
+    </mc:Fallback>
+  </mc:AlternateContent>
 </p:sld>
 </file>
 
 <file path=ppt/slides/slide7.xml><?xml version="1.0" encoding="utf-8"?>
-<p:sld xmlns:a="http://schemas.openxmlformats.org/drawingml/2006/main" xmlns:p="http://schemas.openxmlformats.org/presentationml/2006/main" xmlns:r="http://schemas.openxmlformats.org/officeDocument/2006/relationships">
+<p:sld xmlns:a="http://schemas.openxmlformats.org/drawingml/2006/main" xmlns:r="http://schemas.openxmlformats.org/officeDocument/2006/relationships" xmlns:p="http://schemas.openxmlformats.org/presentationml/2006/main">
   <p:cSld>
     <p:spTree>
       <p:nvGrpSpPr>
@@ -12391,7 +13170,14 @@
         <p:cNvGrpSpPr/>
         <p:nvPr/>
       </p:nvGrpSpPr>
-      <p:grpSpPr/>
+      <p:grpSpPr>
+        <a:xfrm>
+          <a:off x="0" y="0"/>
+          <a:ext cx="0" cy="0"/>
+          <a:chOff x="0" y="0"/>
+          <a:chExt cx="0" cy="0"/>
+        </a:xfrm>
+      </p:grpSpPr>
       <p:sp>
         <p:nvSpPr>
           <p:cNvPr id="2" name="Title 1"/>
@@ -12537,7 +13323,7 @@
           <a:p>
             <a:fld id="{7F469C41-6B9F-4AAA-9F31-D78B57F455E2}" type="slidenum">
               <a:rPr lang="en-GB" smtClean="0"/>
-              <a:t>2</a:t>
+              <a:t>7</a:t>
             </a:fld>
             <a:endParaRPr lang="en-GB"/>
           </a:p>
@@ -12586,6 +13372,7 @@
           <a:lstStyle/>
           <a:p>
             <a:pPr algn="ctr"/>
+            <a:endParaRPr/>
           </a:p>
         </p:txBody>
       </p:sp>
@@ -12606,7 +13393,7 @@
           <a:noFill/>
         </p:spPr>
         <p:txBody>
-          <a:bodyPr wrap="square" anchor="ctr" lIns="45720" rIns="45720" tIns="27432" bIns="27432">
+          <a:bodyPr wrap="square" lIns="45720" tIns="27432" rIns="45720" bIns="27432" anchor="ctr">
             <a:spAutoFit/>
           </a:bodyPr>
           <a:lstStyle/>
@@ -12671,6 +13458,7 @@
           <a:lstStyle/>
           <a:p>
             <a:pPr algn="ctr"/>
+            <a:endParaRPr/>
           </a:p>
         </p:txBody>
       </p:sp>
@@ -12717,6 +13505,7 @@
           <a:lstStyle/>
           <a:p>
             <a:pPr algn="ctr"/>
+            <a:endParaRPr/>
           </a:p>
         </p:txBody>
       </p:sp>
@@ -12763,6 +13552,7 @@
           <a:lstStyle/>
           <a:p>
             <a:pPr algn="ctr"/>
+            <a:endParaRPr/>
           </a:p>
         </p:txBody>
       </p:sp>
@@ -12809,6 +13599,7 @@
           <a:lstStyle/>
           <a:p>
             <a:pPr algn="ctr"/>
+            <a:endParaRPr/>
           </a:p>
         </p:txBody>
       </p:sp>
@@ -12826,7 +13617,7 @@
         </p:xfrm>
         <a:graphic>
           <a:graphicData uri="http://schemas.openxmlformats.org/drawingml/2006/chart">
-            <c:chart xmlns:c="http://schemas.openxmlformats.org/drawingml/2006/chart" r:id="rId4"/>
+            <c:chart xmlns:c="http://schemas.openxmlformats.org/drawingml/2006/chart" xmlns:r="http://schemas.openxmlformats.org/officeDocument/2006/relationships" r:id="rId3"/>
           </a:graphicData>
         </a:graphic>
       </p:graphicFrame>
@@ -12873,6 +13664,7 @@
           <a:lstStyle/>
           <a:p>
             <a:pPr algn="ctr"/>
+            <a:endParaRPr/>
           </a:p>
         </p:txBody>
       </p:sp>
@@ -12893,7 +13685,7 @@
           <a:noFill/>
         </p:spPr>
         <p:txBody>
-          <a:bodyPr wrap="square" anchor="ctr" lIns="45720" rIns="45720" tIns="27432" bIns="27432">
+          <a:bodyPr wrap="square" lIns="45720" tIns="27432" rIns="45720" bIns="27432" anchor="ctr">
             <a:spAutoFit/>
           </a:bodyPr>
           <a:lstStyle/>
@@ -12932,7 +13724,7 @@
           <a:noFill/>
         </p:spPr>
         <p:txBody>
-          <a:bodyPr wrap="square" anchor="t" lIns="45720" rIns="45720" tIns="27432" bIns="27432">
+          <a:bodyPr wrap="square" lIns="45720" tIns="27432" rIns="45720" bIns="27432" anchor="t">
             <a:spAutoFit/>
           </a:bodyPr>
           <a:lstStyle/>
@@ -12997,6 +13789,7 @@
           <a:lstStyle/>
           <a:p>
             <a:pPr algn="ctr"/>
+            <a:endParaRPr/>
           </a:p>
         </p:txBody>
       </p:sp>
@@ -13017,7 +13810,7 @@
           <a:noFill/>
         </p:spPr>
         <p:txBody>
-          <a:bodyPr wrap="square" anchor="ctr" lIns="45720" rIns="45720" tIns="27432" bIns="27432">
+          <a:bodyPr wrap="square" lIns="45720" tIns="27432" rIns="45720" bIns="27432" anchor="ctr">
             <a:spAutoFit/>
           </a:bodyPr>
           <a:lstStyle/>
@@ -13056,7 +13849,7 @@
           <a:noFill/>
         </p:spPr>
         <p:txBody>
-          <a:bodyPr wrap="square" anchor="t" lIns="45720" rIns="45720" tIns="27432" bIns="27432">
+          <a:bodyPr wrap="square" lIns="45720" tIns="27432" rIns="45720" bIns="27432" anchor="t">
             <a:spAutoFit/>
           </a:bodyPr>
           <a:lstStyle/>
@@ -13121,6 +13914,7 @@
           <a:lstStyle/>
           <a:p>
             <a:pPr algn="ctr"/>
+            <a:endParaRPr/>
           </a:p>
         </p:txBody>
       </p:sp>
@@ -13133,7 +13927,7 @@
           <p:nvPr/>
         </p:nvPicPr>
         <p:blipFill>
-          <a:blip r:embed="rId5"/>
+          <a:blip r:embed="rId4"/>
           <a:stretch>
             <a:fillRect/>
           </a:stretch>
@@ -13165,7 +13959,7 @@
           <a:noFill/>
         </p:spPr>
         <p:txBody>
-          <a:bodyPr wrap="square" anchor="ctr" lIns="45720" rIns="45720" tIns="27432" bIns="27432">
+          <a:bodyPr wrap="square" lIns="45720" tIns="27432" rIns="45720" bIns="27432" anchor="ctr">
             <a:spAutoFit/>
           </a:bodyPr>
           <a:lstStyle/>
@@ -13192,11 +13986,23 @@
   <p:clrMapOvr>
     <a:masterClrMapping/>
   </p:clrMapOvr>
+  <mc:AlternateContent xmlns:mc="http://schemas.openxmlformats.org/markup-compatibility/2006">
+    <mc:Choice xmlns:p14="http://schemas.microsoft.com/office/powerpoint/2010/main" Requires="p14">
+      <p:transition spd="med" p14:dur="600">
+        <p:fade/>
+      </p:transition>
+    </mc:Choice>
+    <mc:Fallback>
+      <p:transition spd="med">
+        <p:fade/>
+      </p:transition>
+    </mc:Fallback>
+  </mc:AlternateContent>
 </p:sld>
 </file>
 
 <file path=ppt/slides/slide8.xml><?xml version="1.0" encoding="utf-8"?>
-<p:sld xmlns:a="http://schemas.openxmlformats.org/drawingml/2006/main" xmlns:p="http://schemas.openxmlformats.org/presentationml/2006/main" xmlns:r="http://schemas.openxmlformats.org/officeDocument/2006/relationships">
+<p:sld xmlns:a="http://schemas.openxmlformats.org/drawingml/2006/main" xmlns:r="http://schemas.openxmlformats.org/officeDocument/2006/relationships" xmlns:p="http://schemas.openxmlformats.org/presentationml/2006/main">
   <p:cSld>
     <p:spTree>
       <p:nvGrpSpPr>
@@ -13204,7 +14010,14 @@
         <p:cNvGrpSpPr/>
         <p:nvPr/>
       </p:nvGrpSpPr>
-      <p:grpSpPr/>
+      <p:grpSpPr>
+        <a:xfrm>
+          <a:off x="0" y="0"/>
+          <a:ext cx="0" cy="0"/>
+          <a:chOff x="0" y="0"/>
+          <a:chExt cx="0" cy="0"/>
+        </a:xfrm>
+      </p:grpSpPr>
       <p:sp>
         <p:nvSpPr>
           <p:cNvPr id="2" name="Title 1"/>
@@ -13350,7 +14163,7 @@
           <a:p>
             <a:fld id="{7F469C41-6B9F-4AAA-9F31-D78B57F455E2}" type="slidenum">
               <a:rPr lang="en-GB" smtClean="0"/>
-              <a:t>2</a:t>
+              <a:t>8</a:t>
             </a:fld>
             <a:endParaRPr lang="en-GB"/>
           </a:p>
@@ -13399,6 +14212,7 @@
           <a:lstStyle/>
           <a:p>
             <a:pPr algn="ctr"/>
+            <a:endParaRPr/>
           </a:p>
         </p:txBody>
       </p:sp>
@@ -13419,7 +14233,7 @@
           <a:noFill/>
         </p:spPr>
         <p:txBody>
-          <a:bodyPr wrap="square" anchor="ctr" lIns="45720" rIns="45720" tIns="27432" bIns="27432">
+          <a:bodyPr wrap="square" lIns="45720" tIns="27432" rIns="45720" bIns="27432" anchor="ctr">
             <a:spAutoFit/>
           </a:bodyPr>
           <a:lstStyle/>
@@ -13484,6 +14298,7 @@
           <a:lstStyle/>
           <a:p>
             <a:pPr algn="ctr"/>
+            <a:endParaRPr/>
           </a:p>
         </p:txBody>
       </p:sp>
@@ -13530,6 +14345,7 @@
           <a:lstStyle/>
           <a:p>
             <a:pPr algn="ctr"/>
+            <a:endParaRPr/>
           </a:p>
         </p:txBody>
       </p:sp>
@@ -13576,6 +14392,7 @@
           <a:lstStyle/>
           <a:p>
             <a:pPr algn="ctr"/>
+            <a:endParaRPr/>
           </a:p>
         </p:txBody>
       </p:sp>
@@ -13622,6 +14439,7 @@
           <a:lstStyle/>
           <a:p>
             <a:pPr algn="ctr"/>
+            <a:endParaRPr/>
           </a:p>
         </p:txBody>
       </p:sp>
@@ -13639,7 +14457,7 @@
         </p:xfrm>
         <a:graphic>
           <a:graphicData uri="http://schemas.openxmlformats.org/drawingml/2006/chart">
-            <c:chart xmlns:c="http://schemas.openxmlformats.org/drawingml/2006/chart" r:id="rId4"/>
+            <c:chart xmlns:c="http://schemas.openxmlformats.org/drawingml/2006/chart" xmlns:r="http://schemas.openxmlformats.org/officeDocument/2006/relationships" r:id="rId3"/>
           </a:graphicData>
         </a:graphic>
       </p:graphicFrame>
@@ -13686,6 +14504,7 @@
           <a:lstStyle/>
           <a:p>
             <a:pPr algn="ctr"/>
+            <a:endParaRPr/>
           </a:p>
         </p:txBody>
       </p:sp>
@@ -13706,7 +14525,7 @@
           <a:noFill/>
         </p:spPr>
         <p:txBody>
-          <a:bodyPr wrap="square" anchor="ctr" lIns="45720" rIns="45720" tIns="27432" bIns="27432">
+          <a:bodyPr wrap="square" lIns="45720" tIns="27432" rIns="45720" bIns="27432" anchor="ctr">
             <a:spAutoFit/>
           </a:bodyPr>
           <a:lstStyle/>
@@ -13745,7 +14564,7 @@
           <a:noFill/>
         </p:spPr>
         <p:txBody>
-          <a:bodyPr wrap="square" anchor="t" lIns="45720" rIns="45720" tIns="27432" bIns="27432">
+          <a:bodyPr wrap="square" lIns="45720" tIns="27432" rIns="45720" bIns="27432" anchor="t">
             <a:spAutoFit/>
           </a:bodyPr>
           <a:lstStyle/>
@@ -13810,6 +14629,7 @@
           <a:lstStyle/>
           <a:p>
             <a:pPr algn="ctr"/>
+            <a:endParaRPr/>
           </a:p>
         </p:txBody>
       </p:sp>
@@ -13830,7 +14650,7 @@
           <a:noFill/>
         </p:spPr>
         <p:txBody>
-          <a:bodyPr wrap="square" anchor="ctr" lIns="45720" rIns="45720" tIns="27432" bIns="27432">
+          <a:bodyPr wrap="square" lIns="45720" tIns="27432" rIns="45720" bIns="27432" anchor="ctr">
             <a:spAutoFit/>
           </a:bodyPr>
           <a:lstStyle/>
@@ -13869,7 +14689,7 @@
           <a:noFill/>
         </p:spPr>
         <p:txBody>
-          <a:bodyPr wrap="square" anchor="t" lIns="45720" rIns="45720" tIns="27432" bIns="27432">
+          <a:bodyPr wrap="square" lIns="45720" tIns="27432" rIns="45720" bIns="27432" anchor="t">
             <a:spAutoFit/>
           </a:bodyPr>
           <a:lstStyle/>
@@ -13934,6 +14754,7 @@
           <a:lstStyle/>
           <a:p>
             <a:pPr algn="ctr"/>
+            <a:endParaRPr/>
           </a:p>
         </p:txBody>
       </p:sp>
@@ -13946,7 +14767,7 @@
           <p:nvPr/>
         </p:nvPicPr>
         <p:blipFill>
-          <a:blip r:embed="rId5"/>
+          <a:blip r:embed="rId4"/>
           <a:stretch>
             <a:fillRect/>
           </a:stretch>
@@ -13978,7 +14799,7 @@
           <a:noFill/>
         </p:spPr>
         <p:txBody>
-          <a:bodyPr wrap="square" anchor="ctr" lIns="45720" rIns="45720" tIns="27432" bIns="27432">
+          <a:bodyPr wrap="square" lIns="45720" tIns="27432" rIns="45720" bIns="27432" anchor="ctr">
             <a:spAutoFit/>
           </a:bodyPr>
           <a:lstStyle/>
@@ -14005,11 +14826,23 @@
   <p:clrMapOvr>
     <a:masterClrMapping/>
   </p:clrMapOvr>
+  <mc:AlternateContent xmlns:mc="http://schemas.openxmlformats.org/markup-compatibility/2006">
+    <mc:Choice xmlns:p14="http://schemas.microsoft.com/office/powerpoint/2010/main" Requires="p14">
+      <p:transition spd="med" p14:dur="600">
+        <p:fade/>
+      </p:transition>
+    </mc:Choice>
+    <mc:Fallback>
+      <p:transition spd="med">
+        <p:fade/>
+      </p:transition>
+    </mc:Fallback>
+  </mc:AlternateContent>
 </p:sld>
 </file>
 
 <file path=ppt/slides/slide9.xml><?xml version="1.0" encoding="utf-8"?>
-<p:sld xmlns:a="http://schemas.openxmlformats.org/drawingml/2006/main" xmlns:p="http://schemas.openxmlformats.org/presentationml/2006/main" xmlns:r="http://schemas.openxmlformats.org/officeDocument/2006/relationships">
+<p:sld xmlns:a="http://schemas.openxmlformats.org/drawingml/2006/main" xmlns:r="http://schemas.openxmlformats.org/officeDocument/2006/relationships" xmlns:p="http://schemas.openxmlformats.org/presentationml/2006/main">
   <p:cSld>
     <p:spTree>
       <p:nvGrpSpPr>
@@ -14017,7 +14850,14 @@
         <p:cNvGrpSpPr/>
         <p:nvPr/>
       </p:nvGrpSpPr>
-      <p:grpSpPr/>
+      <p:grpSpPr>
+        <a:xfrm>
+          <a:off x="0" y="0"/>
+          <a:ext cx="0" cy="0"/>
+          <a:chOff x="0" y="0"/>
+          <a:chExt cx="0" cy="0"/>
+        </a:xfrm>
+      </p:grpSpPr>
       <p:sp>
         <p:nvSpPr>
           <p:cNvPr id="2" name="Title 1"/>
@@ -14163,7 +15003,7 @@
           <a:p>
             <a:fld id="{7F469C41-6B9F-4AAA-9F31-D78B57F455E2}" type="slidenum">
               <a:rPr lang="en-GB" smtClean="0"/>
-              <a:t>2</a:t>
+              <a:t>9</a:t>
             </a:fld>
             <a:endParaRPr lang="en-GB"/>
           </a:p>
@@ -14212,6 +15052,7 @@
           <a:lstStyle/>
           <a:p>
             <a:pPr algn="ctr"/>
+            <a:endParaRPr/>
           </a:p>
         </p:txBody>
       </p:sp>
@@ -14232,7 +15073,7 @@
           <a:noFill/>
         </p:spPr>
         <p:txBody>
-          <a:bodyPr wrap="square" anchor="ctr" lIns="45720" rIns="45720" tIns="27432" bIns="27432">
+          <a:bodyPr wrap="square" lIns="45720" tIns="27432" rIns="45720" bIns="27432" anchor="ctr">
             <a:spAutoFit/>
           </a:bodyPr>
           <a:lstStyle/>
@@ -14297,6 +15138,7 @@
           <a:lstStyle/>
           <a:p>
             <a:pPr algn="ctr"/>
+            <a:endParaRPr/>
           </a:p>
         </p:txBody>
       </p:sp>
@@ -14343,6 +15185,7 @@
           <a:lstStyle/>
           <a:p>
             <a:pPr algn="ctr"/>
+            <a:endParaRPr/>
           </a:p>
         </p:txBody>
       </p:sp>
@@ -14389,6 +15232,7 @@
           <a:lstStyle/>
           <a:p>
             <a:pPr algn="ctr"/>
+            <a:endParaRPr/>
           </a:p>
         </p:txBody>
       </p:sp>
@@ -14435,6 +15279,7 @@
           <a:lstStyle/>
           <a:p>
             <a:pPr algn="ctr"/>
+            <a:endParaRPr/>
           </a:p>
         </p:txBody>
       </p:sp>
@@ -14452,7 +15297,7 @@
         </p:xfrm>
         <a:graphic>
           <a:graphicData uri="http://schemas.openxmlformats.org/drawingml/2006/chart">
-            <c:chart xmlns:c="http://schemas.openxmlformats.org/drawingml/2006/chart" r:id="rId4"/>
+            <c:chart xmlns:c="http://schemas.openxmlformats.org/drawingml/2006/chart" xmlns:r="http://schemas.openxmlformats.org/officeDocument/2006/relationships" r:id="rId3"/>
           </a:graphicData>
         </a:graphic>
       </p:graphicFrame>
@@ -14499,6 +15344,7 @@
           <a:lstStyle/>
           <a:p>
             <a:pPr algn="ctr"/>
+            <a:endParaRPr/>
           </a:p>
         </p:txBody>
       </p:sp>
@@ -14519,7 +15365,7 @@
           <a:noFill/>
         </p:spPr>
         <p:txBody>
-          <a:bodyPr wrap="square" anchor="ctr" lIns="45720" rIns="45720" tIns="27432" bIns="27432">
+          <a:bodyPr wrap="square" lIns="45720" tIns="27432" rIns="45720" bIns="27432" anchor="ctr">
             <a:spAutoFit/>
           </a:bodyPr>
           <a:lstStyle/>
@@ -14558,7 +15404,7 @@
           <a:noFill/>
         </p:spPr>
         <p:txBody>
-          <a:bodyPr wrap="square" anchor="t" lIns="45720" rIns="45720" tIns="27432" bIns="27432">
+          <a:bodyPr wrap="square" lIns="45720" tIns="27432" rIns="45720" bIns="27432" anchor="t">
             <a:spAutoFit/>
           </a:bodyPr>
           <a:lstStyle/>
@@ -14623,6 +15469,7 @@
           <a:lstStyle/>
           <a:p>
             <a:pPr algn="ctr"/>
+            <a:endParaRPr/>
           </a:p>
         </p:txBody>
       </p:sp>
@@ -14643,7 +15490,7 @@
           <a:noFill/>
         </p:spPr>
         <p:txBody>
-          <a:bodyPr wrap="square" anchor="ctr" lIns="45720" rIns="45720" tIns="27432" bIns="27432">
+          <a:bodyPr wrap="square" lIns="45720" tIns="27432" rIns="45720" bIns="27432" anchor="ctr">
             <a:spAutoFit/>
           </a:bodyPr>
           <a:lstStyle/>
@@ -14682,7 +15529,7 @@
           <a:noFill/>
         </p:spPr>
         <p:txBody>
-          <a:bodyPr wrap="square" anchor="t" lIns="45720" rIns="45720" tIns="27432" bIns="27432">
+          <a:bodyPr wrap="square" lIns="45720" tIns="27432" rIns="45720" bIns="27432" anchor="t">
             <a:spAutoFit/>
           </a:bodyPr>
           <a:lstStyle/>
@@ -14747,6 +15594,7 @@
           <a:lstStyle/>
           <a:p>
             <a:pPr algn="ctr"/>
+            <a:endParaRPr/>
           </a:p>
         </p:txBody>
       </p:sp>
@@ -14759,7 +15607,7 @@
           <p:nvPr/>
         </p:nvPicPr>
         <p:blipFill>
-          <a:blip r:embed="rId5"/>
+          <a:blip r:embed="rId4"/>
           <a:stretch>
             <a:fillRect/>
           </a:stretch>
@@ -14791,7 +15639,7 @@
           <a:noFill/>
         </p:spPr>
         <p:txBody>
-          <a:bodyPr wrap="square" anchor="ctr" lIns="45720" rIns="45720" tIns="27432" bIns="27432">
+          <a:bodyPr wrap="square" lIns="45720" tIns="27432" rIns="45720" bIns="27432" anchor="ctr">
             <a:spAutoFit/>
           </a:bodyPr>
           <a:lstStyle/>
@@ -14818,6 +15666,18 @@
   <p:clrMapOvr>
     <a:masterClrMapping/>
   </p:clrMapOvr>
+  <mc:AlternateContent xmlns:mc="http://schemas.openxmlformats.org/markup-compatibility/2006">
+    <mc:Choice xmlns:p14="http://schemas.microsoft.com/office/powerpoint/2010/main" Requires="p14">
+      <p:transition spd="med" p14:dur="600">
+        <p:fade/>
+      </p:transition>
+    </mc:Choice>
+    <mc:Fallback>
+      <p:transition spd="med">
+        <p:fade/>
+      </p:transition>
+    </mc:Fallback>
+  </mc:AlternateContent>
 </p:sld>
 </file>
 

--- a/presentation/Systematic Evaluation of Signal-to-Image Transformation Pipelines for Vision Transformer-based Sleep Stage Classification - Presentation.pptx
+++ b/presentation/Systematic Evaluation of Signal-to-Image Transformation Pipelines for Vision Transformer-based Sleep Stage Classification - Presentation.pptx
@@ -6013,7 +6013,7 @@
   </p:clrMapOvr>
   <mc:AlternateContent xmlns:mc="http://schemas.openxmlformats.org/markup-compatibility/2006">
     <mc:Choice xmlns:p14="http://schemas.microsoft.com/office/powerpoint/2010/main" Requires="p14">
-      <p:transition spd="med" p14:dur="600">
+      <p:transition spd="med" p14:dur="700">
         <p:fade/>
       </p:transition>
     </mc:Choice>
@@ -6852,13 +6852,13 @@
     <a:masterClrMapping/>
   </p:clrMapOvr>
   <mc:AlternateContent xmlns:mc="http://schemas.openxmlformats.org/markup-compatibility/2006">
-    <mc:Choice xmlns:p14="http://schemas.microsoft.com/office/powerpoint/2010/main" Requires="p14">
-      <p:transition spd="med" p14:dur="600">
-        <p:fade/>
+    <mc:Choice xmlns:p159="http://schemas.microsoft.com/office/powerpoint/2015/09/main" xmlns:p14="http://schemas.microsoft.com/office/powerpoint/2010/main" Requires="p159">
+      <p:transition spd="slow" p14:dur="1200">
+        <p159:morph option="byObject"/>
       </p:transition>
     </mc:Choice>
     <mc:Fallback>
-      <p:transition spd="med">
+      <p:transition spd="slow">
         <p:fade/>
       </p:transition>
     </mc:Fallback>
@@ -7275,13 +7275,13 @@
   </p:clrMapOvr>
   <mc:AlternateContent xmlns:mc="http://schemas.openxmlformats.org/markup-compatibility/2006">
     <mc:Choice xmlns:p14="http://schemas.microsoft.com/office/powerpoint/2010/main" Requires="p14">
-      <p:transition spd="med" p14:dur="600">
-        <p:fade/>
+      <p:transition spd="med" p14:dur="700">
+        <p:push dir="l"/>
       </p:transition>
     </mc:Choice>
     <mc:Fallback>
       <p:transition spd="med">
-        <p:fade/>
+        <p:push dir="l"/>
       </p:transition>
     </mc:Fallback>
   </mc:AlternateContent>
@@ -8426,13 +8426,13 @@
     <a:masterClrMapping/>
   </p:clrMapOvr>
   <mc:AlternateContent xmlns:mc="http://schemas.openxmlformats.org/markup-compatibility/2006">
-    <mc:Choice xmlns:p14="http://schemas.microsoft.com/office/powerpoint/2010/main" Requires="p14">
-      <p:transition spd="med" p14:dur="600">
-        <p:fade/>
+    <mc:Choice xmlns:p159="http://schemas.microsoft.com/office/powerpoint/2015/09/main" xmlns:p14="http://schemas.microsoft.com/office/powerpoint/2010/main" Requires="p159">
+      <p:transition spd="slow" p14:dur="1200">
+        <p159:morph option="byObject"/>
       </p:transition>
     </mc:Choice>
     <mc:Fallback>
-      <p:transition spd="med">
+      <p:transition spd="slow">
         <p:fade/>
       </p:transition>
     </mc:Fallback>
@@ -8788,7 +8788,7 @@
   </p:clrMapOvr>
   <mc:AlternateContent xmlns:mc="http://schemas.openxmlformats.org/markup-compatibility/2006">
     <mc:Choice xmlns:p14="http://schemas.microsoft.com/office/powerpoint/2010/main" Requires="p14">
-      <p:transition spd="med" p14:dur="600">
+      <p:transition spd="med" p14:dur="700">
         <p:fade/>
       </p:transition>
     </mc:Choice>
@@ -9831,13 +9831,13 @@
     <a:masterClrMapping/>
   </p:clrMapOvr>
   <mc:AlternateContent xmlns:mc="http://schemas.openxmlformats.org/markup-compatibility/2006">
-    <mc:Choice xmlns:p14="http://schemas.microsoft.com/office/powerpoint/2010/main" Requires="p14">
-      <p:transition spd="med" p14:dur="600">
-        <p:fade/>
+    <mc:Choice xmlns:p159="http://schemas.microsoft.com/office/powerpoint/2015/09/main" xmlns:p14="http://schemas.microsoft.com/office/powerpoint/2010/main" Requires="p159">
+      <p:transition spd="slow" p14:dur="1200">
+        <p159:morph option="byObject"/>
       </p:transition>
     </mc:Choice>
     <mc:Fallback>
-      <p:transition spd="med">
+      <p:transition spd="slow">
         <p:fade/>
       </p:transition>
     </mc:Fallback>
@@ -10737,13 +10737,13 @@
     <a:masterClrMapping/>
   </p:clrMapOvr>
   <mc:AlternateContent xmlns:mc="http://schemas.openxmlformats.org/markup-compatibility/2006">
-    <mc:Choice xmlns:p14="http://schemas.microsoft.com/office/powerpoint/2010/main" Requires="p14">
-      <p:transition spd="med" p14:dur="600">
-        <p:fade/>
+    <mc:Choice xmlns:p159="http://schemas.microsoft.com/office/powerpoint/2015/09/main" xmlns:p14="http://schemas.microsoft.com/office/powerpoint/2010/main" Requires="p159">
+      <p:transition spd="slow" p14:dur="1200">
+        <p159:morph option="byObject"/>
       </p:transition>
     </mc:Choice>
     <mc:Fallback>
-      <p:transition spd="med">
+      <p:transition spd="slow">
         <p:fade/>
       </p:transition>
     </mc:Fallback>
@@ -11539,13 +11539,13 @@
   </p:clrMapOvr>
   <mc:AlternateContent xmlns:mc="http://schemas.openxmlformats.org/markup-compatibility/2006">
     <mc:Choice xmlns:p14="http://schemas.microsoft.com/office/powerpoint/2010/main" Requires="p14">
-      <p:transition spd="med" p14:dur="600">
-        <p:fade/>
+      <p:transition spd="med" p14:dur="700">
+        <p:push dir="l"/>
       </p:transition>
     </mc:Choice>
     <mc:Fallback>
       <p:transition spd="med">
-        <p:fade/>
+        <p:push dir="l"/>
       </p:transition>
     </mc:Fallback>
   </mc:AlternateContent>
@@ -11855,13 +11855,13 @@
   </p:clrMapOvr>
   <mc:AlternateContent xmlns:mc="http://schemas.openxmlformats.org/markup-compatibility/2006">
     <mc:Choice xmlns:p14="http://schemas.microsoft.com/office/powerpoint/2010/main" Requires="p14">
-      <p:transition spd="med" p14:dur="600">
-        <p:fade/>
+      <p:transition spd="med" p14:dur="700">
+        <p:wipe dir="r"/>
       </p:transition>
     </mc:Choice>
     <mc:Fallback>
       <p:transition spd="med">
-        <p:fade/>
+        <p:wipe dir="r"/>
       </p:transition>
     </mc:Fallback>
   </mc:AlternateContent>
@@ -13148,13 +13148,13 @@
   </p:clrMapOvr>
   <mc:AlternateContent xmlns:mc="http://schemas.openxmlformats.org/markup-compatibility/2006">
     <mc:Choice xmlns:p14="http://schemas.microsoft.com/office/powerpoint/2010/main" Requires="p14">
-      <p:transition spd="med" p14:dur="600">
-        <p:fade/>
+      <p:transition spd="med" p14:dur="700">
+        <p:push dir="l"/>
       </p:transition>
     </mc:Choice>
     <mc:Fallback>
       <p:transition spd="med">
-        <p:fade/>
+        <p:push dir="l"/>
       </p:transition>
     </mc:Fallback>
   </mc:AlternateContent>
@@ -13988,13 +13988,13 @@
   </p:clrMapOvr>
   <mc:AlternateContent xmlns:mc="http://schemas.openxmlformats.org/markup-compatibility/2006">
     <mc:Choice xmlns:p14="http://schemas.microsoft.com/office/powerpoint/2010/main" Requires="p14">
-      <p:transition spd="med" p14:dur="600">
-        <p:fade/>
+      <p:transition spd="med" p14:dur="700">
+        <p:push dir="l"/>
       </p:transition>
     </mc:Choice>
     <mc:Fallback>
       <p:transition spd="med">
-        <p:fade/>
+        <p:push dir="l"/>
       </p:transition>
     </mc:Fallback>
   </mc:AlternateContent>
@@ -14827,13 +14827,13 @@
     <a:masterClrMapping/>
   </p:clrMapOvr>
   <mc:AlternateContent xmlns:mc="http://schemas.openxmlformats.org/markup-compatibility/2006">
-    <mc:Choice xmlns:p14="http://schemas.microsoft.com/office/powerpoint/2010/main" Requires="p14">
-      <p:transition spd="med" p14:dur="600">
-        <p:fade/>
+    <mc:Choice xmlns:p159="http://schemas.microsoft.com/office/powerpoint/2015/09/main" xmlns:p14="http://schemas.microsoft.com/office/powerpoint/2010/main" Requires="p159">
+      <p:transition spd="slow" p14:dur="1200">
+        <p159:morph option="byObject"/>
       </p:transition>
     </mc:Choice>
     <mc:Fallback>
-      <p:transition spd="med">
+      <p:transition spd="slow">
         <p:fade/>
       </p:transition>
     </mc:Fallback>
@@ -15667,13 +15667,13 @@
     <a:masterClrMapping/>
   </p:clrMapOvr>
   <mc:AlternateContent xmlns:mc="http://schemas.openxmlformats.org/markup-compatibility/2006">
-    <mc:Choice xmlns:p14="http://schemas.microsoft.com/office/powerpoint/2010/main" Requires="p14">
-      <p:transition spd="med" p14:dur="600">
-        <p:fade/>
+    <mc:Choice xmlns:p159="http://schemas.microsoft.com/office/powerpoint/2015/09/main" xmlns:p14="http://schemas.microsoft.com/office/powerpoint/2010/main" Requires="p159">
+      <p:transition spd="slow" p14:dur="1200">
+        <p159:morph option="byObject"/>
       </p:transition>
     </mc:Choice>
     <mc:Fallback>
-      <p:transition spd="med">
+      <p:transition spd="slow">
         <p:fade/>
       </p:transition>
     </mc:Fallback>

--- a/presentation/Systematic Evaluation of Signal-to-Image Transformation Pipelines for Vision Transformer-based Sleep Stage Classification - Presentation.pptx
+++ b/presentation/Systematic Evaluation of Signal-to-Image Transformation Pipelines for Vision Transformer-based Sleep Stage Classification - Presentation.pptx
@@ -5689,7 +5689,7 @@
         </p:nvSpPr>
         <p:spPr>
           <a:xfrm>
-            <a:off x="1280160" y="1828800"/>
+            <a:off x="1280160" y="2850000"/>
             <a:ext cx="9966960" cy="1828800"/>
           </a:xfrm>
         </p:spPr>
@@ -5775,7 +5775,7 @@
         </p:nvSpPr>
         <p:spPr>
           <a:xfrm>
-            <a:off x="1280160" y="4023360"/>
+            <a:off x="1280160" y="4800000"/>
             <a:ext cx="9966960" cy="1463040"/>
           </a:xfrm>
           <a:prstGeom prst="rect">
@@ -5995,6 +5995,30 @@
           <a:xfrm>
             <a:off x="9045683" y="170912"/>
             <a:ext cx="1393723" cy="711201"/>
+          </a:xfrm>
+          <a:prstGeom prst="rect">
+            <a:avLst/>
+          </a:prstGeom>
+        </p:spPr>
+      </p:pic>
+      <p:pic>
+        <p:nvPicPr>
+          <p:cNvPr id="23" name="University of Colombo logo" descr="Universityof-colombo.png"/>
+          <p:cNvPicPr>
+            <a:picLocks noChangeAspect="1"/>
+          </p:cNvPicPr>
+          <p:nvPr/>
+        </p:nvPicPr>
+        <p:blipFill>
+          <a:blip r:embed="rId5"/>
+          <a:stretch>
+            <a:fillRect/>
+          </a:stretch>
+        </p:blipFill>
+        <p:spPr>
+          <a:xfrm>
+            <a:off x="5718433" y="1450000"/>
+            <a:ext cx="1090415" cy="1250000"/>
           </a:xfrm>
           <a:prstGeom prst="rect">
             <a:avLst/>

--- a/presentation/Systematic Evaluation of Signal-to-Image Transformation Pipelines for Vision Transformer-based Sleep Stage Classification - Presentation.pptx
+++ b/presentation/Systematic Evaluation of Signal-to-Image Transformation Pipelines for Vision Transformer-based Sleep Stage Classification - Presentation.pptx
@@ -17,8 +17,11 @@
     <p:sldId id="262" r:id="rId5"/>
     <p:sldId id="263" r:id="rId6"/>
     <p:sldId id="264" r:id="rId7"/>
+    <p:sldId id="272" r:id="rId21"/>
     <p:sldId id="265" r:id="rId8"/>
+    <p:sldId id="273" r:id="rId22"/>
     <p:sldId id="266" r:id="rId9"/>
+    <p:sldId id="274" r:id="rId23"/>
     <p:sldId id="267" r:id="rId10"/>
     <p:sldId id="268" r:id="rId11"/>
     <p:sldId id="269" r:id="rId12"/>
@@ -8819,6 +8822,1696 @@
     <mc:Fallback>
       <p:transition spd="med">
         <p:fade/>
+      </p:transition>
+    </mc:Fallback>
+  </mc:AlternateContent>
+</p:sld>
+</file>
+
+<file path=ppt/slides/slide14.xml><?xml version="1.0" encoding="utf-8"?>
+<p:sld xmlns:a="http://schemas.openxmlformats.org/drawingml/2006/main" xmlns:p="http://schemas.openxmlformats.org/presentationml/2006/main" xmlns:r="http://schemas.openxmlformats.org/officeDocument/2006/relationships">
+  <p:cSld>
+    <p:spTree>
+      <p:nvGrpSpPr>
+        <p:cNvPr id="1" name=""/>
+        <p:cNvGrpSpPr/>
+        <p:nvPr/>
+      </p:nvGrpSpPr>
+      <p:grpSpPr/>
+      <p:sp>
+        <p:nvSpPr>
+          <p:cNvPr id="2" name="Title 1"/>
+          <p:cNvSpPr>
+            <a:spLocks noGrp="1"/>
+          </p:cNvSpPr>
+          <p:nvPr>
+            <p:ph type="title"/>
+          </p:nvPr>
+        </p:nvSpPr>
+        <p:spPr>
+          <a:xfrm>
+            <a:off x="841248" y="548640"/>
+            <a:ext cx="10515600" cy="868680"/>
+          </a:xfrm>
+        </p:spPr>
+        <p:txBody>
+          <a:bodyPr anchor="ctr"/>
+          <a:lstStyle/>
+          <a:p>
+            <a:r>
+              <a:rPr sz="4000" b="1" i="0">
+                <a:solidFill>
+                  <a:srgbClr val="222222"/>
+                </a:solidFill>
+                <a:latin typeface="Arial"/>
+              </a:rPr>
+              <a:t>Same epoch, four images</a:t>
+            </a:r>
+          </a:p>
+        </p:txBody>
+      </p:sp>
+      <p:grpSp>
+        <p:nvGrpSpPr>
+          <p:cNvPr id="5" name="Group 4">
+            <a:extLst>
+              <a:ext uri="{FF2B5EF4-FFF2-40B4-BE49-F238E27FC236}">
+                <a16:creationId xmlns:a16="http://schemas.microsoft.com/office/drawing/2014/main" id="{DD61A49B-2A57-9774-88AA-46117D53DEE4}"/>
+              </a:ext>
+            </a:extLst>
+          </p:cNvPr>
+          <p:cNvGrpSpPr/>
+          <p:nvPr/>
+        </p:nvGrpSpPr>
+        <p:grpSpPr>
+          <a:xfrm>
+            <a:off x="285674" y="30506"/>
+            <a:ext cx="11701900" cy="480834"/>
+            <a:chOff x="285674" y="30506"/>
+            <a:chExt cx="11701900" cy="480834"/>
+          </a:xfrm>
+        </p:grpSpPr>
+        <p:sp>
+          <p:nvSpPr>
+            <p:cNvPr id="6" name="TextBox 5">
+              <a:extLst>
+                <a:ext uri="{FF2B5EF4-FFF2-40B4-BE49-F238E27FC236}">
+                  <a16:creationId xmlns:a16="http://schemas.microsoft.com/office/drawing/2014/main" id="{7C9A7A8A-4F4A-E934-FAAA-1305669F46EC}"/>
+                </a:ext>
+              </a:extLst>
+            </p:cNvPr>
+            <p:cNvSpPr txBox="1"/>
+            <p:nvPr/>
+          </p:nvSpPr>
+          <p:spPr>
+            <a:xfrm>
+              <a:off x="285674" y="145223"/>
+              <a:ext cx="6982825" cy="338554"/>
+            </a:xfrm>
+            <a:prstGeom prst="rect">
+              <a:avLst/>
+            </a:prstGeom>
+            <a:noFill/>
+          </p:spPr>
+          <p:txBody>
+            <a:bodyPr wrap="square">
+              <a:spAutoFit/>
+            </a:bodyPr>
+            <a:lstStyle/>
+            <a:p>
+              <a:r>
+                <a:rPr lang="en-US" sz="1600" dirty="0">
+                  <a:latin typeface="Arial" panose="020B0604020202020204" pitchFamily="34" charset="0"/>
+                  <a:cs typeface="Arial" panose="020B0604020202020204" pitchFamily="34" charset="0"/>
+                </a:rPr>
+                <a:t>BioMed Frontiers 2026 | International Conference on Biomedical Innovation</a:t>
+              </a:r>
+              <a:endParaRPr lang="en-US" sz="1600" dirty="0"/>
+            </a:p>
+          </p:txBody>
+        </p:sp>
+        <p:pic>
+          <p:nvPicPr>
+            <p:cNvPr id="7" name="Picture 6">
+              <a:extLst>
+                <a:ext uri="{FF2B5EF4-FFF2-40B4-BE49-F238E27FC236}">
+                  <a16:creationId xmlns:a16="http://schemas.microsoft.com/office/drawing/2014/main" id="{330C2F2A-83C9-29D7-D322-09CA5A630AB6}"/>
+                </a:ext>
+              </a:extLst>
+            </p:cNvPr>
+            <p:cNvPicPr>
+              <a:picLocks noChangeAspect="1"/>
+            </p:cNvPicPr>
+            <p:nvPr/>
+          </p:nvPicPr>
+          <p:blipFill>
+            <a:blip r:embed="rId2"/>
+            <a:stretch>
+              <a:fillRect/>
+            </a:stretch>
+          </p:blipFill>
+          <p:spPr>
+            <a:xfrm>
+              <a:off x="10593851" y="30506"/>
+              <a:ext cx="1393723" cy="480834"/>
+            </a:xfrm>
+            <a:prstGeom prst="rect">
+              <a:avLst/>
+            </a:prstGeom>
+          </p:spPr>
+        </p:pic>
+      </p:grpSp>
+      <p:sp>
+        <p:nvSpPr>
+          <p:cNvPr id="4" name="Slide Number Placeholder 3">
+            <a:extLst>
+              <a:ext uri="{FF2B5EF4-FFF2-40B4-BE49-F238E27FC236}">
+                <a16:creationId xmlns:a16="http://schemas.microsoft.com/office/drawing/2014/main" id="{4A408C85-B377-2DB1-EF8F-00D922D8FA43}"/>
+              </a:ext>
+            </a:extLst>
+          </p:cNvPr>
+          <p:cNvSpPr>
+            <a:spLocks noGrp="1"/>
+          </p:cNvSpPr>
+          <p:nvPr>
+            <p:ph type="sldNum" sz="quarter" idx="12"/>
+          </p:nvPr>
+        </p:nvSpPr>
+        <p:spPr/>
+        <p:txBody>
+          <a:bodyPr/>
+          <a:lstStyle/>
+          <a:p>
+            <a:fld id="{7F469C41-6B9F-4AAA-9F31-D78B57F455E2}" type="slidenum">
+              <a:rPr lang="en-GB" smtClean="0"/>
+              <a:t>6</a:t>
+            </a:fld>
+            <a:endParaRPr lang="en-GB"/>
+          </a:p>
+        </p:txBody>
+      </p:sp>
+      <p:sp>
+        <p:nvSpPr>
+          <p:cNvPr id="14" name="Method card"/>
+          <p:cNvSpPr/>
+          <p:nvPr/>
+        </p:nvSpPr>
+        <p:spPr>
+          <a:xfrm>
+            <a:off x="841248" y="1554480"/>
+            <a:ext cx="10515600" cy="3900000"/>
+          </a:xfrm>
+          <a:prstGeom prst="roundRect">
+            <a:avLst>
+              <a:gd name="adj" fmla="val 6000"/>
+            </a:avLst>
+          </a:prstGeom>
+          <a:solidFill>
+            <a:srgbClr val="F1E9F7"/>
+          </a:solidFill>
+          <a:ln>
+            <a:noFill/>
+          </a:ln>
+          <a:effectLst/>
+        </p:spPr>
+        <p:style>
+          <a:lnRef idx="1">
+            <a:schemeClr val="accent1"/>
+          </a:lnRef>
+          <a:fillRef idx="3">
+            <a:schemeClr val="accent1"/>
+          </a:fillRef>
+          <a:effectRef idx="2">
+            <a:schemeClr val="accent1"/>
+          </a:effectRef>
+          <a:fontRef idx="minor">
+            <a:schemeClr val="lt1"/>
+          </a:fontRef>
+        </p:style>
+        <p:txBody>
+          <a:bodyPr rtlCol="0" anchor="ctr"/>
+          <a:lstStyle/>
+          <a:p>
+            <a:pPr algn="ctr"/>
+            <a:endParaRPr/>
+          </a:p>
+        </p:txBody>
+      </p:sp>
+      <p:sp>
+        <p:nvSpPr>
+          <p:cNvPr id="13" name="TextBox 12"/>
+          <p:cNvSpPr txBox="1"/>
+          <p:nvPr/>
+        </p:nvSpPr>
+        <p:spPr>
+          <a:xfrm>
+            <a:off x="941248" y="1640000"/>
+            <a:ext cx="10315600" cy="380000"/>
+          </a:xfrm>
+          <a:prstGeom prst="rect">
+            <a:avLst/>
+          </a:prstGeom>
+          <a:noFill/>
+        </p:spPr>
+        <p:txBody>
+          <a:bodyPr wrap="none" lIns="45720" tIns="27432" rIns="45720" bIns="27432" anchor="t">
+            <a:spAutoFit/>
+          </a:bodyPr>
+          <a:lstStyle/>
+          <a:p>
+            <a:pPr algn="ctr">
+              <a:spcAft>
+                <a:spcPts val="600"/>
+              </a:spcAft>
+            </a:pPr>
+            <a:r>
+              <a:rPr sz="1400" b="0" i="0">
+                <a:solidFill>
+                  <a:srgbClr val="222222"/>
+                </a:solidFill>
+                <a:latin typeface="Arial"/>
+              </a:rPr>
+              <a:t>One subject, one 30 s epoch, original 512 Hz: 16 channels tiled into a 4×4 composite</a:t>
+            </a:r>
+          </a:p>
+        </p:txBody>
+      </p:sp>
+      <p:pic>
+        <p:nvPicPr>
+          <p:cNvPr id="15" name="Picture 14" descr="ts2img.png"/>
+          <p:cNvPicPr>
+            <a:picLocks noChangeAspect="1"/>
+          </p:cNvPicPr>
+          <p:nvPr/>
+        </p:nvPicPr>
+        <p:blipFill>
+          <a:blip r:embed="rId3"/>
+          <a:stretch>
+            <a:fillRect/>
+          </a:stretch>
+        </p:blipFill>
+        <p:spPr>
+          <a:xfrm>
+            <a:off x="1041248" y="2080000"/>
+            <a:ext cx="10115600" cy="2747972"/>
+          </a:xfrm>
+          <a:prstGeom prst="rect">
+            <a:avLst/>
+          </a:prstGeom>
+        </p:spPr>
+      </p:pic>
+      <p:sp>
+        <p:nvSpPr>
+          <p:cNvPr id="13" name="TextBox 12"/>
+          <p:cNvSpPr txBox="1"/>
+          <p:nvPr/>
+        </p:nvSpPr>
+        <p:spPr>
+          <a:xfrm>
+            <a:off x="1041248" y="4887972"/>
+            <a:ext cx="2528900" cy="380000"/>
+          </a:xfrm>
+          <a:prstGeom prst="rect">
+            <a:avLst/>
+          </a:prstGeom>
+          <a:noFill/>
+        </p:spPr>
+        <p:txBody>
+          <a:bodyPr wrap="none" lIns="45720" tIns="27432" rIns="45720" bIns="27432" anchor="t">
+            <a:spAutoFit/>
+          </a:bodyPr>
+          <a:lstStyle/>
+          <a:p>
+            <a:pPr algn="ctr">
+              <a:spcAft>
+                <a:spcPts val="600"/>
+              </a:spcAft>
+            </a:pPr>
+            <a:r>
+              <a:rPr sz="1400" b="1" i="0">
+                <a:solidFill>
+                  <a:srgbClr val="222222"/>
+                </a:solidFill>
+                <a:latin typeface="Arial"/>
+              </a:rPr>
+              <a:t>Angle difference</a:t>
+            </a:r>
+          </a:p>
+        </p:txBody>
+      </p:sp>
+      <p:sp>
+        <p:nvSpPr>
+          <p:cNvPr id="13" name="TextBox 12"/>
+          <p:cNvSpPr txBox="1"/>
+          <p:nvPr/>
+        </p:nvSpPr>
+        <p:spPr>
+          <a:xfrm>
+            <a:off x="3570148" y="4887972"/>
+            <a:ext cx="2528900" cy="380000"/>
+          </a:xfrm>
+          <a:prstGeom prst="rect">
+            <a:avLst/>
+          </a:prstGeom>
+          <a:noFill/>
+        </p:spPr>
+        <p:txBody>
+          <a:bodyPr wrap="none" lIns="45720" tIns="27432" rIns="45720" bIns="27432" anchor="t">
+            <a:spAutoFit/>
+          </a:bodyPr>
+          <a:lstStyle/>
+          <a:p>
+            <a:pPr algn="ctr">
+              <a:spcAft>
+                <a:spcPts val="600"/>
+              </a:spcAft>
+            </a:pPr>
+            <a:r>
+              <a:rPr sz="1400" b="1" i="0">
+                <a:solidFill>
+                  <a:srgbClr val="222222"/>
+                </a:solidFill>
+                <a:latin typeface="Arial"/>
+              </a:rPr>
+              <a:t>Angle sum</a:t>
+            </a:r>
+          </a:p>
+        </p:txBody>
+      </p:sp>
+      <p:sp>
+        <p:nvSpPr>
+          <p:cNvPr id="13" name="TextBox 12"/>
+          <p:cNvSpPr txBox="1"/>
+          <p:nvPr/>
+        </p:nvSpPr>
+        <p:spPr>
+          <a:xfrm>
+            <a:off x="6099048" y="4887972"/>
+            <a:ext cx="2528900" cy="380000"/>
+          </a:xfrm>
+          <a:prstGeom prst="rect">
+            <a:avLst/>
+          </a:prstGeom>
+          <a:noFill/>
+        </p:spPr>
+        <p:txBody>
+          <a:bodyPr wrap="none" lIns="45720" tIns="27432" rIns="45720" bIns="27432" anchor="t">
+            <a:spAutoFit/>
+          </a:bodyPr>
+          <a:lstStyle/>
+          <a:p>
+            <a:pPr algn="ctr">
+              <a:spcAft>
+                <a:spcPts val="600"/>
+              </a:spcAft>
+            </a:pPr>
+            <a:r>
+              <a:rPr sz="1400" b="1" i="0">
+                <a:solidFill>
+                  <a:srgbClr val="222222"/>
+                </a:solidFill>
+                <a:latin typeface="Arial"/>
+              </a:rPr>
+              <a:t>Time–frequency (STFT)</a:t>
+            </a:r>
+          </a:p>
+        </p:txBody>
+      </p:sp>
+      <p:sp>
+        <p:nvSpPr>
+          <p:cNvPr id="13" name="TextBox 12"/>
+          <p:cNvSpPr txBox="1"/>
+          <p:nvPr/>
+        </p:nvSpPr>
+        <p:spPr>
+          <a:xfrm>
+            <a:off x="8627948" y="4887972"/>
+            <a:ext cx="2528900" cy="380000"/>
+          </a:xfrm>
+          <a:prstGeom prst="rect">
+            <a:avLst/>
+          </a:prstGeom>
+          <a:noFill/>
+        </p:spPr>
+        <p:txBody>
+          <a:bodyPr wrap="none" lIns="45720" tIns="27432" rIns="45720" bIns="27432" anchor="t">
+            <a:spAutoFit/>
+          </a:bodyPr>
+          <a:lstStyle/>
+          <a:p>
+            <a:pPr algn="ctr">
+              <a:spcAft>
+                <a:spcPts val="600"/>
+              </a:spcAft>
+            </a:pPr>
+            <a:r>
+              <a:rPr sz="1400" b="1" i="0">
+                <a:solidFill>
+                  <a:srgbClr val="222222"/>
+                </a:solidFill>
+                <a:latin typeface="Arial"/>
+              </a:rPr>
+              <a:t>Transition probabilities</a:t>
+            </a:r>
+          </a:p>
+        </p:txBody>
+      </p:sp>
+      <p:sp>
+        <p:nvSpPr>
+          <p:cNvPr id="32" name="Takeaway card"/>
+          <p:cNvSpPr/>
+          <p:nvPr/>
+        </p:nvSpPr>
+        <p:spPr>
+          <a:xfrm>
+            <a:off x="841248" y="5760720"/>
+            <a:ext cx="10515600" cy="548640"/>
+          </a:xfrm>
+          <a:prstGeom prst="roundRect">
+            <a:avLst>
+              <a:gd name="adj" fmla="val 6000"/>
+            </a:avLst>
+          </a:prstGeom>
+          <a:solidFill>
+            <a:srgbClr val="6A2C91"/>
+          </a:solidFill>
+          <a:ln>
+            <a:noFill/>
+          </a:ln>
+          <a:effectLst/>
+        </p:spPr>
+        <p:style>
+          <a:lnRef idx="1">
+            <a:schemeClr val="accent1"/>
+          </a:lnRef>
+          <a:fillRef idx="3">
+            <a:schemeClr val="accent1"/>
+          </a:fillRef>
+          <a:effectRef idx="2">
+            <a:schemeClr val="accent1"/>
+          </a:effectRef>
+          <a:fontRef idx="minor">
+            <a:schemeClr val="lt1"/>
+          </a:fontRef>
+        </p:style>
+        <p:txBody>
+          <a:bodyPr rtlCol="0" anchor="ctr"/>
+          <a:lstStyle/>
+          <a:p>
+            <a:pPr algn="ctr"/>
+            <a:endParaRPr/>
+          </a:p>
+        </p:txBody>
+      </p:sp>
+      <p:pic>
+        <p:nvPicPr>
+          <p:cNvPr id="33" name="Picture 32" descr="image.png"/>
+          <p:cNvPicPr>
+            <a:picLocks noChangeAspect="1"/>
+          </p:cNvPicPr>
+          <p:nvPr/>
+        </p:nvPicPr>
+        <p:blipFill>
+          <a:blip r:embed="rId4"/>
+          <a:stretch>
+            <a:fillRect/>
+          </a:stretch>
+        </p:blipFill>
+        <p:spPr>
+          <a:xfrm>
+            <a:off x="1069848" y="5870448"/>
+            <a:ext cx="329184" cy="329184"/>
+          </a:xfrm>
+          <a:prstGeom prst="rect">
+            <a:avLst/>
+          </a:prstGeom>
+        </p:spPr>
+      </p:pic>
+      <p:sp>
+        <p:nvSpPr>
+          <p:cNvPr id="34" name="Takeaway"/>
+          <p:cNvSpPr txBox="1"/>
+          <p:nvPr/>
+        </p:nvSpPr>
+        <p:spPr>
+          <a:xfrm>
+            <a:off x="1508760" y="5760720"/>
+            <a:ext cx="9601200" cy="548640"/>
+          </a:xfrm>
+          <a:prstGeom prst="rect">
+            <a:avLst/>
+          </a:prstGeom>
+          <a:noFill/>
+        </p:spPr>
+        <p:txBody>
+          <a:bodyPr wrap="square" lIns="45720" tIns="27432" rIns="45720" bIns="27432" anchor="ctr">
+            <a:spAutoFit/>
+          </a:bodyPr>
+          <a:lstStyle/>
+          <a:p>
+            <a:pPr algn="l">
+              <a:spcAft>
+                <a:spcPts val="600"/>
+              </a:spcAft>
+            </a:pPr>
+            <a:r>
+              <a:rPr sz="2000" b="1" i="0">
+                <a:solidFill>
+                  <a:srgbClr val="FFFFFF"/>
+                </a:solidFill>
+                <a:latin typeface="Arial"/>
+              </a:rPr>
+              <a:t>The encoding changes the texture the ViT sees; GASF keeps rich structure</a:t>
+            </a:r>
+          </a:p>
+        </p:txBody>
+      </p:sp>
+    </p:spTree>
+  </p:cSld>
+  <p:clrMapOvr>
+    <a:masterClrMapping/>
+  </p:clrMapOvr>
+  <mc:AlternateContent xmlns:mc="http://schemas.openxmlformats.org/markup-compatibility/2006">
+    <mc:Choice xmlns:p14="http://schemas.microsoft.com/office/powerpoint/2010/main" Requires="p14">
+      <p:transition spd="med" p14:dur="700">
+        <p:push dir="l"/>
+      </p:transition>
+    </mc:Choice>
+    <mc:Fallback>
+      <p:transition spd="med">
+        <p:push dir="l"/>
+      </p:transition>
+    </mc:Fallback>
+  </mc:AlternateContent>
+</p:sld>
+</file>
+
+<file path=ppt/slides/slide15.xml><?xml version="1.0" encoding="utf-8"?>
+<p:sld xmlns:a="http://schemas.openxmlformats.org/drawingml/2006/main" xmlns:p="http://schemas.openxmlformats.org/presentationml/2006/main" xmlns:r="http://schemas.openxmlformats.org/officeDocument/2006/relationships">
+  <p:cSld>
+    <p:spTree>
+      <p:nvGrpSpPr>
+        <p:cNvPr id="1" name=""/>
+        <p:cNvGrpSpPr/>
+        <p:nvPr/>
+      </p:nvGrpSpPr>
+      <p:grpSpPr/>
+      <p:sp>
+        <p:nvSpPr>
+          <p:cNvPr id="2" name="Title 1"/>
+          <p:cNvSpPr>
+            <a:spLocks noGrp="1"/>
+          </p:cNvSpPr>
+          <p:nvPr>
+            <p:ph type="title"/>
+          </p:nvPr>
+        </p:nvSpPr>
+        <p:spPr>
+          <a:xfrm>
+            <a:off x="841248" y="548640"/>
+            <a:ext cx="10515600" cy="868680"/>
+          </a:xfrm>
+        </p:spPr>
+        <p:txBody>
+          <a:bodyPr anchor="ctr"/>
+          <a:lstStyle/>
+          <a:p>
+            <a:r>
+              <a:rPr sz="4000" b="1" i="0">
+                <a:solidFill>
+                  <a:srgbClr val="222222"/>
+                </a:solidFill>
+                <a:latin typeface="Arial"/>
+              </a:rPr>
+              <a:t>Downsampling: FFT vs DWT</a:t>
+            </a:r>
+          </a:p>
+        </p:txBody>
+      </p:sp>
+      <p:grpSp>
+        <p:nvGrpSpPr>
+          <p:cNvPr id="5" name="Group 4">
+            <a:extLst>
+              <a:ext uri="{FF2B5EF4-FFF2-40B4-BE49-F238E27FC236}">
+                <a16:creationId xmlns:a16="http://schemas.microsoft.com/office/drawing/2014/main" id="{DD61A49B-2A57-9774-88AA-46117D53DEE4}"/>
+              </a:ext>
+            </a:extLst>
+          </p:cNvPr>
+          <p:cNvGrpSpPr/>
+          <p:nvPr/>
+        </p:nvGrpSpPr>
+        <p:grpSpPr>
+          <a:xfrm>
+            <a:off x="285674" y="30506"/>
+            <a:ext cx="11701900" cy="480834"/>
+            <a:chOff x="285674" y="30506"/>
+            <a:chExt cx="11701900" cy="480834"/>
+          </a:xfrm>
+        </p:grpSpPr>
+        <p:sp>
+          <p:nvSpPr>
+            <p:cNvPr id="6" name="TextBox 5">
+              <a:extLst>
+                <a:ext uri="{FF2B5EF4-FFF2-40B4-BE49-F238E27FC236}">
+                  <a16:creationId xmlns:a16="http://schemas.microsoft.com/office/drawing/2014/main" id="{7C9A7A8A-4F4A-E934-FAAA-1305669F46EC}"/>
+                </a:ext>
+              </a:extLst>
+            </p:cNvPr>
+            <p:cNvSpPr txBox="1"/>
+            <p:nvPr/>
+          </p:nvSpPr>
+          <p:spPr>
+            <a:xfrm>
+              <a:off x="285674" y="145223"/>
+              <a:ext cx="6982825" cy="338554"/>
+            </a:xfrm>
+            <a:prstGeom prst="rect">
+              <a:avLst/>
+            </a:prstGeom>
+            <a:noFill/>
+          </p:spPr>
+          <p:txBody>
+            <a:bodyPr wrap="square">
+              <a:spAutoFit/>
+            </a:bodyPr>
+            <a:lstStyle/>
+            <a:p>
+              <a:r>
+                <a:rPr lang="en-US" sz="1600" dirty="0">
+                  <a:latin typeface="Arial" panose="020B0604020202020204" pitchFamily="34" charset="0"/>
+                  <a:cs typeface="Arial" panose="020B0604020202020204" pitchFamily="34" charset="0"/>
+                </a:rPr>
+                <a:t>BioMed Frontiers 2026 | International Conference on Biomedical Innovation</a:t>
+              </a:r>
+              <a:endParaRPr lang="en-US" sz="1600" dirty="0"/>
+            </a:p>
+          </p:txBody>
+        </p:sp>
+        <p:pic>
+          <p:nvPicPr>
+            <p:cNvPr id="7" name="Picture 6">
+              <a:extLst>
+                <a:ext uri="{FF2B5EF4-FFF2-40B4-BE49-F238E27FC236}">
+                  <a16:creationId xmlns:a16="http://schemas.microsoft.com/office/drawing/2014/main" id="{330C2F2A-83C9-29D7-D322-09CA5A630AB6}"/>
+                </a:ext>
+              </a:extLst>
+            </p:cNvPr>
+            <p:cNvPicPr>
+              <a:picLocks noChangeAspect="1"/>
+            </p:cNvPicPr>
+            <p:nvPr/>
+          </p:nvPicPr>
+          <p:blipFill>
+            <a:blip r:embed="rId2"/>
+            <a:stretch>
+              <a:fillRect/>
+            </a:stretch>
+          </p:blipFill>
+          <p:spPr>
+            <a:xfrm>
+              <a:off x="10593851" y="30506"/>
+              <a:ext cx="1393723" cy="480834"/>
+            </a:xfrm>
+            <a:prstGeom prst="rect">
+              <a:avLst/>
+            </a:prstGeom>
+          </p:spPr>
+        </p:pic>
+      </p:grpSp>
+      <p:sp>
+        <p:nvSpPr>
+          <p:cNvPr id="4" name="Slide Number Placeholder 3">
+            <a:extLst>
+              <a:ext uri="{FF2B5EF4-FFF2-40B4-BE49-F238E27FC236}">
+                <a16:creationId xmlns:a16="http://schemas.microsoft.com/office/drawing/2014/main" id="{4A408C85-B377-2DB1-EF8F-00D922D8FA43}"/>
+              </a:ext>
+            </a:extLst>
+          </p:cNvPr>
+          <p:cNvSpPr>
+            <a:spLocks noGrp="1"/>
+          </p:cNvSpPr>
+          <p:nvPr>
+            <p:ph type="sldNum" sz="quarter" idx="12"/>
+          </p:nvPr>
+        </p:nvSpPr>
+        <p:spPr/>
+        <p:txBody>
+          <a:bodyPr/>
+          <a:lstStyle/>
+          <a:p>
+            <a:fld id="{7F469C41-6B9F-4AAA-9F31-D78B57F455E2}" type="slidenum">
+              <a:rPr lang="en-GB" smtClean="0"/>
+              <a:t>6</a:t>
+            </a:fld>
+            <a:endParaRPr lang="en-GB"/>
+          </a:p>
+        </p:txBody>
+      </p:sp>
+      <p:sp>
+        <p:nvSpPr>
+          <p:cNvPr id="14" name="Method card"/>
+          <p:cNvSpPr/>
+          <p:nvPr/>
+        </p:nvSpPr>
+        <p:spPr>
+          <a:xfrm>
+            <a:off x="841248" y="1554480"/>
+            <a:ext cx="7000000" cy="4050000"/>
+          </a:xfrm>
+          <a:prstGeom prst="roundRect">
+            <a:avLst>
+              <a:gd name="adj" fmla="val 6000"/>
+            </a:avLst>
+          </a:prstGeom>
+          <a:solidFill>
+            <a:srgbClr val="F1E9F7"/>
+          </a:solidFill>
+          <a:ln>
+            <a:noFill/>
+          </a:ln>
+          <a:effectLst/>
+        </p:spPr>
+        <p:style>
+          <a:lnRef idx="1">
+            <a:schemeClr val="accent1"/>
+          </a:lnRef>
+          <a:fillRef idx="3">
+            <a:schemeClr val="accent1"/>
+          </a:fillRef>
+          <a:effectRef idx="2">
+            <a:schemeClr val="accent1"/>
+          </a:effectRef>
+          <a:fontRef idx="minor">
+            <a:schemeClr val="lt1"/>
+          </a:fontRef>
+        </p:style>
+        <p:txBody>
+          <a:bodyPr rtlCol="0" anchor="ctr"/>
+          <a:lstStyle/>
+          <a:p>
+            <a:pPr algn="ctr"/>
+            <a:endParaRPr/>
+          </a:p>
+        </p:txBody>
+      </p:sp>
+      <p:pic>
+        <p:nvPicPr>
+          <p:cNvPr id="15" name="Picture 14" descr="fft.png"/>
+          <p:cNvPicPr>
+            <a:picLocks noChangeAspect="1"/>
+          </p:cNvPicPr>
+          <p:nvPr/>
+        </p:nvPicPr>
+        <p:blipFill>
+          <a:blip r:embed="rId3"/>
+          <a:stretch>
+            <a:fillRect/>
+          </a:stretch>
+        </p:blipFill>
+        <p:spPr>
+          <a:xfrm>
+            <a:off x="1601248" y="1680000"/>
+            <a:ext cx="6100000" cy="1657106"/>
+          </a:xfrm>
+          <a:prstGeom prst="rect">
+            <a:avLst/>
+          </a:prstGeom>
+        </p:spPr>
+      </p:pic>
+      <p:pic>
+        <p:nvPicPr>
+          <p:cNvPr id="16" name="Picture 15" descr="dwt.png"/>
+          <p:cNvPicPr>
+            <a:picLocks noChangeAspect="1"/>
+          </p:cNvPicPr>
+          <p:nvPr/>
+        </p:nvPicPr>
+        <p:blipFill>
+          <a:blip r:embed="rId4"/>
+          <a:stretch>
+            <a:fillRect/>
+          </a:stretch>
+        </p:blipFill>
+        <p:spPr>
+          <a:xfrm>
+            <a:off x="1601248" y="3487106"/>
+            <a:ext cx="6100000" cy="1657106"/>
+          </a:xfrm>
+          <a:prstGeom prst="rect">
+            <a:avLst/>
+          </a:prstGeom>
+        </p:spPr>
+      </p:pic>
+      <p:sp>
+        <p:nvSpPr>
+          <p:cNvPr id="13" name="TextBox 12"/>
+          <p:cNvSpPr txBox="1"/>
+          <p:nvPr/>
+        </p:nvSpPr>
+        <p:spPr>
+          <a:xfrm>
+            <a:off x="921248" y="2318553"/>
+            <a:ext cx="680000" cy="380000"/>
+          </a:xfrm>
+          <a:prstGeom prst="rect">
+            <a:avLst/>
+          </a:prstGeom>
+          <a:noFill/>
+        </p:spPr>
+        <p:txBody>
+          <a:bodyPr wrap="none" lIns="45720" tIns="27432" rIns="45720" bIns="27432" anchor="t">
+            <a:spAutoFit/>
+          </a:bodyPr>
+          <a:lstStyle/>
+          <a:p>
+            <a:pPr algn="ctr">
+              <a:spcAft>
+                <a:spcPts val="600"/>
+              </a:spcAft>
+            </a:pPr>
+            <a:r>
+              <a:rPr sz="1600" b="1" i="0">
+                <a:solidFill>
+                  <a:srgbClr val="222222"/>
+                </a:solidFill>
+                <a:latin typeface="Arial"/>
+              </a:rPr>
+              <a:t>FFT</a:t>
+            </a:r>
+          </a:p>
+        </p:txBody>
+      </p:sp>
+      <p:sp>
+        <p:nvSpPr>
+          <p:cNvPr id="13" name="TextBox 12"/>
+          <p:cNvSpPr txBox="1"/>
+          <p:nvPr/>
+        </p:nvSpPr>
+        <p:spPr>
+          <a:xfrm>
+            <a:off x="921248" y="4125659"/>
+            <a:ext cx="680000" cy="380000"/>
+          </a:xfrm>
+          <a:prstGeom prst="rect">
+            <a:avLst/>
+          </a:prstGeom>
+          <a:noFill/>
+        </p:spPr>
+        <p:txBody>
+          <a:bodyPr wrap="none" lIns="45720" tIns="27432" rIns="45720" bIns="27432" anchor="t">
+            <a:spAutoFit/>
+          </a:bodyPr>
+          <a:lstStyle/>
+          <a:p>
+            <a:pPr algn="ctr">
+              <a:spcAft>
+                <a:spcPts val="600"/>
+              </a:spcAft>
+            </a:pPr>
+            <a:r>
+              <a:rPr sz="1600" b="1" i="0">
+                <a:solidFill>
+                  <a:srgbClr val="222222"/>
+                </a:solidFill>
+                <a:latin typeface="Arial"/>
+              </a:rPr>
+              <a:t>DWT</a:t>
+            </a:r>
+          </a:p>
+        </p:txBody>
+      </p:sp>
+      <p:sp>
+        <p:nvSpPr>
+          <p:cNvPr id="15" name="Stat card"/>
+          <p:cNvSpPr/>
+          <p:nvPr/>
+        </p:nvSpPr>
+        <p:spPr>
+          <a:xfrm>
+            <a:off x="8238160" y="1645920"/>
+            <a:ext cx="3118840" cy="4000000"/>
+          </a:xfrm>
+          <a:prstGeom prst="roundRect">
+            <a:avLst>
+              <a:gd name="adj" fmla="val 6000"/>
+            </a:avLst>
+          </a:prstGeom>
+          <a:solidFill>
+            <a:srgbClr val="6A2C91"/>
+          </a:solidFill>
+          <a:ln>
+            <a:noFill/>
+          </a:ln>
+          <a:effectLst/>
+        </p:spPr>
+        <p:style>
+          <a:lnRef idx="1">
+            <a:schemeClr val="accent1"/>
+          </a:lnRef>
+          <a:fillRef idx="3">
+            <a:schemeClr val="accent1"/>
+          </a:fillRef>
+          <a:effectRef idx="2">
+            <a:schemeClr val="accent1"/>
+          </a:effectRef>
+          <a:fontRef idx="minor">
+            <a:schemeClr val="lt1"/>
+          </a:fontRef>
+        </p:style>
+        <p:txBody>
+          <a:bodyPr rtlCol="0" anchor="ctr"/>
+          <a:lstStyle/>
+          <a:p>
+            <a:pPr algn="ctr"/>
+            <a:endParaRPr/>
+          </a:p>
+        </p:txBody>
+      </p:sp>
+      <p:sp>
+        <p:nvSpPr>
+          <p:cNvPr id="17" name="Stat label"/>
+          <p:cNvSpPr txBox="1"/>
+          <p:nvPr/>
+        </p:nvSpPr>
+        <p:spPr>
+          <a:xfrm>
+            <a:off x="8318160" y="1750000"/>
+            <a:ext cx="3000000" cy="3700000"/>
+          </a:xfrm>
+          <a:prstGeom prst="rect">
+            <a:avLst/>
+          </a:prstGeom>
+          <a:noFill/>
+        </p:spPr>
+        <p:txBody>
+          <a:bodyPr wrap="square" lIns="45720" tIns="27432" rIns="45720" bIns="27432" anchor="t">
+            <a:spAutoFit/>
+          </a:bodyPr>
+          <a:lstStyle/>
+          <a:p>
+            <a:pPr algn="l">
+              <a:spcAft>
+                <a:spcPts val="1000"/>
+              </a:spcAft>
+            </a:pPr>
+            <a:r>
+              <a:rPr sz="2000" b="1" i="0">
+                <a:solidFill>
+                  <a:srgbClr val="FFFFFF"/>
+                </a:solidFill>
+                <a:latin typeface="Arial"/>
+              </a:rPr>
+              <a:t>What to look for</a:t>
+            </a:r>
+          </a:p>
+          <a:p>
+            <a:pPr algn="l">
+              <a:spcAft>
+                <a:spcPts val="1000"/>
+              </a:spcAft>
+            </a:pPr>
+            <a:r>
+              <a:rPr sz="1500" b="0" i="0">
+                <a:solidFill>
+                  <a:srgbClr val="FFFFFF"/>
+                </a:solidFill>
+                <a:latin typeface="Arial"/>
+              </a:rPr>
+              <a:t>GASF images of the same epoch, resampled to 64, 128, 256 Hz and the 512 Hz original.</a:t>
+            </a:r>
+          </a:p>
+          <a:p>
+            <a:pPr algn="l">
+              <a:spcAft>
+                <a:spcPts val="1000"/>
+              </a:spcAft>
+            </a:pPr>
+            <a:r>
+              <a:rPr sz="1500" b="0" i="0">
+                <a:solidFill>
+                  <a:srgbClr val="FFFFFF"/>
+                </a:solidFill>
+                <a:latin typeface="Arial"/>
+              </a:rPr>
+              <a:t>FFT: image structure stays almost the same at every rate.</a:t>
+            </a:r>
+          </a:p>
+          <a:p>
+            <a:pPr algn="l">
+              <a:spcAft>
+                <a:spcPts val="1000"/>
+              </a:spcAft>
+            </a:pPr>
+            <a:r>
+              <a:rPr sz="1500" b="0" i="0">
+                <a:solidFill>
+                  <a:srgbClr val="FFFFFF"/>
+                </a:solidFill>
+                <a:latin typeface="Arial"/>
+              </a:rPr>
+              <a:t>DWT: images change visibly below 256 Hz; 128 Hz is the sweet spot for accuracy (next slide).</a:t>
+            </a:r>
+          </a:p>
+        </p:txBody>
+      </p:sp>
+      <p:sp>
+        <p:nvSpPr>
+          <p:cNvPr id="32" name="Takeaway card"/>
+          <p:cNvSpPr/>
+          <p:nvPr/>
+        </p:nvSpPr>
+        <p:spPr>
+          <a:xfrm>
+            <a:off x="841248" y="5760720"/>
+            <a:ext cx="10515600" cy="548640"/>
+          </a:xfrm>
+          <a:prstGeom prst="roundRect">
+            <a:avLst>
+              <a:gd name="adj" fmla="val 6000"/>
+            </a:avLst>
+          </a:prstGeom>
+          <a:solidFill>
+            <a:srgbClr val="6A2C91"/>
+          </a:solidFill>
+          <a:ln>
+            <a:noFill/>
+          </a:ln>
+          <a:effectLst/>
+        </p:spPr>
+        <p:style>
+          <a:lnRef idx="1">
+            <a:schemeClr val="accent1"/>
+          </a:lnRef>
+          <a:fillRef idx="3">
+            <a:schemeClr val="accent1"/>
+          </a:fillRef>
+          <a:effectRef idx="2">
+            <a:schemeClr val="accent1"/>
+          </a:effectRef>
+          <a:fontRef idx="minor">
+            <a:schemeClr val="lt1"/>
+          </a:fontRef>
+        </p:style>
+        <p:txBody>
+          <a:bodyPr rtlCol="0" anchor="ctr"/>
+          <a:lstStyle/>
+          <a:p>
+            <a:pPr algn="ctr"/>
+            <a:endParaRPr/>
+          </a:p>
+        </p:txBody>
+      </p:sp>
+      <p:pic>
+        <p:nvPicPr>
+          <p:cNvPr id="33" name="Picture 32" descr="image.png"/>
+          <p:cNvPicPr>
+            <a:picLocks noChangeAspect="1"/>
+          </p:cNvPicPr>
+          <p:nvPr/>
+        </p:nvPicPr>
+        <p:blipFill>
+          <a:blip r:embed="rId5"/>
+          <a:stretch>
+            <a:fillRect/>
+          </a:stretch>
+        </p:blipFill>
+        <p:spPr>
+          <a:xfrm>
+            <a:off x="1069848" y="5870448"/>
+            <a:ext cx="329184" cy="329184"/>
+          </a:xfrm>
+          <a:prstGeom prst="rect">
+            <a:avLst/>
+          </a:prstGeom>
+        </p:spPr>
+      </p:pic>
+      <p:sp>
+        <p:nvSpPr>
+          <p:cNvPr id="34" name="Takeaway"/>
+          <p:cNvSpPr txBox="1"/>
+          <p:nvPr/>
+        </p:nvSpPr>
+        <p:spPr>
+          <a:xfrm>
+            <a:off x="1508760" y="5760720"/>
+            <a:ext cx="9601200" cy="548640"/>
+          </a:xfrm>
+          <a:prstGeom prst="rect">
+            <a:avLst/>
+          </a:prstGeom>
+          <a:noFill/>
+        </p:spPr>
+        <p:txBody>
+          <a:bodyPr wrap="square" lIns="45720" tIns="27432" rIns="45720" bIns="27432" anchor="ctr">
+            <a:spAutoFit/>
+          </a:bodyPr>
+          <a:lstStyle/>
+          <a:p>
+            <a:pPr algn="l">
+              <a:spcAft>
+                <a:spcPts val="600"/>
+              </a:spcAft>
+            </a:pPr>
+            <a:r>
+              <a:rPr sz="2000" b="1" i="0">
+                <a:solidFill>
+                  <a:srgbClr val="FFFFFF"/>
+                </a:solidFill>
+                <a:latin typeface="Arial"/>
+              </a:rPr>
+              <a:t>Same epoch, same GASF encoding; only the resampling method differs</a:t>
+            </a:r>
+          </a:p>
+        </p:txBody>
+      </p:sp>
+    </p:spTree>
+  </p:cSld>
+  <p:clrMapOvr>
+    <a:masterClrMapping/>
+  </p:clrMapOvr>
+  <mc:AlternateContent xmlns:mc="http://schemas.openxmlformats.org/markup-compatibility/2006">
+    <mc:Choice xmlns:p14="http://schemas.microsoft.com/office/powerpoint/2010/main" Requires="p14">
+      <p:transition spd="med" p14:dur="700">
+        <p:push dir="l"/>
+      </p:transition>
+    </mc:Choice>
+    <mc:Fallback>
+      <p:transition spd="med">
+        <p:push dir="l"/>
+      </p:transition>
+    </mc:Fallback>
+  </mc:AlternateContent>
+</p:sld>
+</file>
+
+<file path=ppt/slides/slide16.xml><?xml version="1.0" encoding="utf-8"?>
+<p:sld xmlns:a="http://schemas.openxmlformats.org/drawingml/2006/main" xmlns:p="http://schemas.openxmlformats.org/presentationml/2006/main" xmlns:r="http://schemas.openxmlformats.org/officeDocument/2006/relationships">
+  <p:cSld>
+    <p:spTree>
+      <p:nvGrpSpPr>
+        <p:cNvPr id="1" name=""/>
+        <p:cNvGrpSpPr/>
+        <p:nvPr/>
+      </p:nvGrpSpPr>
+      <p:grpSpPr/>
+      <p:sp>
+        <p:nvSpPr>
+          <p:cNvPr id="2" name="Title 1"/>
+          <p:cNvSpPr>
+            <a:spLocks noGrp="1"/>
+          </p:cNvSpPr>
+          <p:nvPr>
+            <p:ph type="title"/>
+          </p:nvPr>
+        </p:nvSpPr>
+        <p:spPr>
+          <a:xfrm>
+            <a:off x="841248" y="548640"/>
+            <a:ext cx="10515600" cy="868680"/>
+          </a:xfrm>
+        </p:spPr>
+        <p:txBody>
+          <a:bodyPr anchor="ctr"/>
+          <a:lstStyle/>
+          <a:p>
+            <a:r>
+              <a:rPr sz="4000" b="1" i="0">
+                <a:solidFill>
+                  <a:srgbClr val="222222"/>
+                </a:solidFill>
+                <a:latin typeface="Arial"/>
+              </a:rPr>
+              <a:t>Class balancing with DCGAN</a:t>
+            </a:r>
+          </a:p>
+        </p:txBody>
+      </p:sp>
+      <p:grpSp>
+        <p:nvGrpSpPr>
+          <p:cNvPr id="5" name="Group 4">
+            <a:extLst>
+              <a:ext uri="{FF2B5EF4-FFF2-40B4-BE49-F238E27FC236}">
+                <a16:creationId xmlns:a16="http://schemas.microsoft.com/office/drawing/2014/main" id="{DD61A49B-2A57-9774-88AA-46117D53DEE4}"/>
+              </a:ext>
+            </a:extLst>
+          </p:cNvPr>
+          <p:cNvGrpSpPr/>
+          <p:nvPr/>
+        </p:nvGrpSpPr>
+        <p:grpSpPr>
+          <a:xfrm>
+            <a:off x="285674" y="30506"/>
+            <a:ext cx="11701900" cy="480834"/>
+            <a:chOff x="285674" y="30506"/>
+            <a:chExt cx="11701900" cy="480834"/>
+          </a:xfrm>
+        </p:grpSpPr>
+        <p:sp>
+          <p:nvSpPr>
+            <p:cNvPr id="6" name="TextBox 5">
+              <a:extLst>
+                <a:ext uri="{FF2B5EF4-FFF2-40B4-BE49-F238E27FC236}">
+                  <a16:creationId xmlns:a16="http://schemas.microsoft.com/office/drawing/2014/main" id="{7C9A7A8A-4F4A-E934-FAAA-1305669F46EC}"/>
+                </a:ext>
+              </a:extLst>
+            </p:cNvPr>
+            <p:cNvSpPr txBox="1"/>
+            <p:nvPr/>
+          </p:nvSpPr>
+          <p:spPr>
+            <a:xfrm>
+              <a:off x="285674" y="145223"/>
+              <a:ext cx="6982825" cy="338554"/>
+            </a:xfrm>
+            <a:prstGeom prst="rect">
+              <a:avLst/>
+            </a:prstGeom>
+            <a:noFill/>
+          </p:spPr>
+          <p:txBody>
+            <a:bodyPr wrap="square">
+              <a:spAutoFit/>
+            </a:bodyPr>
+            <a:lstStyle/>
+            <a:p>
+              <a:r>
+                <a:rPr lang="en-US" sz="1600" dirty="0">
+                  <a:latin typeface="Arial" panose="020B0604020202020204" pitchFamily="34" charset="0"/>
+                  <a:cs typeface="Arial" panose="020B0604020202020204" pitchFamily="34" charset="0"/>
+                </a:rPr>
+                <a:t>BioMed Frontiers 2026 | International Conference on Biomedical Innovation</a:t>
+              </a:r>
+              <a:endParaRPr lang="en-US" sz="1600" dirty="0"/>
+            </a:p>
+          </p:txBody>
+        </p:sp>
+        <p:pic>
+          <p:nvPicPr>
+            <p:cNvPr id="7" name="Picture 6">
+              <a:extLst>
+                <a:ext uri="{FF2B5EF4-FFF2-40B4-BE49-F238E27FC236}">
+                  <a16:creationId xmlns:a16="http://schemas.microsoft.com/office/drawing/2014/main" id="{330C2F2A-83C9-29D7-D322-09CA5A630AB6}"/>
+                </a:ext>
+              </a:extLst>
+            </p:cNvPr>
+            <p:cNvPicPr>
+              <a:picLocks noChangeAspect="1"/>
+            </p:cNvPicPr>
+            <p:nvPr/>
+          </p:nvPicPr>
+          <p:blipFill>
+            <a:blip r:embed="rId2"/>
+            <a:stretch>
+              <a:fillRect/>
+            </a:stretch>
+          </p:blipFill>
+          <p:spPr>
+            <a:xfrm>
+              <a:off x="10593851" y="30506"/>
+              <a:ext cx="1393723" cy="480834"/>
+            </a:xfrm>
+            <a:prstGeom prst="rect">
+              <a:avLst/>
+            </a:prstGeom>
+          </p:spPr>
+        </p:pic>
+      </p:grpSp>
+      <p:sp>
+        <p:nvSpPr>
+          <p:cNvPr id="4" name="Slide Number Placeholder 3">
+            <a:extLst>
+              <a:ext uri="{FF2B5EF4-FFF2-40B4-BE49-F238E27FC236}">
+                <a16:creationId xmlns:a16="http://schemas.microsoft.com/office/drawing/2014/main" id="{4A408C85-B377-2DB1-EF8F-00D922D8FA43}"/>
+              </a:ext>
+            </a:extLst>
+          </p:cNvPr>
+          <p:cNvSpPr>
+            <a:spLocks noGrp="1"/>
+          </p:cNvSpPr>
+          <p:nvPr>
+            <p:ph type="sldNum" sz="quarter" idx="12"/>
+          </p:nvPr>
+        </p:nvSpPr>
+        <p:spPr/>
+        <p:txBody>
+          <a:bodyPr/>
+          <a:lstStyle/>
+          <a:p>
+            <a:fld id="{7F469C41-6B9F-4AAA-9F31-D78B57F455E2}" type="slidenum">
+              <a:rPr lang="en-GB" smtClean="0"/>
+              <a:t>6</a:t>
+            </a:fld>
+            <a:endParaRPr lang="en-GB"/>
+          </a:p>
+        </p:txBody>
+      </p:sp>
+      <p:sp>
+        <p:nvSpPr>
+          <p:cNvPr id="14" name="Method card"/>
+          <p:cNvSpPr/>
+          <p:nvPr/>
+        </p:nvSpPr>
+        <p:spPr>
+          <a:xfrm>
+            <a:off x="841248" y="1554480"/>
+            <a:ext cx="7000000" cy="4050000"/>
+          </a:xfrm>
+          <a:prstGeom prst="roundRect">
+            <a:avLst>
+              <a:gd name="adj" fmla="val 6000"/>
+            </a:avLst>
+          </a:prstGeom>
+          <a:solidFill>
+            <a:srgbClr val="F1E9F7"/>
+          </a:solidFill>
+          <a:ln>
+            <a:noFill/>
+          </a:ln>
+          <a:effectLst/>
+        </p:spPr>
+        <p:style>
+          <a:lnRef idx="1">
+            <a:schemeClr val="accent1"/>
+          </a:lnRef>
+          <a:fillRef idx="3">
+            <a:schemeClr val="accent1"/>
+          </a:fillRef>
+          <a:effectRef idx="2">
+            <a:schemeClr val="accent1"/>
+          </a:effectRef>
+          <a:fontRef idx="minor">
+            <a:schemeClr val="lt1"/>
+          </a:fontRef>
+        </p:style>
+        <p:txBody>
+          <a:bodyPr rtlCol="0" anchor="ctr"/>
+          <a:lstStyle/>
+          <a:p>
+            <a:pPr algn="ctr"/>
+            <a:endParaRPr/>
+          </a:p>
+        </p:txBody>
+      </p:sp>
+      <p:pic>
+        <p:nvPicPr>
+          <p:cNvPr id="15" name="Picture 14" descr="gangenerated.png"/>
+          <p:cNvPicPr>
+            <a:picLocks noChangeAspect="1"/>
+          </p:cNvPicPr>
+          <p:nvPr/>
+        </p:nvPicPr>
+        <p:blipFill>
+          <a:blip r:embed="rId3"/>
+          <a:stretch>
+            <a:fillRect/>
+          </a:stretch>
+        </p:blipFill>
+        <p:spPr>
+          <a:xfrm>
+            <a:off x="1341248" y="1680000"/>
+            <a:ext cx="6000000" cy="3128072"/>
+          </a:xfrm>
+          <a:prstGeom prst="rect">
+            <a:avLst/>
+          </a:prstGeom>
+        </p:spPr>
+      </p:pic>
+      <p:sp>
+        <p:nvSpPr>
+          <p:cNvPr id="13" name="TextBox 12"/>
+          <p:cNvSpPr txBox="1"/>
+          <p:nvPr/>
+        </p:nvSpPr>
+        <p:spPr>
+          <a:xfrm>
+            <a:off x="941248" y="4898072"/>
+            <a:ext cx="6800000" cy="380000"/>
+          </a:xfrm>
+          <a:prstGeom prst="rect">
+            <a:avLst/>
+          </a:prstGeom>
+          <a:noFill/>
+        </p:spPr>
+        <p:txBody>
+          <a:bodyPr wrap="none" lIns="45720" tIns="27432" rIns="45720" bIns="27432" anchor="t">
+            <a:spAutoFit/>
+          </a:bodyPr>
+          <a:lstStyle/>
+          <a:p>
+            <a:pPr algn="ctr">
+              <a:spcAft>
+                <a:spcPts val="600"/>
+              </a:spcAft>
+            </a:pPr>
+            <a:r>
+              <a:rPr sz="1400" b="0" i="0">
+                <a:solidFill>
+                  <a:srgbClr val="222222"/>
+                </a:solidFill>
+                <a:latin typeface="Arial"/>
+              </a:rPr>
+              <a:t>Real GASF composite vs DCGAN-generated sample, same class</a:t>
+            </a:r>
+          </a:p>
+        </p:txBody>
+      </p:sp>
+      <p:sp>
+        <p:nvSpPr>
+          <p:cNvPr id="15" name="Stat card"/>
+          <p:cNvSpPr/>
+          <p:nvPr/>
+        </p:nvSpPr>
+        <p:spPr>
+          <a:xfrm>
+            <a:off x="8238160" y="1645920"/>
+            <a:ext cx="3118840" cy="4000000"/>
+          </a:xfrm>
+          <a:prstGeom prst="roundRect">
+            <a:avLst>
+              <a:gd name="adj" fmla="val 6000"/>
+            </a:avLst>
+          </a:prstGeom>
+          <a:solidFill>
+            <a:srgbClr val="6A2C91"/>
+          </a:solidFill>
+          <a:ln>
+            <a:noFill/>
+          </a:ln>
+          <a:effectLst/>
+        </p:spPr>
+        <p:style>
+          <a:lnRef idx="1">
+            <a:schemeClr val="accent1"/>
+          </a:lnRef>
+          <a:fillRef idx="3">
+            <a:schemeClr val="accent1"/>
+          </a:fillRef>
+          <a:effectRef idx="2">
+            <a:schemeClr val="accent1"/>
+          </a:effectRef>
+          <a:fontRef idx="minor">
+            <a:schemeClr val="lt1"/>
+          </a:fontRef>
+        </p:style>
+        <p:txBody>
+          <a:bodyPr rtlCol="0" anchor="ctr"/>
+          <a:lstStyle/>
+          <a:p>
+            <a:pPr algn="ctr"/>
+            <a:endParaRPr/>
+          </a:p>
+        </p:txBody>
+      </p:sp>
+      <p:sp>
+        <p:nvSpPr>
+          <p:cNvPr id="17" name="Stat label"/>
+          <p:cNvSpPr txBox="1"/>
+          <p:nvPr/>
+        </p:nvSpPr>
+        <p:spPr>
+          <a:xfrm>
+            <a:off x="8318160" y="1750000"/>
+            <a:ext cx="3000000" cy="3700000"/>
+          </a:xfrm>
+          <a:prstGeom prst="rect">
+            <a:avLst/>
+          </a:prstGeom>
+          <a:noFill/>
+        </p:spPr>
+        <p:txBody>
+          <a:bodyPr wrap="square" lIns="45720" tIns="27432" rIns="45720" bIns="27432" anchor="t">
+            <a:spAutoFit/>
+          </a:bodyPr>
+          <a:lstStyle/>
+          <a:p>
+            <a:pPr algn="l">
+              <a:spcAft>
+                <a:spcPts val="1000"/>
+              </a:spcAft>
+            </a:pPr>
+            <a:r>
+              <a:rPr sz="2000" b="1" i="0">
+                <a:solidFill>
+                  <a:srgbClr val="FFFFFF"/>
+                </a:solidFill>
+                <a:latin typeface="Arial"/>
+              </a:rPr>
+              <a:t>How it works</a:t>
+            </a:r>
+          </a:p>
+          <a:p>
+            <a:pPr algn="l">
+              <a:spcAft>
+                <a:spcPts val="1000"/>
+              </a:spcAft>
+            </a:pPr>
+            <a:r>
+              <a:rPr sz="1500" b="0" i="0">
+                <a:solidFill>
+                  <a:srgbClr val="FFFFFF"/>
+                </a:solidFill>
+                <a:latin typeface="Arial"/>
+              </a:rPr>
+              <a:t>A DCGAN learns the GASF composites of each under-represented class.</a:t>
+            </a:r>
+          </a:p>
+          <a:p>
+            <a:pPr algn="l">
+              <a:spcAft>
+                <a:spcPts val="1000"/>
+              </a:spcAft>
+            </a:pPr>
+            <a:r>
+              <a:rPr sz="1500" b="0" i="0">
+                <a:solidFill>
+                  <a:srgbClr val="FFFFFF"/>
+                </a:solidFill>
+                <a:latin typeface="Arial"/>
+              </a:rPr>
+              <a:t>Synthetic images are added to training folds only.</a:t>
+            </a:r>
+          </a:p>
+          <a:p>
+            <a:pPr algn="l">
+              <a:spcAft>
+                <a:spcPts val="1000"/>
+              </a:spcAft>
+            </a:pPr>
+            <a:r>
+              <a:rPr sz="1500" b="0" i="0">
+                <a:solidFill>
+                  <a:srgbClr val="FFFFFF"/>
+                </a:solidFill>
+                <a:latin typeface="Arial"/>
+              </a:rPr>
+              <a:t>Test folds stay 100% real, so there is no leakage.</a:t>
+            </a:r>
+          </a:p>
+        </p:txBody>
+      </p:sp>
+      <p:sp>
+        <p:nvSpPr>
+          <p:cNvPr id="32" name="Takeaway card"/>
+          <p:cNvSpPr/>
+          <p:nvPr/>
+        </p:nvSpPr>
+        <p:spPr>
+          <a:xfrm>
+            <a:off x="841248" y="5760720"/>
+            <a:ext cx="10515600" cy="548640"/>
+          </a:xfrm>
+          <a:prstGeom prst="roundRect">
+            <a:avLst>
+              <a:gd name="adj" fmla="val 6000"/>
+            </a:avLst>
+          </a:prstGeom>
+          <a:solidFill>
+            <a:srgbClr val="6A2C91"/>
+          </a:solidFill>
+          <a:ln>
+            <a:noFill/>
+          </a:ln>
+          <a:effectLst/>
+        </p:spPr>
+        <p:style>
+          <a:lnRef idx="1">
+            <a:schemeClr val="accent1"/>
+          </a:lnRef>
+          <a:fillRef idx="3">
+            <a:schemeClr val="accent1"/>
+          </a:fillRef>
+          <a:effectRef idx="2">
+            <a:schemeClr val="accent1"/>
+          </a:effectRef>
+          <a:fontRef idx="minor">
+            <a:schemeClr val="lt1"/>
+          </a:fontRef>
+        </p:style>
+        <p:txBody>
+          <a:bodyPr rtlCol="0" anchor="ctr"/>
+          <a:lstStyle/>
+          <a:p>
+            <a:pPr algn="ctr"/>
+            <a:endParaRPr/>
+          </a:p>
+        </p:txBody>
+      </p:sp>
+      <p:pic>
+        <p:nvPicPr>
+          <p:cNvPr id="33" name="Picture 32" descr="image.png"/>
+          <p:cNvPicPr>
+            <a:picLocks noChangeAspect="1"/>
+          </p:cNvPicPr>
+          <p:nvPr/>
+        </p:nvPicPr>
+        <p:blipFill>
+          <a:blip r:embed="rId4"/>
+          <a:stretch>
+            <a:fillRect/>
+          </a:stretch>
+        </p:blipFill>
+        <p:spPr>
+          <a:xfrm>
+            <a:off x="1069848" y="5870448"/>
+            <a:ext cx="329184" cy="329184"/>
+          </a:xfrm>
+          <a:prstGeom prst="rect">
+            <a:avLst/>
+          </a:prstGeom>
+        </p:spPr>
+      </p:pic>
+      <p:sp>
+        <p:nvSpPr>
+          <p:cNvPr id="34" name="Takeaway"/>
+          <p:cNvSpPr txBox="1"/>
+          <p:nvPr/>
+        </p:nvSpPr>
+        <p:spPr>
+          <a:xfrm>
+            <a:off x="1508760" y="5760720"/>
+            <a:ext cx="9601200" cy="548640"/>
+          </a:xfrm>
+          <a:prstGeom prst="rect">
+            <a:avLst/>
+          </a:prstGeom>
+          <a:noFill/>
+        </p:spPr>
+        <p:txBody>
+          <a:bodyPr wrap="square" lIns="45720" tIns="27432" rIns="45720" bIns="27432" anchor="ctr">
+            <a:spAutoFit/>
+          </a:bodyPr>
+          <a:lstStyle/>
+          <a:p>
+            <a:pPr algn="l">
+              <a:spcAft>
+                <a:spcPts val="600"/>
+              </a:spcAft>
+            </a:pPr>
+            <a:r>
+              <a:rPr sz="2000" b="1" i="0">
+                <a:solidFill>
+                  <a:srgbClr val="FFFFFF"/>
+                </a:solidFill>
+                <a:latin typeface="Arial"/>
+              </a:rPr>
+              <a:t>Synthetic samples keep the 4×4 channel layout and balance the classes</a:t>
+            </a:r>
+          </a:p>
+        </p:txBody>
+      </p:sp>
+    </p:spTree>
+  </p:cSld>
+  <p:clrMapOvr>
+    <a:masterClrMapping/>
+  </p:clrMapOvr>
+  <mc:AlternateContent xmlns:mc="http://schemas.openxmlformats.org/markup-compatibility/2006">
+    <mc:Choice xmlns:p14="http://schemas.microsoft.com/office/powerpoint/2010/main" Requires="p14">
+      <p:transition spd="med" p14:dur="700">
+        <p:push dir="l"/>
+      </p:transition>
+    </mc:Choice>
+    <mc:Fallback>
+      <p:transition spd="med">
+        <p:push dir="l"/>
       </p:transition>
     </mc:Fallback>
   </mc:AlternateContent>

--- a/presentation/Systematic Evaluation of Signal-to-Image Transformation Pipelines for Vision Transformer-based Sleep Stage Classification - Presentation.pptx
+++ b/presentation/Systematic Evaluation of Signal-to-Image Transformation Pipelines for Vision Transformer-based Sleep Stage Classification - Presentation.pptx
@@ -6040,7 +6040,7 @@
   </p:clrMapOvr>
   <mc:AlternateContent xmlns:mc="http://schemas.openxmlformats.org/markup-compatibility/2006">
     <mc:Choice xmlns:p14="http://schemas.microsoft.com/office/powerpoint/2010/main" Requires="p14">
-      <p:transition spd="med" p14:dur="700">
+      <p:transition spd="med" p14:dur="800">
         <p:fade/>
       </p:transition>
     </mc:Choice>
@@ -6879,14 +6879,14 @@
     <a:masterClrMapping/>
   </p:clrMapOvr>
   <mc:AlternateContent xmlns:mc="http://schemas.openxmlformats.org/markup-compatibility/2006">
-    <mc:Choice xmlns:p159="http://schemas.microsoft.com/office/powerpoint/2015/09/main" xmlns:p14="http://schemas.microsoft.com/office/powerpoint/2010/main" Requires="p159">
-      <p:transition spd="slow" p14:dur="1200">
-        <p159:morph option="byObject"/>
+    <mc:Choice xmlns:p14="http://schemas.microsoft.com/office/powerpoint/2010/main" Requires="p14">
+      <p:transition spd="med" p14:dur="800">
+        <p:cover dir="l"/>
       </p:transition>
     </mc:Choice>
     <mc:Fallback>
-      <p:transition spd="slow">
-        <p:fade/>
+      <p:transition spd="med">
+        <p:cover dir="l"/>
       </p:transition>
     </mc:Fallback>
   </mc:AlternateContent>
@@ -7302,7 +7302,7 @@
   </p:clrMapOvr>
   <mc:AlternateContent xmlns:mc="http://schemas.openxmlformats.org/markup-compatibility/2006">
     <mc:Choice xmlns:p14="http://schemas.microsoft.com/office/powerpoint/2010/main" Requires="p14">
-      <p:transition spd="med" p14:dur="700">
+      <p:transition spd="med" p14:dur="800">
         <p:push dir="l"/>
       </p:transition>
     </mc:Choice>
@@ -8453,14 +8453,14 @@
     <a:masterClrMapping/>
   </p:clrMapOvr>
   <mc:AlternateContent xmlns:mc="http://schemas.openxmlformats.org/markup-compatibility/2006">
-    <mc:Choice xmlns:p159="http://schemas.microsoft.com/office/powerpoint/2015/09/main" xmlns:p14="http://schemas.microsoft.com/office/powerpoint/2010/main" Requires="p159">
-      <p:transition spd="slow" p14:dur="1200">
-        <p159:morph option="byObject"/>
+    <mc:Choice xmlns:p14="http://schemas.microsoft.com/office/powerpoint/2010/main" Requires="p14">
+      <p:transition spd="med" p14:dur="800">
+        <p:cover dir="l"/>
       </p:transition>
     </mc:Choice>
     <mc:Fallback>
-      <p:transition spd="slow">
-        <p:fade/>
+      <p:transition spd="med">
+        <p:cover dir="l"/>
       </p:transition>
     </mc:Fallback>
   </mc:AlternateContent>
@@ -8815,7 +8815,7 @@
   </p:clrMapOvr>
   <mc:AlternateContent xmlns:mc="http://schemas.openxmlformats.org/markup-compatibility/2006">
     <mc:Choice xmlns:p14="http://schemas.microsoft.com/office/powerpoint/2010/main" Requires="p14">
-      <p:transition spd="med" p14:dur="700">
+      <p:transition spd="med" p14:dur="800">
         <p:fade/>
       </p:transition>
     </mc:Choice>
@@ -9372,13 +9372,13 @@
   </p:clrMapOvr>
   <mc:AlternateContent xmlns:mc="http://schemas.openxmlformats.org/markup-compatibility/2006">
     <mc:Choice xmlns:p14="http://schemas.microsoft.com/office/powerpoint/2010/main" Requires="p14">
-      <p:transition spd="med" p14:dur="700">
-        <p:push dir="l"/>
+      <p:transition spd="med" p14:dur="800">
+        <p:split orient="vert" dir="out"/>
       </p:transition>
     </mc:Choice>
     <mc:Fallback>
       <p:transition spd="med">
-        <p:push dir="l"/>
+        <p:split orient="vert" dir="out"/>
       </p:transition>
     </mc:Fallback>
   </mc:AlternateContent>
@@ -9970,13 +9970,13 @@
   </p:clrMapOvr>
   <mc:AlternateContent xmlns:mc="http://schemas.openxmlformats.org/markup-compatibility/2006">
     <mc:Choice xmlns:p14="http://schemas.microsoft.com/office/powerpoint/2010/main" Requires="p14">
-      <p:transition spd="med" p14:dur="700">
-        <p:push dir="l"/>
+      <p:transition spd="med" p14:dur="800">
+        <p:split orient="vert" dir="out"/>
       </p:transition>
     </mc:Choice>
     <mc:Fallback>
       <p:transition spd="med">
-        <p:push dir="l"/>
+        <p:split orient="vert" dir="out"/>
       </p:transition>
     </mc:Fallback>
   </mc:AlternateContent>
@@ -10505,13 +10505,13 @@
   </p:clrMapOvr>
   <mc:AlternateContent xmlns:mc="http://schemas.openxmlformats.org/markup-compatibility/2006">
     <mc:Choice xmlns:p14="http://schemas.microsoft.com/office/powerpoint/2010/main" Requires="p14">
-      <p:transition spd="med" p14:dur="700">
-        <p:push dir="l"/>
+      <p:transition spd="med" p14:dur="800">
+        <p:split orient="vert" dir="out"/>
       </p:transition>
     </mc:Choice>
     <mc:Fallback>
       <p:transition spd="med">
-        <p:push dir="l"/>
+        <p:split orient="vert" dir="out"/>
       </p:transition>
     </mc:Fallback>
   </mc:AlternateContent>
@@ -11548,14 +11548,14 @@
     <a:masterClrMapping/>
   </p:clrMapOvr>
   <mc:AlternateContent xmlns:mc="http://schemas.openxmlformats.org/markup-compatibility/2006">
-    <mc:Choice xmlns:p159="http://schemas.microsoft.com/office/powerpoint/2015/09/main" xmlns:p14="http://schemas.microsoft.com/office/powerpoint/2010/main" Requires="p159">
-      <p:transition spd="slow" p14:dur="1200">
-        <p159:morph option="byObject"/>
+    <mc:Choice xmlns:p14="http://schemas.microsoft.com/office/powerpoint/2010/main" Requires="p14">
+      <p:transition spd="med" p14:dur="800">
+        <p:cover dir="l"/>
       </p:transition>
     </mc:Choice>
     <mc:Fallback>
-      <p:transition spd="slow">
-        <p:fade/>
+      <p:transition spd="med">
+        <p:cover dir="l"/>
       </p:transition>
     </mc:Fallback>
   </mc:AlternateContent>
@@ -12454,14 +12454,14 @@
     <a:masterClrMapping/>
   </p:clrMapOvr>
   <mc:AlternateContent xmlns:mc="http://schemas.openxmlformats.org/markup-compatibility/2006">
-    <mc:Choice xmlns:p159="http://schemas.microsoft.com/office/powerpoint/2015/09/main" xmlns:p14="http://schemas.microsoft.com/office/powerpoint/2010/main" Requires="p159">
-      <p:transition spd="slow" p14:dur="1200">
-        <p159:morph option="byObject"/>
+    <mc:Choice xmlns:p14="http://schemas.microsoft.com/office/powerpoint/2010/main" Requires="p14">
+      <p:transition spd="med" p14:dur="800">
+        <p:cover dir="l"/>
       </p:transition>
     </mc:Choice>
     <mc:Fallback>
-      <p:transition spd="slow">
-        <p:fade/>
+      <p:transition spd="med">
+        <p:cover dir="l"/>
       </p:transition>
     </mc:Fallback>
   </mc:AlternateContent>
@@ -13256,7 +13256,7 @@
   </p:clrMapOvr>
   <mc:AlternateContent xmlns:mc="http://schemas.openxmlformats.org/markup-compatibility/2006">
     <mc:Choice xmlns:p14="http://schemas.microsoft.com/office/powerpoint/2010/main" Requires="p14">
-      <p:transition spd="med" p14:dur="700">
+      <p:transition spd="med" p14:dur="800">
         <p:push dir="l"/>
       </p:transition>
     </mc:Choice>
@@ -13572,7 +13572,7 @@
   </p:clrMapOvr>
   <mc:AlternateContent xmlns:mc="http://schemas.openxmlformats.org/markup-compatibility/2006">
     <mc:Choice xmlns:p14="http://schemas.microsoft.com/office/powerpoint/2010/main" Requires="p14">
-      <p:transition spd="med" p14:dur="700">
+      <p:transition spd="med" p14:dur="800">
         <p:wipe dir="r"/>
       </p:transition>
     </mc:Choice>
@@ -14865,7 +14865,7 @@
   </p:clrMapOvr>
   <mc:AlternateContent xmlns:mc="http://schemas.openxmlformats.org/markup-compatibility/2006">
     <mc:Choice xmlns:p14="http://schemas.microsoft.com/office/powerpoint/2010/main" Requires="p14">
-      <p:transition spd="med" p14:dur="700">
+      <p:transition spd="med" p14:dur="800">
         <p:push dir="l"/>
       </p:transition>
     </mc:Choice>
@@ -15705,7 +15705,7 @@
   </p:clrMapOvr>
   <mc:AlternateContent xmlns:mc="http://schemas.openxmlformats.org/markup-compatibility/2006">
     <mc:Choice xmlns:p14="http://schemas.microsoft.com/office/powerpoint/2010/main" Requires="p14">
-      <p:transition spd="med" p14:dur="700">
+      <p:transition spd="med" p14:dur="800">
         <p:push dir="l"/>
       </p:transition>
     </mc:Choice>
@@ -16544,14 +16544,14 @@
     <a:masterClrMapping/>
   </p:clrMapOvr>
   <mc:AlternateContent xmlns:mc="http://schemas.openxmlformats.org/markup-compatibility/2006">
-    <mc:Choice xmlns:p159="http://schemas.microsoft.com/office/powerpoint/2015/09/main" xmlns:p14="http://schemas.microsoft.com/office/powerpoint/2010/main" Requires="p159">
-      <p:transition spd="slow" p14:dur="1200">
-        <p159:morph option="byObject"/>
+    <mc:Choice xmlns:p14="http://schemas.microsoft.com/office/powerpoint/2010/main" Requires="p14">
+      <p:transition spd="med" p14:dur="800">
+        <p:push dir="l"/>
       </p:transition>
     </mc:Choice>
     <mc:Fallback>
-      <p:transition spd="slow">
-        <p:fade/>
+      <p:transition spd="med">
+        <p:push dir="l"/>
       </p:transition>
     </mc:Fallback>
   </mc:AlternateContent>
@@ -17384,14 +17384,14 @@
     <a:masterClrMapping/>
   </p:clrMapOvr>
   <mc:AlternateContent xmlns:mc="http://schemas.openxmlformats.org/markup-compatibility/2006">
-    <mc:Choice xmlns:p159="http://schemas.microsoft.com/office/powerpoint/2015/09/main" xmlns:p14="http://schemas.microsoft.com/office/powerpoint/2010/main" Requires="p159">
-      <p:transition spd="slow" p14:dur="1200">
-        <p159:morph option="byObject"/>
+    <mc:Choice xmlns:p14="http://schemas.microsoft.com/office/powerpoint/2010/main" Requires="p14">
+      <p:transition spd="med" p14:dur="800">
+        <p:cover dir="l"/>
       </p:transition>
     </mc:Choice>
     <mc:Fallback>
-      <p:transition spd="slow">
-        <p:fade/>
+      <p:transition spd="med">
+        <p:cover dir="l"/>
       </p:transition>
     </mc:Fallback>
   </mc:AlternateContent>
